--- a/research/ROI_moduli_nanoCAD_short.pptx
+++ b/research/ROI_moduli_nanoCAD_short.pptx
@@ -354,7 +354,7 @@
           <a:solidFill>
             <a:srgbClr val="1A1A1A"/>
           </a:solidFill>
-          <a:latin typeface="Manrope Medium"/>
+          <a:latin typeface="+mn-lt"/>
         </a:defRPr>
       </a:pPr>
       <a:endParaRPr lang="en-US"/>
@@ -597,7 +597,7 @@
           <a:solidFill>
             <a:srgbClr val="1A1A1A"/>
           </a:solidFill>
-          <a:latin typeface="Manrope Medium"/>
+          <a:latin typeface="+mn-lt"/>
         </a:defRPr>
       </a:pPr>
       <a:endParaRPr lang="en-US"/>
@@ -830,7 +830,7 @@
           <a:solidFill>
             <a:srgbClr val="1A1A1A"/>
           </a:solidFill>
-          <a:latin typeface="Manrope Medium"/>
+          <a:latin typeface="+mn-lt"/>
         </a:defRPr>
       </a:pPr>
       <a:endParaRPr lang="en-US"/>
@@ -2025,13 +2025,13 @@
                 <a:spcPct val="90000"/>
               </a:lnSpc>
               <a:buNone/>
-              <a:defRPr lang="ru-RU" sz="6000" b="0" u="none" strike="noStrike">
+              <a:defRPr lang="ru-RU" sz="6000" b="1" u="none" strike="noStrike">
                 <a:solidFill>
                   <a:schemeClr val="dk1"/>
                 </a:solidFill>
                 <a:effectLst/>
                 <a:uFillTx/>
-                <a:latin typeface="Aptos Display"/>
+                <a:latin typeface="+mj-lt"/>
               </a:defRPr>
             </a:lvl1pPr>
           </a:lstStyle>
@@ -2043,23 +2043,23 @@
               <a:buNone/>
             </a:pPr>
             <a:r>
-              <a:rPr lang="ru-RU" sz="6000" b="0" u="none" strike="noStrike">
+              <a:rPr lang="ru-RU" sz="6000" b="1" u="none" strike="noStrike">
                 <a:solidFill>
                   <a:schemeClr val="dk1"/>
                 </a:solidFill>
                 <a:effectLst/>
                 <a:uFillTx/>
-                <a:latin typeface="Aptos Display"/>
+                <a:latin typeface="+mj-lt"/>
               </a:rPr>
               <a:t>Образец заголовка</a:t>
             </a:r>
-            <a:endParaRPr lang="ru-RU" sz="6000" b="0" u="none" strike="noStrike">
+            <a:endParaRPr lang="ru-RU" sz="6000" b="1" u="none" strike="noStrike">
               <a:solidFill>
                 <a:schemeClr val="dk1"/>
               </a:solidFill>
               <a:effectLst/>
               <a:uFillTx/>
-              <a:latin typeface="Aptos Display"/>
+              <a:latin typeface="+mj-lt"/>
             </a:endParaRPr>
           </a:p>
         </p:txBody>
@@ -2105,7 +2105,7 @@
                 </a:solidFill>
                 <a:effectLst/>
                 <a:uFillTx/>
-                <a:latin typeface="Aptos"/>
+                <a:latin typeface="+mn-lt"/>
               </a:defRPr>
             </a:lvl1pPr>
           </a:lstStyle>
@@ -2125,7 +2125,7 @@
                 </a:solidFill>
                 <a:effectLst/>
                 <a:uFillTx/>
-                <a:latin typeface="Aptos"/>
+                <a:latin typeface="+mn-lt"/>
               </a:rPr>
               <a:t> </a:t>
             </a:r>
@@ -2135,7 +2135,7 @@
               </a:solidFill>
               <a:effectLst/>
               <a:uFillTx/>
-              <a:latin typeface="Times New Roman"/>
+              <a:latin typeface="+mn-lt"/>
             </a:endParaRPr>
           </a:p>
         </p:txBody>
@@ -2176,7 +2176,7 @@
                 </a:solidFill>
                 <a:effectLst/>
                 <a:uFillTx/>
-                <a:latin typeface="Times New Roman"/>
+                <a:latin typeface="+mn-lt"/>
               </a:defRPr>
             </a:lvl1pPr>
           </a:lstStyle>
@@ -2191,7 +2191,7 @@
                 </a:solidFill>
                 <a:effectLst/>
                 <a:uFillTx/>
-                <a:latin typeface="Times New Roman"/>
+                <a:latin typeface="+mn-lt"/>
               </a:rPr>
               <a:t> </a:t>
             </a:r>
@@ -2201,7 +2201,7 @@
               </a:solidFill>
               <a:effectLst/>
               <a:uFillTx/>
-              <a:latin typeface="Times New Roman"/>
+              <a:latin typeface="+mn-lt"/>
             </a:endParaRPr>
           </a:p>
         </p:txBody>
@@ -2247,7 +2247,7 @@
                 </a:solidFill>
                 <a:effectLst/>
                 <a:uFillTx/>
-                <a:latin typeface="Aptos"/>
+                <a:latin typeface="+mn-lt"/>
               </a:defRPr>
             </a:lvl1pPr>
           </a:lstStyle>
@@ -2267,7 +2267,7 @@
                 </a:solidFill>
                 <a:effectLst/>
                 <a:uFillTx/>
-                <a:latin typeface="Aptos"/>
+                <a:latin typeface="+mn-lt"/>
               </a:rPr>
               <a:t>10</a:t>
             </a:fld>
@@ -2277,7 +2277,7 @@
               </a:solidFill>
               <a:effectLst/>
               <a:uFillTx/>
-              <a:latin typeface="Times New Roman"/>
+              <a:latin typeface="+mn-lt"/>
             </a:endParaRPr>
           </a:p>
         </p:txBody>
@@ -2355,7 +2355,7 @@
                 </a:solidFill>
                 <a:effectLst/>
                 <a:uFillTx/>
-                <a:latin typeface="Aptos"/>
+                <a:latin typeface="+mn-lt"/>
               </a:defRPr>
             </a:lvl1pPr>
           </a:lstStyle>
@@ -2375,7 +2375,7 @@
                 </a:solidFill>
                 <a:effectLst/>
                 <a:uFillTx/>
-                <a:latin typeface="Aptos"/>
+                <a:latin typeface="+mn-lt"/>
               </a:rPr>
               <a:t>&lt;date/time&gt;</a:t>
             </a:r>
@@ -2385,7 +2385,7 @@
               </a:solidFill>
               <a:effectLst/>
               <a:uFillTx/>
-              <a:latin typeface="Times New Roman"/>
+              <a:latin typeface="+mn-lt"/>
             </a:endParaRPr>
           </a:p>
         </p:txBody>
@@ -2426,7 +2426,7 @@
                 </a:solidFill>
                 <a:effectLst/>
                 <a:uFillTx/>
-                <a:latin typeface="Times New Roman"/>
+                <a:latin typeface="+mn-lt"/>
               </a:defRPr>
             </a:lvl1pPr>
           </a:lstStyle>
@@ -2441,7 +2441,7 @@
                 </a:solidFill>
                 <a:effectLst/>
                 <a:uFillTx/>
-                <a:latin typeface="Times New Roman"/>
+                <a:latin typeface="+mn-lt"/>
               </a:rPr>
               <a:t>&lt;footer&gt;</a:t>
             </a:r>
@@ -2451,7 +2451,7 @@
               </a:solidFill>
               <a:effectLst/>
               <a:uFillTx/>
-              <a:latin typeface="Times New Roman"/>
+              <a:latin typeface="+mn-lt"/>
             </a:endParaRPr>
           </a:p>
         </p:txBody>
@@ -2497,7 +2497,7 @@
                 </a:solidFill>
                 <a:effectLst/>
                 <a:uFillTx/>
-                <a:latin typeface="Aptos"/>
+                <a:latin typeface="+mn-lt"/>
               </a:defRPr>
             </a:lvl1pPr>
           </a:lstStyle>
@@ -2517,7 +2517,7 @@
                 </a:solidFill>
                 <a:effectLst/>
                 <a:uFillTx/>
-                <a:latin typeface="Aptos"/>
+                <a:latin typeface="+mn-lt"/>
               </a:rPr>
               <a:t>&lt;number&gt;</a:t>
             </a:fld>
@@ -2527,7 +2527,7 @@
               </a:solidFill>
               <a:effectLst/>
               <a:uFillTx/>
-              <a:latin typeface="Times New Roman"/>
+              <a:latin typeface="+mn-lt"/>
             </a:endParaRPr>
           </a:p>
         </p:txBody>
@@ -2597,13 +2597,13 @@
                 <a:spcPct val="90000"/>
               </a:lnSpc>
               <a:buNone/>
-              <a:defRPr lang="ru-RU" sz="3200" b="0" u="none" strike="noStrike">
+              <a:defRPr lang="ru-RU" sz="3200" b="1" u="none" strike="noStrike">
                 <a:solidFill>
                   <a:schemeClr val="dk1"/>
                 </a:solidFill>
                 <a:effectLst/>
                 <a:uFillTx/>
-                <a:latin typeface="Aptos Display"/>
+                <a:latin typeface="+mj-lt"/>
               </a:defRPr>
             </a:lvl1pPr>
           </a:lstStyle>
@@ -2615,23 +2615,23 @@
               <a:buNone/>
             </a:pPr>
             <a:r>
-              <a:rPr lang="ru-RU" sz="3200" b="0" u="none" strike="noStrike">
+              <a:rPr lang="ru-RU" sz="3200" b="1" u="none" strike="noStrike">
                 <a:solidFill>
                   <a:schemeClr val="dk1"/>
                 </a:solidFill>
                 <a:effectLst/>
                 <a:uFillTx/>
-                <a:latin typeface="Aptos Display"/>
+                <a:latin typeface="+mj-lt"/>
               </a:rPr>
               <a:t>Образец заголовка</a:t>
             </a:r>
-            <a:endParaRPr lang="ru-RU" sz="3200" b="0" u="none" strike="noStrike">
+            <a:endParaRPr lang="ru-RU" sz="3200" b="1" u="none" strike="noStrike">
               <a:solidFill>
                 <a:schemeClr val="dk1"/>
               </a:solidFill>
               <a:effectLst/>
               <a:uFillTx/>
-              <a:latin typeface="Aptos Display"/>
+              <a:latin typeface="+mj-lt"/>
             </a:endParaRPr>
           </a:p>
         </p:txBody>
@@ -2674,7 +2674,7 @@
               <a:buClr>
                 <a:srgbClr val="000000"/>
               </a:buClr>
-              <a:buFont typeface="Arial"/>
+              <a:buFont typeface="Manrope Medium"/>
               <a:buChar char="•"/>
               <a:defRPr lang="ru-RU" sz="3200" b="0" u="none" strike="noStrike">
                 <a:solidFill>
@@ -2682,7 +2682,7 @@
                 </a:solidFill>
                 <a:effectLst/>
                 <a:uFillTx/>
-                <a:latin typeface="Aptos"/>
+                <a:latin typeface="+mn-lt"/>
               </a:defRPr>
             </a:lvl1pPr>
             <a:lvl2pPr lvl="1" algn="l" defTabSz="914400">
@@ -2695,7 +2695,7 @@
               <a:buClr>
                 <a:srgbClr val="000000"/>
               </a:buClr>
-              <a:buFont typeface="Arial"/>
+              <a:buFont typeface="Manrope Medium"/>
               <a:buChar char="•"/>
               <a:defRPr lang="ru-RU" sz="2800" b="0" u="none" strike="noStrike">
                 <a:solidFill>
@@ -2703,7 +2703,7 @@
                 </a:solidFill>
                 <a:effectLst/>
                 <a:uFillTx/>
-                <a:latin typeface="Aptos"/>
+                <a:latin typeface="+mn-lt"/>
               </a:defRPr>
             </a:lvl2pPr>
             <a:lvl3pPr lvl="2" algn="l" defTabSz="914400">
@@ -2716,7 +2716,7 @@
               <a:buClr>
                 <a:srgbClr val="000000"/>
               </a:buClr>
-              <a:buFont typeface="Arial"/>
+              <a:buFont typeface="Manrope Medium"/>
               <a:buChar char="•"/>
               <a:defRPr lang="ru-RU" sz="2400" b="0" u="none" strike="noStrike">
                 <a:solidFill>
@@ -2724,7 +2724,7 @@
                 </a:solidFill>
                 <a:effectLst/>
                 <a:uFillTx/>
-                <a:latin typeface="Aptos"/>
+                <a:latin typeface="+mn-lt"/>
               </a:defRPr>
             </a:lvl3pPr>
             <a:lvl4pPr lvl="3" algn="l" defTabSz="914400">
@@ -2737,7 +2737,7 @@
               <a:buClr>
                 <a:srgbClr val="000000"/>
               </a:buClr>
-              <a:buFont typeface="Arial"/>
+              <a:buFont typeface="Manrope Medium"/>
               <a:buChar char="•"/>
               <a:defRPr lang="ru-RU" sz="2000" b="0" u="none" strike="noStrike">
                 <a:solidFill>
@@ -2745,7 +2745,7 @@
                 </a:solidFill>
                 <a:effectLst/>
                 <a:uFillTx/>
-                <a:latin typeface="Aptos"/>
+                <a:latin typeface="+mn-lt"/>
               </a:defRPr>
             </a:lvl4pPr>
             <a:lvl5pPr lvl="4" algn="l" defTabSz="914400">
@@ -2758,7 +2758,7 @@
               <a:buClr>
                 <a:srgbClr val="000000"/>
               </a:buClr>
-              <a:buFont typeface="Arial"/>
+              <a:buFont typeface="Manrope Medium"/>
               <a:buChar char="•"/>
               <a:defRPr lang="ru-RU" sz="2000" b="0" u="none" strike="noStrike">
                 <a:solidFill>
@@ -2766,7 +2766,7 @@
                 </a:solidFill>
                 <a:effectLst/>
                 <a:uFillTx/>
-                <a:latin typeface="Aptos"/>
+                <a:latin typeface="+mn-lt"/>
               </a:defRPr>
             </a:lvl5pPr>
           </a:lstStyle>
@@ -2781,7 +2781,7 @@
               <a:buClr>
                 <a:srgbClr val="000000"/>
               </a:buClr>
-              <a:buFont typeface="Arial"/>
+              <a:buFont typeface="Manrope Medium"/>
               <a:buChar char="•"/>
             </a:pPr>
             <a:r>
@@ -2791,7 +2791,7 @@
                 </a:solidFill>
                 <a:effectLst/>
                 <a:uFillTx/>
-                <a:latin typeface="Aptos"/>
+                <a:latin typeface="+mn-lt"/>
               </a:rPr>
               <a:t>Образец текста</a:t>
             </a:r>
@@ -2801,7 +2801,7 @@
               </a:solidFill>
               <a:effectLst/>
               <a:uFillTx/>
-              <a:latin typeface="Aptos"/>
+              <a:latin typeface="+mn-lt"/>
             </a:endParaRPr>
           </a:p>
           <a:p>
@@ -2815,7 +2815,7 @@
               <a:buClr>
                 <a:srgbClr val="000000"/>
               </a:buClr>
-              <a:buFont typeface="Arial"/>
+              <a:buFont typeface="Manrope Medium"/>
               <a:buChar char="•"/>
             </a:pPr>
             <a:r>
@@ -2825,7 +2825,7 @@
                 </a:solidFill>
                 <a:effectLst/>
                 <a:uFillTx/>
-                <a:latin typeface="Aptos"/>
+                <a:latin typeface="+mn-lt"/>
               </a:rPr>
               <a:t>Второй уровень</a:t>
             </a:r>
@@ -2835,7 +2835,7 @@
               </a:solidFill>
               <a:effectLst/>
               <a:uFillTx/>
-              <a:latin typeface="Aptos"/>
+              <a:latin typeface="+mn-lt"/>
             </a:endParaRPr>
           </a:p>
           <a:p>
@@ -2849,7 +2849,7 @@
               <a:buClr>
                 <a:srgbClr val="000000"/>
               </a:buClr>
-              <a:buFont typeface="Arial"/>
+              <a:buFont typeface="Manrope Medium"/>
               <a:buChar char="•"/>
             </a:pPr>
             <a:r>
@@ -2859,7 +2859,7 @@
                 </a:solidFill>
                 <a:effectLst/>
                 <a:uFillTx/>
-                <a:latin typeface="Aptos"/>
+                <a:latin typeface="+mn-lt"/>
               </a:rPr>
               <a:t>Третий уровень</a:t>
             </a:r>
@@ -2869,7 +2869,7 @@
               </a:solidFill>
               <a:effectLst/>
               <a:uFillTx/>
-              <a:latin typeface="Aptos"/>
+              <a:latin typeface="+mn-lt"/>
             </a:endParaRPr>
           </a:p>
           <a:p>
@@ -2883,7 +2883,7 @@
               <a:buClr>
                 <a:srgbClr val="000000"/>
               </a:buClr>
-              <a:buFont typeface="Arial"/>
+              <a:buFont typeface="Manrope Medium"/>
               <a:buChar char="•"/>
             </a:pPr>
             <a:r>
@@ -2893,7 +2893,7 @@
                 </a:solidFill>
                 <a:effectLst/>
                 <a:uFillTx/>
-                <a:latin typeface="Aptos"/>
+                <a:latin typeface="+mn-lt"/>
               </a:rPr>
               <a:t>Четвертый уровень</a:t>
             </a:r>
@@ -2903,7 +2903,7 @@
               </a:solidFill>
               <a:effectLst/>
               <a:uFillTx/>
-              <a:latin typeface="Aptos"/>
+              <a:latin typeface="+mn-lt"/>
             </a:endParaRPr>
           </a:p>
           <a:p>
@@ -2917,7 +2917,7 @@
               <a:buClr>
                 <a:srgbClr val="000000"/>
               </a:buClr>
-              <a:buFont typeface="Arial"/>
+              <a:buFont typeface="Manrope Medium"/>
               <a:buChar char="•"/>
             </a:pPr>
             <a:r>
@@ -2927,7 +2927,7 @@
                 </a:solidFill>
                 <a:effectLst/>
                 <a:uFillTx/>
-                <a:latin typeface="Aptos"/>
+                <a:latin typeface="+mn-lt"/>
               </a:rPr>
               <a:t>Пятый уровень</a:t>
             </a:r>
@@ -2937,7 +2937,7 @@
               </a:solidFill>
               <a:effectLst/>
               <a:uFillTx/>
-              <a:latin typeface="Aptos"/>
+              <a:latin typeface="+mn-lt"/>
             </a:endParaRPr>
           </a:p>
         </p:txBody>
@@ -2987,7 +2987,7 @@
                 </a:solidFill>
                 <a:effectLst/>
                 <a:uFillTx/>
-                <a:latin typeface="Aptos"/>
+                <a:latin typeface="+mn-lt"/>
               </a:defRPr>
             </a:lvl1pPr>
           </a:lstStyle>
@@ -3011,7 +3011,7 @@
                 </a:solidFill>
                 <a:effectLst/>
                 <a:uFillTx/>
-                <a:latin typeface="Aptos"/>
+                <a:latin typeface="+mn-lt"/>
               </a:rPr>
               <a:t>Образец текста</a:t>
             </a:r>
@@ -3021,7 +3021,7 @@
               </a:solidFill>
               <a:effectLst/>
               <a:uFillTx/>
-              <a:latin typeface="Aptos"/>
+              <a:latin typeface="+mn-lt"/>
             </a:endParaRPr>
           </a:p>
         </p:txBody>
@@ -3067,7 +3067,7 @@
                 </a:solidFill>
                 <a:effectLst/>
                 <a:uFillTx/>
-                <a:latin typeface="Aptos"/>
+                <a:latin typeface="+mn-lt"/>
               </a:defRPr>
             </a:lvl1pPr>
           </a:lstStyle>
@@ -3087,7 +3087,7 @@
                 </a:solidFill>
                 <a:effectLst/>
                 <a:uFillTx/>
-                <a:latin typeface="Aptos"/>
+                <a:latin typeface="+mn-lt"/>
               </a:rPr>
               <a:t>&lt;date/time&gt;</a:t>
             </a:r>
@@ -3097,7 +3097,7 @@
               </a:solidFill>
               <a:effectLst/>
               <a:uFillTx/>
-              <a:latin typeface="Times New Roman"/>
+              <a:latin typeface="+mn-lt"/>
             </a:endParaRPr>
           </a:p>
         </p:txBody>
@@ -3138,7 +3138,7 @@
                 </a:solidFill>
                 <a:effectLst/>
                 <a:uFillTx/>
-                <a:latin typeface="Times New Roman"/>
+                <a:latin typeface="+mn-lt"/>
               </a:defRPr>
             </a:lvl1pPr>
           </a:lstStyle>
@@ -3153,7 +3153,7 @@
                 </a:solidFill>
                 <a:effectLst/>
                 <a:uFillTx/>
-                <a:latin typeface="Times New Roman"/>
+                <a:latin typeface="+mn-lt"/>
               </a:rPr>
               <a:t>&lt;footer&gt;</a:t>
             </a:r>
@@ -3163,7 +3163,7 @@
               </a:solidFill>
               <a:effectLst/>
               <a:uFillTx/>
-              <a:latin typeface="Times New Roman"/>
+              <a:latin typeface="+mn-lt"/>
             </a:endParaRPr>
           </a:p>
         </p:txBody>
@@ -3209,7 +3209,7 @@
                 </a:solidFill>
                 <a:effectLst/>
                 <a:uFillTx/>
-                <a:latin typeface="Aptos"/>
+                <a:latin typeface="+mn-lt"/>
               </a:defRPr>
             </a:lvl1pPr>
           </a:lstStyle>
@@ -3229,7 +3229,7 @@
                 </a:solidFill>
                 <a:effectLst/>
                 <a:uFillTx/>
-                <a:latin typeface="Aptos"/>
+                <a:latin typeface="+mn-lt"/>
               </a:rPr>
               <a:t>&lt;number&gt;</a:t>
             </a:fld>
@@ -3239,7 +3239,7 @@
               </a:solidFill>
               <a:effectLst/>
               <a:uFillTx/>
-              <a:latin typeface="Times New Roman"/>
+              <a:latin typeface="+mn-lt"/>
             </a:endParaRPr>
           </a:p>
         </p:txBody>
@@ -3309,13 +3309,13 @@
                 <a:spcPct val="90000"/>
               </a:lnSpc>
               <a:buNone/>
-              <a:defRPr lang="ru-RU" sz="3200" b="0" u="none" strike="noStrike">
+              <a:defRPr lang="ru-RU" sz="3200" b="1" u="none" strike="noStrike">
                 <a:solidFill>
                   <a:schemeClr val="dk1"/>
                 </a:solidFill>
                 <a:effectLst/>
                 <a:uFillTx/>
-                <a:latin typeface="Aptos Display"/>
+                <a:latin typeface="+mj-lt"/>
               </a:defRPr>
             </a:lvl1pPr>
           </a:lstStyle>
@@ -3327,23 +3327,23 @@
               <a:buNone/>
             </a:pPr>
             <a:r>
-              <a:rPr lang="ru-RU" sz="3200" b="0" u="none" strike="noStrike">
+              <a:rPr lang="ru-RU" sz="3200" b="1" u="none" strike="noStrike">
                 <a:solidFill>
                   <a:schemeClr val="dk1"/>
                 </a:solidFill>
                 <a:effectLst/>
                 <a:uFillTx/>
-                <a:latin typeface="Aptos Display"/>
+                <a:latin typeface="+mj-lt"/>
               </a:rPr>
               <a:t>Образец заголовка</a:t>
             </a:r>
-            <a:endParaRPr lang="ru-RU" sz="3200" b="0" u="none" strike="noStrike">
+            <a:endParaRPr lang="ru-RU" sz="3200" b="1" u="none" strike="noStrike">
               <a:solidFill>
                 <a:schemeClr val="dk1"/>
               </a:solidFill>
               <a:effectLst/>
               <a:uFillTx/>
-              <a:latin typeface="Aptos Display"/>
+              <a:latin typeface="+mj-lt"/>
             </a:endParaRPr>
           </a:p>
         </p:txBody>
@@ -3386,7 +3386,7 @@
                 </a:solidFill>
                 <a:effectLst/>
                 <a:uFillTx/>
-                <a:latin typeface="Arial"/>
+                <a:latin typeface="+mn-lt"/>
               </a:rPr>
               <a:t>Double-click to add an Image</a:t>
             </a:r>
@@ -3396,7 +3396,7 @@
               </a:solidFill>
               <a:effectLst/>
               <a:uFillTx/>
-              <a:latin typeface="Arial"/>
+              <a:latin typeface="+mn-lt"/>
             </a:endParaRPr>
           </a:p>
         </p:txBody>
@@ -3446,7 +3446,7 @@
                 </a:solidFill>
                 <a:effectLst/>
                 <a:uFillTx/>
-                <a:latin typeface="Aptos"/>
+                <a:latin typeface="+mn-lt"/>
               </a:defRPr>
             </a:lvl1pPr>
           </a:lstStyle>
@@ -3470,7 +3470,7 @@
                 </a:solidFill>
                 <a:effectLst/>
                 <a:uFillTx/>
-                <a:latin typeface="Aptos"/>
+                <a:latin typeface="+mn-lt"/>
               </a:rPr>
               <a:t>Образец текста</a:t>
             </a:r>
@@ -3480,7 +3480,7 @@
               </a:solidFill>
               <a:effectLst/>
               <a:uFillTx/>
-              <a:latin typeface="Aptos"/>
+              <a:latin typeface="+mn-lt"/>
             </a:endParaRPr>
           </a:p>
         </p:txBody>
@@ -3526,7 +3526,7 @@
                 </a:solidFill>
                 <a:effectLst/>
                 <a:uFillTx/>
-                <a:latin typeface="Aptos"/>
+                <a:latin typeface="+mn-lt"/>
               </a:defRPr>
             </a:lvl1pPr>
           </a:lstStyle>
@@ -3546,7 +3546,7 @@
                 </a:solidFill>
                 <a:effectLst/>
                 <a:uFillTx/>
-                <a:latin typeface="Aptos"/>
+                <a:latin typeface="+mn-lt"/>
               </a:rPr>
               <a:t>&lt;date/time&gt;</a:t>
             </a:r>
@@ -3556,7 +3556,7 @@
               </a:solidFill>
               <a:effectLst/>
               <a:uFillTx/>
-              <a:latin typeface="Times New Roman"/>
+              <a:latin typeface="+mn-lt"/>
             </a:endParaRPr>
           </a:p>
         </p:txBody>
@@ -3597,7 +3597,7 @@
                 </a:solidFill>
                 <a:effectLst/>
                 <a:uFillTx/>
-                <a:latin typeface="Times New Roman"/>
+                <a:latin typeface="+mn-lt"/>
               </a:defRPr>
             </a:lvl1pPr>
           </a:lstStyle>
@@ -3612,7 +3612,7 @@
                 </a:solidFill>
                 <a:effectLst/>
                 <a:uFillTx/>
-                <a:latin typeface="Times New Roman"/>
+                <a:latin typeface="+mn-lt"/>
               </a:rPr>
               <a:t>&lt;footer&gt;</a:t>
             </a:r>
@@ -3622,7 +3622,7 @@
               </a:solidFill>
               <a:effectLst/>
               <a:uFillTx/>
-              <a:latin typeface="Times New Roman"/>
+              <a:latin typeface="+mn-lt"/>
             </a:endParaRPr>
           </a:p>
         </p:txBody>
@@ -3668,7 +3668,7 @@
                 </a:solidFill>
                 <a:effectLst/>
                 <a:uFillTx/>
-                <a:latin typeface="Aptos"/>
+                <a:latin typeface="+mn-lt"/>
               </a:defRPr>
             </a:lvl1pPr>
           </a:lstStyle>
@@ -3688,7 +3688,7 @@
                 </a:solidFill>
                 <a:effectLst/>
                 <a:uFillTx/>
-                <a:latin typeface="Aptos"/>
+                <a:latin typeface="+mn-lt"/>
               </a:rPr>
               <a:t>&lt;number&gt;</a:t>
             </a:fld>
@@ -3698,7 +3698,7 @@
               </a:solidFill>
               <a:effectLst/>
               <a:uFillTx/>
-              <a:latin typeface="Times New Roman"/>
+              <a:latin typeface="+mn-lt"/>
             </a:endParaRPr>
           </a:p>
         </p:txBody>
@@ -3768,13 +3768,13 @@
                 <a:spcPct val="90000"/>
               </a:lnSpc>
               <a:buNone/>
-              <a:defRPr lang="ru-RU" sz="4400" b="0" u="none" strike="noStrike">
+              <a:defRPr lang="ru-RU" sz="4400" b="1" u="none" strike="noStrike">
                 <a:solidFill>
                   <a:schemeClr val="dk1"/>
                 </a:solidFill>
                 <a:effectLst/>
                 <a:uFillTx/>
-                <a:latin typeface="Aptos Display"/>
+                <a:latin typeface="+mj-lt"/>
               </a:defRPr>
             </a:lvl1pPr>
           </a:lstStyle>
@@ -3786,23 +3786,23 @@
               <a:buNone/>
             </a:pPr>
             <a:r>
-              <a:rPr lang="ru-RU" sz="4400" b="0" u="none" strike="noStrike">
+              <a:rPr lang="ru-RU" sz="4400" b="1" u="none" strike="noStrike">
                 <a:solidFill>
                   <a:schemeClr val="dk1"/>
                 </a:solidFill>
                 <a:effectLst/>
                 <a:uFillTx/>
-                <a:latin typeface="Aptos Display"/>
+                <a:latin typeface="+mj-lt"/>
               </a:rPr>
               <a:t>Образец заголовка</a:t>
             </a:r>
-            <a:endParaRPr lang="ru-RU" sz="4400" b="0" u="none" strike="noStrike">
+            <a:endParaRPr lang="ru-RU" sz="4400" b="1" u="none" strike="noStrike">
               <a:solidFill>
                 <a:schemeClr val="dk1"/>
               </a:solidFill>
               <a:effectLst/>
               <a:uFillTx/>
-              <a:latin typeface="Aptos Display"/>
+              <a:latin typeface="+mj-lt"/>
             </a:endParaRPr>
           </a:p>
         </p:txBody>
@@ -3845,7 +3845,7 @@
               <a:buClr>
                 <a:srgbClr val="000000"/>
               </a:buClr>
-              <a:buFont typeface="Arial"/>
+              <a:buFont typeface="Manrope Medium"/>
               <a:buChar char="•"/>
               <a:defRPr lang="ru-RU" sz="2800" b="0" u="none" strike="noStrike">
                 <a:solidFill>
@@ -3853,7 +3853,7 @@
                 </a:solidFill>
                 <a:effectLst/>
                 <a:uFillTx/>
-                <a:latin typeface="Aptos"/>
+                <a:latin typeface="+mn-lt"/>
               </a:defRPr>
             </a:lvl1pPr>
             <a:lvl2pPr lvl="1" algn="l" defTabSz="914400">
@@ -3866,7 +3866,7 @@
               <a:buClr>
                 <a:srgbClr val="000000"/>
               </a:buClr>
-              <a:buFont typeface="Arial"/>
+              <a:buFont typeface="Manrope Medium"/>
               <a:buChar char="•"/>
               <a:defRPr lang="ru-RU" sz="2400" b="0" u="none" strike="noStrike">
                 <a:solidFill>
@@ -3874,7 +3874,7 @@
                 </a:solidFill>
                 <a:effectLst/>
                 <a:uFillTx/>
-                <a:latin typeface="Aptos"/>
+                <a:latin typeface="+mn-lt"/>
               </a:defRPr>
             </a:lvl2pPr>
             <a:lvl3pPr lvl="2" algn="l" defTabSz="914400">
@@ -3887,7 +3887,7 @@
               <a:buClr>
                 <a:srgbClr val="000000"/>
               </a:buClr>
-              <a:buFont typeface="Arial"/>
+              <a:buFont typeface="Manrope Medium"/>
               <a:buChar char="•"/>
               <a:defRPr lang="ru-RU" sz="2000" b="0" u="none" strike="noStrike">
                 <a:solidFill>
@@ -3895,7 +3895,7 @@
                 </a:solidFill>
                 <a:effectLst/>
                 <a:uFillTx/>
-                <a:latin typeface="Aptos"/>
+                <a:latin typeface="+mn-lt"/>
               </a:defRPr>
             </a:lvl3pPr>
             <a:lvl4pPr lvl="3" algn="l" defTabSz="914400">
@@ -3908,7 +3908,7 @@
               <a:buClr>
                 <a:srgbClr val="000000"/>
               </a:buClr>
-              <a:buFont typeface="Arial"/>
+              <a:buFont typeface="Manrope Medium"/>
               <a:buChar char="•"/>
               <a:defRPr lang="ru-RU" sz="1800" b="0" u="none" strike="noStrike">
                 <a:solidFill>
@@ -3916,7 +3916,7 @@
                 </a:solidFill>
                 <a:effectLst/>
                 <a:uFillTx/>
-                <a:latin typeface="Aptos"/>
+                <a:latin typeface="+mn-lt"/>
               </a:defRPr>
             </a:lvl4pPr>
             <a:lvl5pPr lvl="4" algn="l" defTabSz="914400">
@@ -3929,7 +3929,7 @@
               <a:buClr>
                 <a:srgbClr val="000000"/>
               </a:buClr>
-              <a:buFont typeface="Arial"/>
+              <a:buFont typeface="Manrope Medium"/>
               <a:buChar char="•"/>
               <a:defRPr lang="ru-RU" sz="1800" b="0" u="none" strike="noStrike">
                 <a:solidFill>
@@ -3937,7 +3937,7 @@
                 </a:solidFill>
                 <a:effectLst/>
                 <a:uFillTx/>
-                <a:latin typeface="Aptos"/>
+                <a:latin typeface="+mn-lt"/>
               </a:defRPr>
             </a:lvl5pPr>
           </a:lstStyle>
@@ -3952,7 +3952,7 @@
               <a:buClr>
                 <a:srgbClr val="000000"/>
               </a:buClr>
-              <a:buFont typeface="Arial"/>
+              <a:buFont typeface="Manrope Medium"/>
               <a:buChar char="•"/>
             </a:pPr>
             <a:r>
@@ -3962,7 +3962,7 @@
                 </a:solidFill>
                 <a:effectLst/>
                 <a:uFillTx/>
-                <a:latin typeface="Aptos"/>
+                <a:latin typeface="+mn-lt"/>
               </a:rPr>
               <a:t>Образец текста</a:t>
             </a:r>
@@ -3972,7 +3972,7 @@
               </a:solidFill>
               <a:effectLst/>
               <a:uFillTx/>
-              <a:latin typeface="Aptos"/>
+              <a:latin typeface="+mn-lt"/>
             </a:endParaRPr>
           </a:p>
           <a:p>
@@ -3986,7 +3986,7 @@
               <a:buClr>
                 <a:srgbClr val="000000"/>
               </a:buClr>
-              <a:buFont typeface="Arial"/>
+              <a:buFont typeface="Manrope Medium"/>
               <a:buChar char="•"/>
             </a:pPr>
             <a:r>
@@ -3996,7 +3996,7 @@
                 </a:solidFill>
                 <a:effectLst/>
                 <a:uFillTx/>
-                <a:latin typeface="Aptos"/>
+                <a:latin typeface="+mn-lt"/>
               </a:rPr>
               <a:t>Второй уровень</a:t>
             </a:r>
@@ -4006,7 +4006,7 @@
               </a:solidFill>
               <a:effectLst/>
               <a:uFillTx/>
-              <a:latin typeface="Aptos"/>
+              <a:latin typeface="+mn-lt"/>
             </a:endParaRPr>
           </a:p>
           <a:p>
@@ -4020,7 +4020,7 @@
               <a:buClr>
                 <a:srgbClr val="000000"/>
               </a:buClr>
-              <a:buFont typeface="Arial"/>
+              <a:buFont typeface="Manrope Medium"/>
               <a:buChar char="•"/>
             </a:pPr>
             <a:r>
@@ -4030,7 +4030,7 @@
                 </a:solidFill>
                 <a:effectLst/>
                 <a:uFillTx/>
-                <a:latin typeface="Aptos"/>
+                <a:latin typeface="+mn-lt"/>
               </a:rPr>
               <a:t>Третий уровень</a:t>
             </a:r>
@@ -4040,7 +4040,7 @@
               </a:solidFill>
               <a:effectLst/>
               <a:uFillTx/>
-              <a:latin typeface="Aptos"/>
+              <a:latin typeface="+mn-lt"/>
             </a:endParaRPr>
           </a:p>
           <a:p>
@@ -4054,7 +4054,7 @@
               <a:buClr>
                 <a:srgbClr val="000000"/>
               </a:buClr>
-              <a:buFont typeface="Arial"/>
+              <a:buFont typeface="Manrope Medium"/>
               <a:buChar char="•"/>
             </a:pPr>
             <a:r>
@@ -4064,7 +4064,7 @@
                 </a:solidFill>
                 <a:effectLst/>
                 <a:uFillTx/>
-                <a:latin typeface="Aptos"/>
+                <a:latin typeface="+mn-lt"/>
               </a:rPr>
               <a:t>Четвертый уровень</a:t>
             </a:r>
@@ -4074,7 +4074,7 @@
               </a:solidFill>
               <a:effectLst/>
               <a:uFillTx/>
-              <a:latin typeface="Aptos"/>
+              <a:latin typeface="+mn-lt"/>
             </a:endParaRPr>
           </a:p>
           <a:p>
@@ -4088,7 +4088,7 @@
               <a:buClr>
                 <a:srgbClr val="000000"/>
               </a:buClr>
-              <a:buFont typeface="Arial"/>
+              <a:buFont typeface="Manrope Medium"/>
               <a:buChar char="•"/>
             </a:pPr>
             <a:r>
@@ -4098,7 +4098,7 @@
                 </a:solidFill>
                 <a:effectLst/>
                 <a:uFillTx/>
-                <a:latin typeface="Aptos"/>
+                <a:latin typeface="+mn-lt"/>
               </a:rPr>
               <a:t>Пятый уровень</a:t>
             </a:r>
@@ -4108,7 +4108,7 @@
               </a:solidFill>
               <a:effectLst/>
               <a:uFillTx/>
-              <a:latin typeface="Aptos"/>
+              <a:latin typeface="+mn-lt"/>
             </a:endParaRPr>
           </a:p>
         </p:txBody>
@@ -4154,7 +4154,7 @@
                 </a:solidFill>
                 <a:effectLst/>
                 <a:uFillTx/>
-                <a:latin typeface="Aptos"/>
+                <a:latin typeface="+mn-lt"/>
               </a:defRPr>
             </a:lvl1pPr>
           </a:lstStyle>
@@ -4174,7 +4174,7 @@
                 </a:solidFill>
                 <a:effectLst/>
                 <a:uFillTx/>
-                <a:latin typeface="Aptos"/>
+                <a:latin typeface="+mn-lt"/>
               </a:rPr>
               <a:t> </a:t>
             </a:r>
@@ -4184,7 +4184,7 @@
               </a:solidFill>
               <a:effectLst/>
               <a:uFillTx/>
-              <a:latin typeface="Times New Roman"/>
+              <a:latin typeface="+mn-lt"/>
             </a:endParaRPr>
           </a:p>
         </p:txBody>
@@ -4225,7 +4225,7 @@
                 </a:solidFill>
                 <a:effectLst/>
                 <a:uFillTx/>
-                <a:latin typeface="Times New Roman"/>
+                <a:latin typeface="+mn-lt"/>
               </a:defRPr>
             </a:lvl1pPr>
           </a:lstStyle>
@@ -4240,7 +4240,7 @@
                 </a:solidFill>
                 <a:effectLst/>
                 <a:uFillTx/>
-                <a:latin typeface="Times New Roman"/>
+                <a:latin typeface="+mn-lt"/>
               </a:rPr>
               <a:t> </a:t>
             </a:r>
@@ -4250,7 +4250,7 @@
               </a:solidFill>
               <a:effectLst/>
               <a:uFillTx/>
-              <a:latin typeface="Times New Roman"/>
+              <a:latin typeface="+mn-lt"/>
             </a:endParaRPr>
           </a:p>
         </p:txBody>
@@ -4296,7 +4296,7 @@
                 </a:solidFill>
                 <a:effectLst/>
                 <a:uFillTx/>
-                <a:latin typeface="Aptos"/>
+                <a:latin typeface="+mn-lt"/>
               </a:defRPr>
             </a:lvl1pPr>
           </a:lstStyle>
@@ -4316,7 +4316,7 @@
                 </a:solidFill>
                 <a:effectLst/>
                 <a:uFillTx/>
-                <a:latin typeface="Aptos"/>
+                <a:latin typeface="+mn-lt"/>
               </a:rPr>
               <a:t>10</a:t>
             </a:fld>
@@ -4326,7 +4326,7 @@
               </a:solidFill>
               <a:effectLst/>
               <a:uFillTx/>
-              <a:latin typeface="Times New Roman"/>
+              <a:latin typeface="+mn-lt"/>
             </a:endParaRPr>
           </a:p>
         </p:txBody>
@@ -4396,13 +4396,13 @@
                 <a:spcPct val="90000"/>
               </a:lnSpc>
               <a:buNone/>
-              <a:defRPr lang="ru-RU" sz="4400" b="0" u="none" strike="noStrike">
+              <a:defRPr lang="ru-RU" sz="4400" b="1" u="none" strike="noStrike">
                 <a:solidFill>
                   <a:schemeClr val="dk1"/>
                 </a:solidFill>
                 <a:effectLst/>
                 <a:uFillTx/>
-                <a:latin typeface="Aptos Display"/>
+                <a:latin typeface="+mj-lt"/>
               </a:defRPr>
             </a:lvl1pPr>
           </a:lstStyle>
@@ -4414,23 +4414,23 @@
               <a:buNone/>
             </a:pPr>
             <a:r>
-              <a:rPr lang="ru-RU" sz="4400" b="0" u="none" strike="noStrike">
+              <a:rPr lang="ru-RU" sz="4400" b="1" u="none" strike="noStrike">
                 <a:solidFill>
                   <a:schemeClr val="dk1"/>
                 </a:solidFill>
                 <a:effectLst/>
                 <a:uFillTx/>
-                <a:latin typeface="Aptos Display"/>
+                <a:latin typeface="+mj-lt"/>
               </a:rPr>
               <a:t>Образец заголовка</a:t>
             </a:r>
-            <a:endParaRPr lang="ru-RU" sz="4400" b="0" u="none" strike="noStrike">
+            <a:endParaRPr lang="ru-RU" sz="4400" b="1" u="none" strike="noStrike">
               <a:solidFill>
                 <a:schemeClr val="dk1"/>
               </a:solidFill>
               <a:effectLst/>
               <a:uFillTx/>
-              <a:latin typeface="Aptos Display"/>
+              <a:latin typeface="+mj-lt"/>
             </a:endParaRPr>
           </a:p>
         </p:txBody>
@@ -4473,7 +4473,7 @@
               <a:buClr>
                 <a:srgbClr val="000000"/>
               </a:buClr>
-              <a:buFont typeface="Arial"/>
+              <a:buFont typeface="Manrope Medium"/>
               <a:buChar char="•"/>
               <a:defRPr lang="ru-RU" sz="2800" b="0" u="none" strike="noStrike">
                 <a:solidFill>
@@ -4481,7 +4481,7 @@
                 </a:solidFill>
                 <a:effectLst/>
                 <a:uFillTx/>
-                <a:latin typeface="Aptos"/>
+                <a:latin typeface="+mn-lt"/>
               </a:defRPr>
             </a:lvl1pPr>
             <a:lvl2pPr lvl="1" algn="l" defTabSz="914400">
@@ -4494,7 +4494,7 @@
               <a:buClr>
                 <a:srgbClr val="000000"/>
               </a:buClr>
-              <a:buFont typeface="Arial"/>
+              <a:buFont typeface="Manrope Medium"/>
               <a:buChar char="•"/>
               <a:defRPr lang="ru-RU" sz="2400" b="0" u="none" strike="noStrike">
                 <a:solidFill>
@@ -4502,7 +4502,7 @@
                 </a:solidFill>
                 <a:effectLst/>
                 <a:uFillTx/>
-                <a:latin typeface="Aptos"/>
+                <a:latin typeface="+mn-lt"/>
               </a:defRPr>
             </a:lvl2pPr>
             <a:lvl3pPr lvl="2" algn="l" defTabSz="914400">
@@ -4515,7 +4515,7 @@
               <a:buClr>
                 <a:srgbClr val="000000"/>
               </a:buClr>
-              <a:buFont typeface="Arial"/>
+              <a:buFont typeface="Manrope Medium"/>
               <a:buChar char="•"/>
               <a:defRPr lang="ru-RU" sz="2000" b="0" u="none" strike="noStrike">
                 <a:solidFill>
@@ -4523,7 +4523,7 @@
                 </a:solidFill>
                 <a:effectLst/>
                 <a:uFillTx/>
-                <a:latin typeface="Aptos"/>
+                <a:latin typeface="+mn-lt"/>
               </a:defRPr>
             </a:lvl3pPr>
             <a:lvl4pPr lvl="3" algn="l" defTabSz="914400">
@@ -4536,7 +4536,7 @@
               <a:buClr>
                 <a:srgbClr val="000000"/>
               </a:buClr>
-              <a:buFont typeface="Arial"/>
+              <a:buFont typeface="Manrope Medium"/>
               <a:buChar char="•"/>
               <a:defRPr lang="ru-RU" sz="1800" b="0" u="none" strike="noStrike">
                 <a:solidFill>
@@ -4544,7 +4544,7 @@
                 </a:solidFill>
                 <a:effectLst/>
                 <a:uFillTx/>
-                <a:latin typeface="Aptos"/>
+                <a:latin typeface="+mn-lt"/>
               </a:defRPr>
             </a:lvl4pPr>
             <a:lvl5pPr lvl="4" algn="l" defTabSz="914400">
@@ -4557,7 +4557,7 @@
               <a:buClr>
                 <a:srgbClr val="000000"/>
               </a:buClr>
-              <a:buFont typeface="Arial"/>
+              <a:buFont typeface="Manrope Medium"/>
               <a:buChar char="•"/>
               <a:defRPr lang="ru-RU" sz="1800" b="0" u="none" strike="noStrike">
                 <a:solidFill>
@@ -4565,7 +4565,7 @@
                 </a:solidFill>
                 <a:effectLst/>
                 <a:uFillTx/>
-                <a:latin typeface="Aptos"/>
+                <a:latin typeface="+mn-lt"/>
               </a:defRPr>
             </a:lvl5pPr>
           </a:lstStyle>
@@ -4580,7 +4580,7 @@
               <a:buClr>
                 <a:srgbClr val="000000"/>
               </a:buClr>
-              <a:buFont typeface="Arial"/>
+              <a:buFont typeface="Manrope Medium"/>
               <a:buChar char="•"/>
             </a:pPr>
             <a:r>
@@ -4590,7 +4590,7 @@
                 </a:solidFill>
                 <a:effectLst/>
                 <a:uFillTx/>
-                <a:latin typeface="Aptos"/>
+                <a:latin typeface="+mn-lt"/>
               </a:rPr>
               <a:t>Образец текста</a:t>
             </a:r>
@@ -4600,7 +4600,7 @@
               </a:solidFill>
               <a:effectLst/>
               <a:uFillTx/>
-              <a:latin typeface="Aptos"/>
+              <a:latin typeface="+mn-lt"/>
             </a:endParaRPr>
           </a:p>
           <a:p>
@@ -4614,7 +4614,7 @@
               <a:buClr>
                 <a:srgbClr val="000000"/>
               </a:buClr>
-              <a:buFont typeface="Arial"/>
+              <a:buFont typeface="Manrope Medium"/>
               <a:buChar char="•"/>
             </a:pPr>
             <a:r>
@@ -4624,7 +4624,7 @@
                 </a:solidFill>
                 <a:effectLst/>
                 <a:uFillTx/>
-                <a:latin typeface="Aptos"/>
+                <a:latin typeface="+mn-lt"/>
               </a:rPr>
               <a:t>Второй уровень</a:t>
             </a:r>
@@ -4634,7 +4634,7 @@
               </a:solidFill>
               <a:effectLst/>
               <a:uFillTx/>
-              <a:latin typeface="Aptos"/>
+              <a:latin typeface="+mn-lt"/>
             </a:endParaRPr>
           </a:p>
           <a:p>
@@ -4648,7 +4648,7 @@
               <a:buClr>
                 <a:srgbClr val="000000"/>
               </a:buClr>
-              <a:buFont typeface="Arial"/>
+              <a:buFont typeface="Manrope Medium"/>
               <a:buChar char="•"/>
             </a:pPr>
             <a:r>
@@ -4658,7 +4658,7 @@
                 </a:solidFill>
                 <a:effectLst/>
                 <a:uFillTx/>
-                <a:latin typeface="Aptos"/>
+                <a:latin typeface="+mn-lt"/>
               </a:rPr>
               <a:t>Третий уровень</a:t>
             </a:r>
@@ -4668,7 +4668,7 @@
               </a:solidFill>
               <a:effectLst/>
               <a:uFillTx/>
-              <a:latin typeface="Aptos"/>
+              <a:latin typeface="+mn-lt"/>
             </a:endParaRPr>
           </a:p>
           <a:p>
@@ -4682,7 +4682,7 @@
               <a:buClr>
                 <a:srgbClr val="000000"/>
               </a:buClr>
-              <a:buFont typeface="Arial"/>
+              <a:buFont typeface="Manrope Medium"/>
               <a:buChar char="•"/>
             </a:pPr>
             <a:r>
@@ -4692,7 +4692,7 @@
                 </a:solidFill>
                 <a:effectLst/>
                 <a:uFillTx/>
-                <a:latin typeface="Aptos"/>
+                <a:latin typeface="+mn-lt"/>
               </a:rPr>
               <a:t>Четвертый уровень</a:t>
             </a:r>
@@ -4702,7 +4702,7 @@
               </a:solidFill>
               <a:effectLst/>
               <a:uFillTx/>
-              <a:latin typeface="Aptos"/>
+              <a:latin typeface="+mn-lt"/>
             </a:endParaRPr>
           </a:p>
           <a:p>
@@ -4716,7 +4716,7 @@
               <a:buClr>
                 <a:srgbClr val="000000"/>
               </a:buClr>
-              <a:buFont typeface="Arial"/>
+              <a:buFont typeface="Manrope Medium"/>
               <a:buChar char="•"/>
             </a:pPr>
             <a:r>
@@ -4726,7 +4726,7 @@
                 </a:solidFill>
                 <a:effectLst/>
                 <a:uFillTx/>
-                <a:latin typeface="Aptos"/>
+                <a:latin typeface="+mn-lt"/>
               </a:rPr>
               <a:t>Пятый уровень</a:t>
             </a:r>
@@ -4736,7 +4736,7 @@
               </a:solidFill>
               <a:effectLst/>
               <a:uFillTx/>
-              <a:latin typeface="Aptos"/>
+              <a:latin typeface="+mn-lt"/>
             </a:endParaRPr>
           </a:p>
         </p:txBody>
@@ -4782,7 +4782,7 @@
                 </a:solidFill>
                 <a:effectLst/>
                 <a:uFillTx/>
-                <a:latin typeface="Aptos"/>
+                <a:latin typeface="+mn-lt"/>
               </a:defRPr>
             </a:lvl1pPr>
           </a:lstStyle>
@@ -4802,7 +4802,7 @@
                 </a:solidFill>
                 <a:effectLst/>
                 <a:uFillTx/>
-                <a:latin typeface="Aptos"/>
+                <a:latin typeface="+mn-lt"/>
               </a:rPr>
               <a:t> </a:t>
             </a:r>
@@ -4812,7 +4812,7 @@
               </a:solidFill>
               <a:effectLst/>
               <a:uFillTx/>
-              <a:latin typeface="Times New Roman"/>
+              <a:latin typeface="+mn-lt"/>
             </a:endParaRPr>
           </a:p>
         </p:txBody>
@@ -4853,7 +4853,7 @@
                 </a:solidFill>
                 <a:effectLst/>
                 <a:uFillTx/>
-                <a:latin typeface="Times New Roman"/>
+                <a:latin typeface="+mn-lt"/>
               </a:defRPr>
             </a:lvl1pPr>
           </a:lstStyle>
@@ -4868,7 +4868,7 @@
                 </a:solidFill>
                 <a:effectLst/>
                 <a:uFillTx/>
-                <a:latin typeface="Times New Roman"/>
+                <a:latin typeface="+mn-lt"/>
               </a:rPr>
               <a:t> </a:t>
             </a:r>
@@ -4878,7 +4878,7 @@
               </a:solidFill>
               <a:effectLst/>
               <a:uFillTx/>
-              <a:latin typeface="Times New Roman"/>
+              <a:latin typeface="+mn-lt"/>
             </a:endParaRPr>
           </a:p>
         </p:txBody>
@@ -4924,7 +4924,7 @@
                 </a:solidFill>
                 <a:effectLst/>
                 <a:uFillTx/>
-                <a:latin typeface="Aptos"/>
+                <a:latin typeface="+mn-lt"/>
               </a:defRPr>
             </a:lvl1pPr>
           </a:lstStyle>
@@ -4944,7 +4944,7 @@
                 </a:solidFill>
                 <a:effectLst/>
                 <a:uFillTx/>
-                <a:latin typeface="Aptos"/>
+                <a:latin typeface="+mn-lt"/>
               </a:rPr>
               <a:t>10</a:t>
             </a:fld>
@@ -4954,7 +4954,7 @@
               </a:solidFill>
               <a:effectLst/>
               <a:uFillTx/>
-              <a:latin typeface="Times New Roman"/>
+              <a:latin typeface="+mn-lt"/>
             </a:endParaRPr>
           </a:p>
         </p:txBody>
@@ -5024,13 +5024,13 @@
                 <a:spcPct val="90000"/>
               </a:lnSpc>
               <a:buNone/>
-              <a:defRPr lang="ru-RU" sz="6400" b="0" u="none" strike="noStrike">
+              <a:defRPr lang="ru-RU" sz="6400" b="1" u="none" strike="noStrike">
                 <a:solidFill>
                   <a:schemeClr val="dk1"/>
                 </a:solidFill>
                 <a:effectLst/>
                 <a:uFillTx/>
-                <a:latin typeface="Aptos Display"/>
+                <a:latin typeface="+mj-lt"/>
               </a:defRPr>
             </a:lvl1pPr>
           </a:lstStyle>
@@ -5042,23 +5042,23 @@
               <a:buNone/>
             </a:pPr>
             <a:r>
-              <a:rPr lang="ru-RU" sz="6400" b="0" u="none" strike="noStrike">
+              <a:rPr lang="ru-RU" sz="6400" b="1" u="none" strike="noStrike">
                 <a:solidFill>
                   <a:schemeClr val="dk1"/>
                 </a:solidFill>
                 <a:effectLst/>
                 <a:uFillTx/>
-                <a:latin typeface="Aptos Display"/>
+                <a:latin typeface="+mj-lt"/>
               </a:rPr>
               <a:t>Click to edit the title text format</a:t>
             </a:r>
-            <a:endParaRPr lang="ru-RU" sz="6400" b="0" u="none" strike="noStrike">
+            <a:endParaRPr lang="ru-RU" sz="6400" b="1" u="none" strike="noStrike">
               <a:solidFill>
                 <a:schemeClr val="dk1"/>
               </a:solidFill>
               <a:effectLst/>
               <a:uFillTx/>
-              <a:latin typeface="Aptos Display"/>
+              <a:latin typeface="+mj-lt"/>
             </a:endParaRPr>
           </a:p>
         </p:txBody>
@@ -5154,7 +5154,7 @@
               </a:solidFill>
               <a:effectLst/>
               <a:uFillTx/>
-              <a:latin typeface="Arial"/>
+              <a:latin typeface="+mn-lt"/>
             </a:endParaRPr>
           </a:p>
         </p:txBody>
@@ -5235,7 +5235,7 @@
               </a:solidFill>
               <a:effectLst/>
               <a:uFillTx/>
-              <a:latin typeface="Arial"/>
+              <a:latin typeface="+mn-lt"/>
             </a:endParaRPr>
           </a:p>
         </p:txBody>
@@ -5278,7 +5278,7 @@
               <a:buClr>
                 <a:srgbClr val="000000"/>
               </a:buClr>
-              <a:buFont typeface="Arial"/>
+              <a:buFont typeface="Manrope Medium"/>
               <a:buChar char="•"/>
               <a:defRPr lang="ru-RU" sz="2800" b="0" u="none" strike="noStrike">
                 <a:solidFill>
@@ -5286,7 +5286,7 @@
                 </a:solidFill>
                 <a:effectLst/>
                 <a:uFillTx/>
-                <a:latin typeface="Aptos"/>
+                <a:latin typeface="+mn-lt"/>
               </a:defRPr>
             </a:lvl1pPr>
             <a:lvl2pPr lvl="1" algn="l" defTabSz="914400">
@@ -5308,7 +5308,7 @@
                 </a:solidFill>
                 <a:effectLst/>
                 <a:uFillTx/>
-                <a:latin typeface="Aptos"/>
+                <a:latin typeface="+mn-lt"/>
               </a:defRPr>
             </a:lvl2pPr>
             <a:lvl3pPr lvl="2" algn="l" defTabSz="914400">
@@ -5330,7 +5330,7 @@
                 </a:solidFill>
                 <a:effectLst/>
                 <a:uFillTx/>
-                <a:latin typeface="Aptos"/>
+                <a:latin typeface="+mn-lt"/>
               </a:defRPr>
             </a:lvl3pPr>
             <a:lvl4pPr lvl="3" algn="l" defTabSz="914400">
@@ -5352,7 +5352,7 @@
                 </a:solidFill>
                 <a:effectLst/>
                 <a:uFillTx/>
-                <a:latin typeface="Aptos"/>
+                <a:latin typeface="+mn-lt"/>
               </a:defRPr>
             </a:lvl4pPr>
             <a:lvl5pPr lvl="4" algn="l" defTabSz="914400">
@@ -5374,7 +5374,7 @@
                 </a:solidFill>
                 <a:effectLst/>
                 <a:uFillTx/>
-                <a:latin typeface="Aptos"/>
+                <a:latin typeface="+mn-lt"/>
               </a:defRPr>
             </a:lvl5pPr>
             <a:lvl6pPr lvl="5" algn="l" defTabSz="914400">
@@ -5396,7 +5396,7 @@
                 </a:solidFill>
                 <a:effectLst/>
                 <a:uFillTx/>
-                <a:latin typeface="Aptos"/>
+                <a:latin typeface="+mn-lt"/>
               </a:defRPr>
             </a:lvl6pPr>
             <a:lvl7pPr lvl="6" algn="l" defTabSz="914400">
@@ -5418,7 +5418,7 @@
                 </a:solidFill>
                 <a:effectLst/>
                 <a:uFillTx/>
-                <a:latin typeface="Aptos"/>
+                <a:latin typeface="+mn-lt"/>
               </a:defRPr>
             </a:lvl7pPr>
           </a:lstStyle>
@@ -5433,7 +5433,7 @@
               <a:buClr>
                 <a:srgbClr val="000000"/>
               </a:buClr>
-              <a:buFont typeface="Arial"/>
+              <a:buFont typeface="Manrope Medium"/>
               <a:buChar char="•"/>
             </a:pPr>
             <a:r>
@@ -5443,7 +5443,7 @@
                 </a:solidFill>
                 <a:effectLst/>
                 <a:uFillTx/>
-                <a:latin typeface="Aptos"/>
+                <a:latin typeface="+mn-lt"/>
               </a:rPr>
               <a:t>Click to edit the outline text format</a:t>
             </a:r>
@@ -5453,7 +5453,7 @@
               </a:solidFill>
               <a:effectLst/>
               <a:uFillTx/>
-              <a:latin typeface="Aptos"/>
+              <a:latin typeface="+mn-lt"/>
             </a:endParaRPr>
           </a:p>
           <a:p>
@@ -5478,7 +5478,7 @@
                 </a:solidFill>
                 <a:effectLst/>
                 <a:uFillTx/>
-                <a:latin typeface="Aptos"/>
+                <a:latin typeface="+mn-lt"/>
               </a:rPr>
               <a:t>Second Outline Level</a:t>
             </a:r>
@@ -5488,7 +5488,7 @@
               </a:solidFill>
               <a:effectLst/>
               <a:uFillTx/>
-              <a:latin typeface="Aptos"/>
+              <a:latin typeface="+mn-lt"/>
             </a:endParaRPr>
           </a:p>
           <a:p>
@@ -5513,7 +5513,7 @@
                 </a:solidFill>
                 <a:effectLst/>
                 <a:uFillTx/>
-                <a:latin typeface="Aptos"/>
+                <a:latin typeface="+mn-lt"/>
               </a:rPr>
               <a:t>Third Outline Level</a:t>
             </a:r>
@@ -5523,7 +5523,7 @@
               </a:solidFill>
               <a:effectLst/>
               <a:uFillTx/>
-              <a:latin typeface="Aptos"/>
+              <a:latin typeface="+mn-lt"/>
             </a:endParaRPr>
           </a:p>
           <a:p>
@@ -5548,7 +5548,7 @@
                 </a:solidFill>
                 <a:effectLst/>
                 <a:uFillTx/>
-                <a:latin typeface="Aptos"/>
+                <a:latin typeface="+mn-lt"/>
               </a:rPr>
               <a:t>Fourth Outline Level</a:t>
             </a:r>
@@ -5558,7 +5558,7 @@
               </a:solidFill>
               <a:effectLst/>
               <a:uFillTx/>
-              <a:latin typeface="Aptos"/>
+              <a:latin typeface="+mn-lt"/>
             </a:endParaRPr>
           </a:p>
           <a:p>
@@ -5583,7 +5583,7 @@
                 </a:solidFill>
                 <a:effectLst/>
                 <a:uFillTx/>
-                <a:latin typeface="Aptos"/>
+                <a:latin typeface="+mn-lt"/>
               </a:rPr>
               <a:t>Fifth Outline Level</a:t>
             </a:r>
@@ -5593,7 +5593,7 @@
               </a:solidFill>
               <a:effectLst/>
               <a:uFillTx/>
-              <a:latin typeface="Aptos"/>
+              <a:latin typeface="+mn-lt"/>
             </a:endParaRPr>
           </a:p>
           <a:p>
@@ -5618,7 +5618,7 @@
                 </a:solidFill>
                 <a:effectLst/>
                 <a:uFillTx/>
-                <a:latin typeface="Aptos"/>
+                <a:latin typeface="+mn-lt"/>
               </a:rPr>
               <a:t>Sixth Outline Level</a:t>
             </a:r>
@@ -5628,7 +5628,7 @@
               </a:solidFill>
               <a:effectLst/>
               <a:uFillTx/>
-              <a:latin typeface="Aptos"/>
+              <a:latin typeface="+mn-lt"/>
             </a:endParaRPr>
           </a:p>
           <a:p>
@@ -5653,7 +5653,7 @@
                 </a:solidFill>
                 <a:effectLst/>
                 <a:uFillTx/>
-                <a:latin typeface="Aptos"/>
+                <a:latin typeface="+mn-lt"/>
               </a:rPr>
               <a:t>Seventh Outline Level</a:t>
             </a:r>
@@ -5663,7 +5663,7 @@
               </a:solidFill>
               <a:effectLst/>
               <a:uFillTx/>
-              <a:latin typeface="Aptos"/>
+              <a:latin typeface="+mn-lt"/>
             </a:endParaRPr>
           </a:p>
         </p:txBody>
@@ -5733,13 +5733,13 @@
                 <a:spcPct val="90000"/>
               </a:lnSpc>
               <a:buNone/>
-              <a:defRPr lang="ru-RU" sz="4400" b="0" u="none" strike="noStrike">
+              <a:defRPr lang="ru-RU" sz="4400" b="1" u="none" strike="noStrike">
                 <a:solidFill>
                   <a:schemeClr val="dk1"/>
                 </a:solidFill>
                 <a:effectLst/>
                 <a:uFillTx/>
-                <a:latin typeface="Aptos Display"/>
+                <a:latin typeface="+mj-lt"/>
               </a:defRPr>
             </a:lvl1pPr>
           </a:lstStyle>
@@ -5751,23 +5751,23 @@
               <a:buNone/>
             </a:pPr>
             <a:r>
-              <a:rPr lang="ru-RU" sz="4400" b="0" u="none" strike="noStrike">
+              <a:rPr lang="ru-RU" sz="4400" b="1" u="none" strike="noStrike">
                 <a:solidFill>
                   <a:schemeClr val="dk1"/>
                 </a:solidFill>
                 <a:effectLst/>
                 <a:uFillTx/>
-                <a:latin typeface="Aptos Display"/>
+                <a:latin typeface="+mj-lt"/>
               </a:rPr>
               <a:t>Образец заголовка</a:t>
             </a:r>
-            <a:endParaRPr lang="ru-RU" sz="4400" b="0" u="none" strike="noStrike">
+            <a:endParaRPr lang="ru-RU" sz="4400" b="1" u="none" strike="noStrike">
               <a:solidFill>
                 <a:schemeClr val="dk1"/>
               </a:solidFill>
               <a:effectLst/>
               <a:uFillTx/>
-              <a:latin typeface="Aptos Display"/>
+              <a:latin typeface="+mj-lt"/>
             </a:endParaRPr>
           </a:p>
         </p:txBody>
@@ -5810,7 +5810,7 @@
               <a:buClr>
                 <a:srgbClr val="000000"/>
               </a:buClr>
-              <a:buFont typeface="Arial"/>
+              <a:buFont typeface="Manrope Medium"/>
               <a:buChar char="•"/>
               <a:defRPr lang="ru-RU" sz="2800" b="0" u="none" strike="noStrike">
                 <a:solidFill>
@@ -5818,7 +5818,7 @@
                 </a:solidFill>
                 <a:effectLst/>
                 <a:uFillTx/>
-                <a:latin typeface="Aptos"/>
+                <a:latin typeface="+mn-lt"/>
               </a:defRPr>
             </a:lvl1pPr>
             <a:lvl2pPr lvl="1" algn="l" defTabSz="914400">
@@ -5831,7 +5831,7 @@
               <a:buClr>
                 <a:srgbClr val="000000"/>
               </a:buClr>
-              <a:buFont typeface="Arial"/>
+              <a:buFont typeface="Manrope Medium"/>
               <a:buChar char="•"/>
               <a:defRPr lang="ru-RU" sz="2400" b="0" u="none" strike="noStrike">
                 <a:solidFill>
@@ -5839,7 +5839,7 @@
                 </a:solidFill>
                 <a:effectLst/>
                 <a:uFillTx/>
-                <a:latin typeface="Aptos"/>
+                <a:latin typeface="+mn-lt"/>
               </a:defRPr>
             </a:lvl2pPr>
             <a:lvl3pPr lvl="2" algn="l" defTabSz="914400">
@@ -5852,7 +5852,7 @@
               <a:buClr>
                 <a:srgbClr val="000000"/>
               </a:buClr>
-              <a:buFont typeface="Arial"/>
+              <a:buFont typeface="Manrope Medium"/>
               <a:buChar char="•"/>
               <a:defRPr lang="ru-RU" sz="2000" b="0" u="none" strike="noStrike">
                 <a:solidFill>
@@ -5860,7 +5860,7 @@
                 </a:solidFill>
                 <a:effectLst/>
                 <a:uFillTx/>
-                <a:latin typeface="Aptos"/>
+                <a:latin typeface="+mn-lt"/>
               </a:defRPr>
             </a:lvl3pPr>
             <a:lvl4pPr lvl="3" algn="l" defTabSz="914400">
@@ -5873,7 +5873,7 @@
               <a:buClr>
                 <a:srgbClr val="000000"/>
               </a:buClr>
-              <a:buFont typeface="Arial"/>
+              <a:buFont typeface="Manrope Medium"/>
               <a:buChar char="•"/>
               <a:defRPr lang="ru-RU" sz="1800" b="0" u="none" strike="noStrike">
                 <a:solidFill>
@@ -5881,7 +5881,7 @@
                 </a:solidFill>
                 <a:effectLst/>
                 <a:uFillTx/>
-                <a:latin typeface="Aptos"/>
+                <a:latin typeface="+mn-lt"/>
               </a:defRPr>
             </a:lvl4pPr>
             <a:lvl5pPr lvl="4" algn="l" defTabSz="914400">
@@ -5894,7 +5894,7 @@
               <a:buClr>
                 <a:srgbClr val="000000"/>
               </a:buClr>
-              <a:buFont typeface="Arial"/>
+              <a:buFont typeface="Manrope Medium"/>
               <a:buChar char="•"/>
               <a:defRPr lang="ru-RU" sz="1800" b="0" u="none" strike="noStrike">
                 <a:solidFill>
@@ -5902,7 +5902,7 @@
                 </a:solidFill>
                 <a:effectLst/>
                 <a:uFillTx/>
-                <a:latin typeface="Aptos"/>
+                <a:latin typeface="+mn-lt"/>
               </a:defRPr>
             </a:lvl5pPr>
           </a:lstStyle>
@@ -5917,7 +5917,7 @@
               <a:buClr>
                 <a:srgbClr val="000000"/>
               </a:buClr>
-              <a:buFont typeface="Arial"/>
+              <a:buFont typeface="Manrope Medium"/>
               <a:buChar char="•"/>
             </a:pPr>
             <a:r>
@@ -5927,7 +5927,7 @@
                 </a:solidFill>
                 <a:effectLst/>
                 <a:uFillTx/>
-                <a:latin typeface="Aptos"/>
+                <a:latin typeface="+mn-lt"/>
               </a:rPr>
               <a:t>Образец текста</a:t>
             </a:r>
@@ -5937,7 +5937,7 @@
               </a:solidFill>
               <a:effectLst/>
               <a:uFillTx/>
-              <a:latin typeface="Aptos"/>
+              <a:latin typeface="+mn-lt"/>
             </a:endParaRPr>
           </a:p>
           <a:p>
@@ -5951,7 +5951,7 @@
               <a:buClr>
                 <a:srgbClr val="000000"/>
               </a:buClr>
-              <a:buFont typeface="Arial"/>
+              <a:buFont typeface="Manrope Medium"/>
               <a:buChar char="•"/>
             </a:pPr>
             <a:r>
@@ -5961,7 +5961,7 @@
                 </a:solidFill>
                 <a:effectLst/>
                 <a:uFillTx/>
-                <a:latin typeface="Aptos"/>
+                <a:latin typeface="+mn-lt"/>
               </a:rPr>
               <a:t>Второй уровень</a:t>
             </a:r>
@@ -5971,7 +5971,7 @@
               </a:solidFill>
               <a:effectLst/>
               <a:uFillTx/>
-              <a:latin typeface="Aptos"/>
+              <a:latin typeface="+mn-lt"/>
             </a:endParaRPr>
           </a:p>
           <a:p>
@@ -5985,7 +5985,7 @@
               <a:buClr>
                 <a:srgbClr val="000000"/>
               </a:buClr>
-              <a:buFont typeface="Arial"/>
+              <a:buFont typeface="Manrope Medium"/>
               <a:buChar char="•"/>
             </a:pPr>
             <a:r>
@@ -5995,7 +5995,7 @@
                 </a:solidFill>
                 <a:effectLst/>
                 <a:uFillTx/>
-                <a:latin typeface="Aptos"/>
+                <a:latin typeface="+mn-lt"/>
               </a:rPr>
               <a:t>Третий уровень</a:t>
             </a:r>
@@ -6005,7 +6005,7 @@
               </a:solidFill>
               <a:effectLst/>
               <a:uFillTx/>
-              <a:latin typeface="Aptos"/>
+              <a:latin typeface="+mn-lt"/>
             </a:endParaRPr>
           </a:p>
           <a:p>
@@ -6019,7 +6019,7 @@
               <a:buClr>
                 <a:srgbClr val="000000"/>
               </a:buClr>
-              <a:buFont typeface="Arial"/>
+              <a:buFont typeface="Manrope Medium"/>
               <a:buChar char="•"/>
             </a:pPr>
             <a:r>
@@ -6029,7 +6029,7 @@
                 </a:solidFill>
                 <a:effectLst/>
                 <a:uFillTx/>
-                <a:latin typeface="Aptos"/>
+                <a:latin typeface="+mn-lt"/>
               </a:rPr>
               <a:t>Четвертый уровень</a:t>
             </a:r>
@@ -6039,7 +6039,7 @@
               </a:solidFill>
               <a:effectLst/>
               <a:uFillTx/>
-              <a:latin typeface="Aptos"/>
+              <a:latin typeface="+mn-lt"/>
             </a:endParaRPr>
           </a:p>
           <a:p>
@@ -6053,7 +6053,7 @@
               <a:buClr>
                 <a:srgbClr val="000000"/>
               </a:buClr>
-              <a:buFont typeface="Arial"/>
+              <a:buFont typeface="Manrope Medium"/>
               <a:buChar char="•"/>
             </a:pPr>
             <a:r>
@@ -6063,7 +6063,7 @@
                 </a:solidFill>
                 <a:effectLst/>
                 <a:uFillTx/>
-                <a:latin typeface="Aptos"/>
+                <a:latin typeface="+mn-lt"/>
               </a:rPr>
               <a:t>Пятый уровень</a:t>
             </a:r>
@@ -6073,7 +6073,7 @@
               </a:solidFill>
               <a:effectLst/>
               <a:uFillTx/>
-              <a:latin typeface="Aptos"/>
+              <a:latin typeface="+mn-lt"/>
             </a:endParaRPr>
           </a:p>
         </p:txBody>
@@ -6119,7 +6119,7 @@
                 </a:solidFill>
                 <a:effectLst/>
                 <a:uFillTx/>
-                <a:latin typeface="Aptos"/>
+                <a:latin typeface="+mn-lt"/>
               </a:defRPr>
             </a:lvl1pPr>
           </a:lstStyle>
@@ -6139,7 +6139,7 @@
                 </a:solidFill>
                 <a:effectLst/>
                 <a:uFillTx/>
-                <a:latin typeface="Aptos"/>
+                <a:latin typeface="+mn-lt"/>
               </a:rPr>
               <a:t>&lt;date/time&gt;</a:t>
             </a:r>
@@ -6149,7 +6149,7 @@
               </a:solidFill>
               <a:effectLst/>
               <a:uFillTx/>
-              <a:latin typeface="Times New Roman"/>
+              <a:latin typeface="+mn-lt"/>
             </a:endParaRPr>
           </a:p>
         </p:txBody>
@@ -6190,7 +6190,7 @@
                 </a:solidFill>
                 <a:effectLst/>
                 <a:uFillTx/>
-                <a:latin typeface="Times New Roman"/>
+                <a:latin typeface="+mn-lt"/>
               </a:defRPr>
             </a:lvl1pPr>
           </a:lstStyle>
@@ -6205,7 +6205,7 @@
                 </a:solidFill>
                 <a:effectLst/>
                 <a:uFillTx/>
-                <a:latin typeface="Times New Roman"/>
+                <a:latin typeface="+mn-lt"/>
               </a:rPr>
               <a:t>&lt;footer&gt;</a:t>
             </a:r>
@@ -6215,7 +6215,7 @@
               </a:solidFill>
               <a:effectLst/>
               <a:uFillTx/>
-              <a:latin typeface="Times New Roman"/>
+              <a:latin typeface="+mn-lt"/>
             </a:endParaRPr>
           </a:p>
         </p:txBody>
@@ -6261,7 +6261,7 @@
                 </a:solidFill>
                 <a:effectLst/>
                 <a:uFillTx/>
-                <a:latin typeface="Aptos"/>
+                <a:latin typeface="+mn-lt"/>
               </a:defRPr>
             </a:lvl1pPr>
           </a:lstStyle>
@@ -6281,7 +6281,7 @@
                 </a:solidFill>
                 <a:effectLst/>
                 <a:uFillTx/>
-                <a:latin typeface="Aptos"/>
+                <a:latin typeface="+mn-lt"/>
               </a:rPr>
               <a:t>&lt;number&gt;</a:t>
             </a:fld>
@@ -6291,7 +6291,7 @@
               </a:solidFill>
               <a:effectLst/>
               <a:uFillTx/>
-              <a:latin typeface="Times New Roman"/>
+              <a:latin typeface="+mn-lt"/>
             </a:endParaRPr>
           </a:p>
         </p:txBody>
@@ -6361,13 +6361,13 @@
                 <a:spcPct val="90000"/>
               </a:lnSpc>
               <a:buNone/>
-              <a:defRPr lang="ru-RU" sz="6000" b="0" u="none" strike="noStrike">
+              <a:defRPr lang="ru-RU" sz="6000" b="1" u="none" strike="noStrike">
                 <a:solidFill>
                   <a:schemeClr val="dk1"/>
                 </a:solidFill>
                 <a:effectLst/>
                 <a:uFillTx/>
-                <a:latin typeface="Aptos Display"/>
+                <a:latin typeface="+mj-lt"/>
               </a:defRPr>
             </a:lvl1pPr>
           </a:lstStyle>
@@ -6379,23 +6379,23 @@
               <a:buNone/>
             </a:pPr>
             <a:r>
-              <a:rPr lang="ru-RU" sz="6000" b="0" u="none" strike="noStrike">
+              <a:rPr lang="ru-RU" sz="6000" b="1" u="none" strike="noStrike">
                 <a:solidFill>
                   <a:schemeClr val="dk1"/>
                 </a:solidFill>
                 <a:effectLst/>
                 <a:uFillTx/>
-                <a:latin typeface="Aptos Display"/>
+                <a:latin typeface="+mj-lt"/>
               </a:rPr>
               <a:t>Образец заголовка</a:t>
             </a:r>
-            <a:endParaRPr lang="ru-RU" sz="6000" b="0" u="none" strike="noStrike">
+            <a:endParaRPr lang="ru-RU" sz="6000" b="1" u="none" strike="noStrike">
               <a:solidFill>
                 <a:schemeClr val="dk1"/>
               </a:solidFill>
               <a:effectLst/>
               <a:uFillTx/>
-              <a:latin typeface="Aptos Display"/>
+              <a:latin typeface="+mj-lt"/>
             </a:endParaRPr>
           </a:p>
         </p:txBody>
@@ -6447,7 +6447,7 @@
                 </a:solidFill>
                 <a:effectLst/>
                 <a:uFillTx/>
-                <a:latin typeface="Aptos"/>
+                <a:latin typeface="+mn-lt"/>
               </a:defRPr>
             </a:lvl1pPr>
           </a:lstStyle>
@@ -6473,7 +6473,7 @@
                 </a:solidFill>
                 <a:effectLst/>
                 <a:uFillTx/>
-                <a:latin typeface="Aptos"/>
+                <a:latin typeface="+mn-lt"/>
               </a:rPr>
               <a:t>Образец текста</a:t>
             </a:r>
@@ -6485,7 +6485,7 @@
               </a:solidFill>
               <a:effectLst/>
               <a:uFillTx/>
-              <a:latin typeface="Aptos"/>
+              <a:latin typeface="+mn-lt"/>
             </a:endParaRPr>
           </a:p>
         </p:txBody>
@@ -6531,7 +6531,7 @@
                 </a:solidFill>
                 <a:effectLst/>
                 <a:uFillTx/>
-                <a:latin typeface="Aptos"/>
+                <a:latin typeface="+mn-lt"/>
               </a:defRPr>
             </a:lvl1pPr>
           </a:lstStyle>
@@ -6551,7 +6551,7 @@
                 </a:solidFill>
                 <a:effectLst/>
                 <a:uFillTx/>
-                <a:latin typeface="Aptos"/>
+                <a:latin typeface="+mn-lt"/>
               </a:rPr>
               <a:t>&lt;date/time&gt;</a:t>
             </a:r>
@@ -6561,7 +6561,7 @@
               </a:solidFill>
               <a:effectLst/>
               <a:uFillTx/>
-              <a:latin typeface="Times New Roman"/>
+              <a:latin typeface="+mn-lt"/>
             </a:endParaRPr>
           </a:p>
         </p:txBody>
@@ -6602,7 +6602,7 @@
                 </a:solidFill>
                 <a:effectLst/>
                 <a:uFillTx/>
-                <a:latin typeface="Times New Roman"/>
+                <a:latin typeface="+mn-lt"/>
               </a:defRPr>
             </a:lvl1pPr>
           </a:lstStyle>
@@ -6617,7 +6617,7 @@
                 </a:solidFill>
                 <a:effectLst/>
                 <a:uFillTx/>
-                <a:latin typeface="Times New Roman"/>
+                <a:latin typeface="+mn-lt"/>
               </a:rPr>
               <a:t>&lt;footer&gt;</a:t>
             </a:r>
@@ -6627,7 +6627,7 @@
               </a:solidFill>
               <a:effectLst/>
               <a:uFillTx/>
-              <a:latin typeface="Times New Roman"/>
+              <a:latin typeface="+mn-lt"/>
             </a:endParaRPr>
           </a:p>
         </p:txBody>
@@ -6673,7 +6673,7 @@
                 </a:solidFill>
                 <a:effectLst/>
                 <a:uFillTx/>
-                <a:latin typeface="Aptos"/>
+                <a:latin typeface="+mn-lt"/>
               </a:defRPr>
             </a:lvl1pPr>
           </a:lstStyle>
@@ -6693,7 +6693,7 @@
                 </a:solidFill>
                 <a:effectLst/>
                 <a:uFillTx/>
-                <a:latin typeface="Aptos"/>
+                <a:latin typeface="+mn-lt"/>
               </a:rPr>
               <a:t>&lt;number&gt;</a:t>
             </a:fld>
@@ -6703,7 +6703,7 @@
               </a:solidFill>
               <a:effectLst/>
               <a:uFillTx/>
-              <a:latin typeface="Times New Roman"/>
+              <a:latin typeface="+mn-lt"/>
             </a:endParaRPr>
           </a:p>
         </p:txBody>
@@ -6773,13 +6773,13 @@
                 <a:spcPct val="90000"/>
               </a:lnSpc>
               <a:buNone/>
-              <a:defRPr lang="ru-RU" sz="4400" b="0" u="none" strike="noStrike">
+              <a:defRPr lang="ru-RU" sz="4400" b="1" u="none" strike="noStrike">
                 <a:solidFill>
                   <a:schemeClr val="dk1"/>
                 </a:solidFill>
                 <a:effectLst/>
                 <a:uFillTx/>
-                <a:latin typeface="Aptos Display"/>
+                <a:latin typeface="+mj-lt"/>
               </a:defRPr>
             </a:lvl1pPr>
           </a:lstStyle>
@@ -6791,23 +6791,23 @@
               <a:buNone/>
             </a:pPr>
             <a:r>
-              <a:rPr lang="ru-RU" sz="4400" b="0" u="none" strike="noStrike">
+              <a:rPr lang="ru-RU" sz="4400" b="1" u="none" strike="noStrike">
                 <a:solidFill>
                   <a:schemeClr val="dk1"/>
                 </a:solidFill>
                 <a:effectLst/>
                 <a:uFillTx/>
-                <a:latin typeface="Aptos Display"/>
+                <a:latin typeface="+mj-lt"/>
               </a:rPr>
               <a:t>Образец заголовка</a:t>
             </a:r>
-            <a:endParaRPr lang="ru-RU" sz="4400" b="0" u="none" strike="noStrike">
+            <a:endParaRPr lang="ru-RU" sz="4400" b="1" u="none" strike="noStrike">
               <a:solidFill>
                 <a:schemeClr val="dk1"/>
               </a:solidFill>
               <a:effectLst/>
               <a:uFillTx/>
-              <a:latin typeface="Aptos Display"/>
+              <a:latin typeface="+mj-lt"/>
             </a:endParaRPr>
           </a:p>
         </p:txBody>
@@ -6850,7 +6850,7 @@
               <a:buClr>
                 <a:srgbClr val="000000"/>
               </a:buClr>
-              <a:buFont typeface="Arial"/>
+              <a:buFont typeface="Manrope Medium"/>
               <a:buChar char="•"/>
               <a:defRPr lang="ru-RU" sz="2800" b="0" u="none" strike="noStrike">
                 <a:solidFill>
@@ -6858,7 +6858,7 @@
                 </a:solidFill>
                 <a:effectLst/>
                 <a:uFillTx/>
-                <a:latin typeface="Aptos"/>
+                <a:latin typeface="+mn-lt"/>
               </a:defRPr>
             </a:lvl1pPr>
             <a:lvl2pPr lvl="1" algn="l" defTabSz="914400">
@@ -6871,7 +6871,7 @@
               <a:buClr>
                 <a:srgbClr val="000000"/>
               </a:buClr>
-              <a:buFont typeface="Arial"/>
+              <a:buFont typeface="Manrope Medium"/>
               <a:buChar char="•"/>
               <a:defRPr lang="ru-RU" sz="2400" b="0" u="none" strike="noStrike">
                 <a:solidFill>
@@ -6879,7 +6879,7 @@
                 </a:solidFill>
                 <a:effectLst/>
                 <a:uFillTx/>
-                <a:latin typeface="Aptos"/>
+                <a:latin typeface="+mn-lt"/>
               </a:defRPr>
             </a:lvl2pPr>
             <a:lvl3pPr lvl="2" algn="l" defTabSz="914400">
@@ -6892,7 +6892,7 @@
               <a:buClr>
                 <a:srgbClr val="000000"/>
               </a:buClr>
-              <a:buFont typeface="Arial"/>
+              <a:buFont typeface="Manrope Medium"/>
               <a:buChar char="•"/>
               <a:defRPr lang="ru-RU" sz="2000" b="0" u="none" strike="noStrike">
                 <a:solidFill>
@@ -6900,7 +6900,7 @@
                 </a:solidFill>
                 <a:effectLst/>
                 <a:uFillTx/>
-                <a:latin typeface="Aptos"/>
+                <a:latin typeface="+mn-lt"/>
               </a:defRPr>
             </a:lvl3pPr>
             <a:lvl4pPr lvl="3" algn="l" defTabSz="914400">
@@ -6913,7 +6913,7 @@
               <a:buClr>
                 <a:srgbClr val="000000"/>
               </a:buClr>
-              <a:buFont typeface="Arial"/>
+              <a:buFont typeface="Manrope Medium"/>
               <a:buChar char="•"/>
               <a:defRPr lang="ru-RU" sz="1800" b="0" u="none" strike="noStrike">
                 <a:solidFill>
@@ -6921,7 +6921,7 @@
                 </a:solidFill>
                 <a:effectLst/>
                 <a:uFillTx/>
-                <a:latin typeface="Aptos"/>
+                <a:latin typeface="+mn-lt"/>
               </a:defRPr>
             </a:lvl4pPr>
             <a:lvl5pPr lvl="4" algn="l" defTabSz="914400">
@@ -6934,7 +6934,7 @@
               <a:buClr>
                 <a:srgbClr val="000000"/>
               </a:buClr>
-              <a:buFont typeface="Arial"/>
+              <a:buFont typeface="Manrope Medium"/>
               <a:buChar char="•"/>
               <a:defRPr lang="ru-RU" sz="1800" b="0" u="none" strike="noStrike">
                 <a:solidFill>
@@ -6942,7 +6942,7 @@
                 </a:solidFill>
                 <a:effectLst/>
                 <a:uFillTx/>
-                <a:latin typeface="Aptos"/>
+                <a:latin typeface="+mn-lt"/>
               </a:defRPr>
             </a:lvl5pPr>
           </a:lstStyle>
@@ -6957,7 +6957,7 @@
               <a:buClr>
                 <a:srgbClr val="000000"/>
               </a:buClr>
-              <a:buFont typeface="Arial"/>
+              <a:buFont typeface="Manrope Medium"/>
               <a:buChar char="•"/>
             </a:pPr>
             <a:r>
@@ -6967,7 +6967,7 @@
                 </a:solidFill>
                 <a:effectLst/>
                 <a:uFillTx/>
-                <a:latin typeface="Aptos"/>
+                <a:latin typeface="+mn-lt"/>
               </a:rPr>
               <a:t>Образец текста</a:t>
             </a:r>
@@ -6977,7 +6977,7 @@
               </a:solidFill>
               <a:effectLst/>
               <a:uFillTx/>
-              <a:latin typeface="Aptos"/>
+              <a:latin typeface="+mn-lt"/>
             </a:endParaRPr>
           </a:p>
           <a:p>
@@ -6991,7 +6991,7 @@
               <a:buClr>
                 <a:srgbClr val="000000"/>
               </a:buClr>
-              <a:buFont typeface="Arial"/>
+              <a:buFont typeface="Manrope Medium"/>
               <a:buChar char="•"/>
             </a:pPr>
             <a:r>
@@ -7001,7 +7001,7 @@
                 </a:solidFill>
                 <a:effectLst/>
                 <a:uFillTx/>
-                <a:latin typeface="Aptos"/>
+                <a:latin typeface="+mn-lt"/>
               </a:rPr>
               <a:t>Второй уровень</a:t>
             </a:r>
@@ -7011,7 +7011,7 @@
               </a:solidFill>
               <a:effectLst/>
               <a:uFillTx/>
-              <a:latin typeface="Aptos"/>
+              <a:latin typeface="+mn-lt"/>
             </a:endParaRPr>
           </a:p>
           <a:p>
@@ -7025,7 +7025,7 @@
               <a:buClr>
                 <a:srgbClr val="000000"/>
               </a:buClr>
-              <a:buFont typeface="Arial"/>
+              <a:buFont typeface="Manrope Medium"/>
               <a:buChar char="•"/>
             </a:pPr>
             <a:r>
@@ -7035,7 +7035,7 @@
                 </a:solidFill>
                 <a:effectLst/>
                 <a:uFillTx/>
-                <a:latin typeface="Aptos"/>
+                <a:latin typeface="+mn-lt"/>
               </a:rPr>
               <a:t>Третий уровень</a:t>
             </a:r>
@@ -7045,7 +7045,7 @@
               </a:solidFill>
               <a:effectLst/>
               <a:uFillTx/>
-              <a:latin typeface="Aptos"/>
+              <a:latin typeface="+mn-lt"/>
             </a:endParaRPr>
           </a:p>
           <a:p>
@@ -7059,7 +7059,7 @@
               <a:buClr>
                 <a:srgbClr val="000000"/>
               </a:buClr>
-              <a:buFont typeface="Arial"/>
+              <a:buFont typeface="Manrope Medium"/>
               <a:buChar char="•"/>
             </a:pPr>
             <a:r>
@@ -7069,7 +7069,7 @@
                 </a:solidFill>
                 <a:effectLst/>
                 <a:uFillTx/>
-                <a:latin typeface="Aptos"/>
+                <a:latin typeface="+mn-lt"/>
               </a:rPr>
               <a:t>Четвертый уровень</a:t>
             </a:r>
@@ -7079,7 +7079,7 @@
               </a:solidFill>
               <a:effectLst/>
               <a:uFillTx/>
-              <a:latin typeface="Aptos"/>
+              <a:latin typeface="+mn-lt"/>
             </a:endParaRPr>
           </a:p>
           <a:p>
@@ -7093,7 +7093,7 @@
               <a:buClr>
                 <a:srgbClr val="000000"/>
               </a:buClr>
-              <a:buFont typeface="Arial"/>
+              <a:buFont typeface="Manrope Medium"/>
               <a:buChar char="•"/>
             </a:pPr>
             <a:r>
@@ -7103,7 +7103,7 @@
                 </a:solidFill>
                 <a:effectLst/>
                 <a:uFillTx/>
-                <a:latin typeface="Aptos"/>
+                <a:latin typeface="+mn-lt"/>
               </a:rPr>
               <a:t>Пятый уровень</a:t>
             </a:r>
@@ -7113,7 +7113,7 @@
               </a:solidFill>
               <a:effectLst/>
               <a:uFillTx/>
-              <a:latin typeface="Aptos"/>
+              <a:latin typeface="+mn-lt"/>
             </a:endParaRPr>
           </a:p>
         </p:txBody>
@@ -7156,7 +7156,7 @@
               <a:buClr>
                 <a:srgbClr val="000000"/>
               </a:buClr>
-              <a:buFont typeface="Arial"/>
+              <a:buFont typeface="Manrope Medium"/>
               <a:buChar char="•"/>
               <a:defRPr lang="ru-RU" sz="2800" b="0" u="none" strike="noStrike">
                 <a:solidFill>
@@ -7164,7 +7164,7 @@
                 </a:solidFill>
                 <a:effectLst/>
                 <a:uFillTx/>
-                <a:latin typeface="Aptos"/>
+                <a:latin typeface="+mn-lt"/>
               </a:defRPr>
             </a:lvl1pPr>
             <a:lvl2pPr lvl="1" algn="l" defTabSz="914400">
@@ -7177,7 +7177,7 @@
               <a:buClr>
                 <a:srgbClr val="000000"/>
               </a:buClr>
-              <a:buFont typeface="Arial"/>
+              <a:buFont typeface="Manrope Medium"/>
               <a:buChar char="•"/>
               <a:defRPr lang="ru-RU" sz="2400" b="0" u="none" strike="noStrike">
                 <a:solidFill>
@@ -7185,7 +7185,7 @@
                 </a:solidFill>
                 <a:effectLst/>
                 <a:uFillTx/>
-                <a:latin typeface="Aptos"/>
+                <a:latin typeface="+mn-lt"/>
               </a:defRPr>
             </a:lvl2pPr>
             <a:lvl3pPr lvl="2" algn="l" defTabSz="914400">
@@ -7198,7 +7198,7 @@
               <a:buClr>
                 <a:srgbClr val="000000"/>
               </a:buClr>
-              <a:buFont typeface="Arial"/>
+              <a:buFont typeface="Manrope Medium"/>
               <a:buChar char="•"/>
               <a:defRPr lang="ru-RU" sz="2000" b="0" u="none" strike="noStrike">
                 <a:solidFill>
@@ -7206,7 +7206,7 @@
                 </a:solidFill>
                 <a:effectLst/>
                 <a:uFillTx/>
-                <a:latin typeface="Aptos"/>
+                <a:latin typeface="+mn-lt"/>
               </a:defRPr>
             </a:lvl3pPr>
             <a:lvl4pPr lvl="3" algn="l" defTabSz="914400">
@@ -7219,7 +7219,7 @@
               <a:buClr>
                 <a:srgbClr val="000000"/>
               </a:buClr>
-              <a:buFont typeface="Arial"/>
+              <a:buFont typeface="Manrope Medium"/>
               <a:buChar char="•"/>
               <a:defRPr lang="ru-RU" sz="1800" b="0" u="none" strike="noStrike">
                 <a:solidFill>
@@ -7227,7 +7227,7 @@
                 </a:solidFill>
                 <a:effectLst/>
                 <a:uFillTx/>
-                <a:latin typeface="Aptos"/>
+                <a:latin typeface="+mn-lt"/>
               </a:defRPr>
             </a:lvl4pPr>
             <a:lvl5pPr lvl="4" algn="l" defTabSz="914400">
@@ -7240,7 +7240,7 @@
               <a:buClr>
                 <a:srgbClr val="000000"/>
               </a:buClr>
-              <a:buFont typeface="Arial"/>
+              <a:buFont typeface="Manrope Medium"/>
               <a:buChar char="•"/>
               <a:defRPr lang="ru-RU" sz="1800" b="0" u="none" strike="noStrike">
                 <a:solidFill>
@@ -7248,7 +7248,7 @@
                 </a:solidFill>
                 <a:effectLst/>
                 <a:uFillTx/>
-                <a:latin typeface="Aptos"/>
+                <a:latin typeface="+mn-lt"/>
               </a:defRPr>
             </a:lvl5pPr>
           </a:lstStyle>
@@ -7263,7 +7263,7 @@
               <a:buClr>
                 <a:srgbClr val="000000"/>
               </a:buClr>
-              <a:buFont typeface="Arial"/>
+              <a:buFont typeface="Manrope Medium"/>
               <a:buChar char="•"/>
             </a:pPr>
             <a:r>
@@ -7273,7 +7273,7 @@
                 </a:solidFill>
                 <a:effectLst/>
                 <a:uFillTx/>
-                <a:latin typeface="Aptos"/>
+                <a:latin typeface="+mn-lt"/>
               </a:rPr>
               <a:t>Образец текста</a:t>
             </a:r>
@@ -7283,7 +7283,7 @@
               </a:solidFill>
               <a:effectLst/>
               <a:uFillTx/>
-              <a:latin typeface="Aptos"/>
+              <a:latin typeface="+mn-lt"/>
             </a:endParaRPr>
           </a:p>
           <a:p>
@@ -7297,7 +7297,7 @@
               <a:buClr>
                 <a:srgbClr val="000000"/>
               </a:buClr>
-              <a:buFont typeface="Arial"/>
+              <a:buFont typeface="Manrope Medium"/>
               <a:buChar char="•"/>
             </a:pPr>
             <a:r>
@@ -7307,7 +7307,7 @@
                 </a:solidFill>
                 <a:effectLst/>
                 <a:uFillTx/>
-                <a:latin typeface="Aptos"/>
+                <a:latin typeface="+mn-lt"/>
               </a:rPr>
               <a:t>Второй уровень</a:t>
             </a:r>
@@ -7317,7 +7317,7 @@
               </a:solidFill>
               <a:effectLst/>
               <a:uFillTx/>
-              <a:latin typeface="Aptos"/>
+              <a:latin typeface="+mn-lt"/>
             </a:endParaRPr>
           </a:p>
           <a:p>
@@ -7331,7 +7331,7 @@
               <a:buClr>
                 <a:srgbClr val="000000"/>
               </a:buClr>
-              <a:buFont typeface="Arial"/>
+              <a:buFont typeface="Manrope Medium"/>
               <a:buChar char="•"/>
             </a:pPr>
             <a:r>
@@ -7341,7 +7341,7 @@
                 </a:solidFill>
                 <a:effectLst/>
                 <a:uFillTx/>
-                <a:latin typeface="Aptos"/>
+                <a:latin typeface="+mn-lt"/>
               </a:rPr>
               <a:t>Третий уровень</a:t>
             </a:r>
@@ -7351,7 +7351,7 @@
               </a:solidFill>
               <a:effectLst/>
               <a:uFillTx/>
-              <a:latin typeface="Aptos"/>
+              <a:latin typeface="+mn-lt"/>
             </a:endParaRPr>
           </a:p>
           <a:p>
@@ -7365,7 +7365,7 @@
               <a:buClr>
                 <a:srgbClr val="000000"/>
               </a:buClr>
-              <a:buFont typeface="Arial"/>
+              <a:buFont typeface="Manrope Medium"/>
               <a:buChar char="•"/>
             </a:pPr>
             <a:r>
@@ -7375,7 +7375,7 @@
                 </a:solidFill>
                 <a:effectLst/>
                 <a:uFillTx/>
-                <a:latin typeface="Aptos"/>
+                <a:latin typeface="+mn-lt"/>
               </a:rPr>
               <a:t>Четвертый уровень</a:t>
             </a:r>
@@ -7385,7 +7385,7 @@
               </a:solidFill>
               <a:effectLst/>
               <a:uFillTx/>
-              <a:latin typeface="Aptos"/>
+              <a:latin typeface="+mn-lt"/>
             </a:endParaRPr>
           </a:p>
           <a:p>
@@ -7399,7 +7399,7 @@
               <a:buClr>
                 <a:srgbClr val="000000"/>
               </a:buClr>
-              <a:buFont typeface="Arial"/>
+              <a:buFont typeface="Manrope Medium"/>
               <a:buChar char="•"/>
             </a:pPr>
             <a:r>
@@ -7409,7 +7409,7 @@
                 </a:solidFill>
                 <a:effectLst/>
                 <a:uFillTx/>
-                <a:latin typeface="Aptos"/>
+                <a:latin typeface="+mn-lt"/>
               </a:rPr>
               <a:t>Пятый уровень</a:t>
             </a:r>
@@ -7419,7 +7419,7 @@
               </a:solidFill>
               <a:effectLst/>
               <a:uFillTx/>
-              <a:latin typeface="Aptos"/>
+              <a:latin typeface="+mn-lt"/>
             </a:endParaRPr>
           </a:p>
         </p:txBody>
@@ -7465,7 +7465,7 @@
                 </a:solidFill>
                 <a:effectLst/>
                 <a:uFillTx/>
-                <a:latin typeface="Aptos"/>
+                <a:latin typeface="+mn-lt"/>
               </a:defRPr>
             </a:lvl1pPr>
           </a:lstStyle>
@@ -7485,7 +7485,7 @@
                 </a:solidFill>
                 <a:effectLst/>
                 <a:uFillTx/>
-                <a:latin typeface="Aptos"/>
+                <a:latin typeface="+mn-lt"/>
               </a:rPr>
               <a:t>&lt;date/time&gt;</a:t>
             </a:r>
@@ -7495,7 +7495,7 @@
               </a:solidFill>
               <a:effectLst/>
               <a:uFillTx/>
-              <a:latin typeface="Times New Roman"/>
+              <a:latin typeface="+mn-lt"/>
             </a:endParaRPr>
           </a:p>
         </p:txBody>
@@ -7536,7 +7536,7 @@
                 </a:solidFill>
                 <a:effectLst/>
                 <a:uFillTx/>
-                <a:latin typeface="Times New Roman"/>
+                <a:latin typeface="+mn-lt"/>
               </a:defRPr>
             </a:lvl1pPr>
           </a:lstStyle>
@@ -7551,7 +7551,7 @@
                 </a:solidFill>
                 <a:effectLst/>
                 <a:uFillTx/>
-                <a:latin typeface="Times New Roman"/>
+                <a:latin typeface="+mn-lt"/>
               </a:rPr>
               <a:t>&lt;footer&gt;</a:t>
             </a:r>
@@ -7561,7 +7561,7 @@
               </a:solidFill>
               <a:effectLst/>
               <a:uFillTx/>
-              <a:latin typeface="Times New Roman"/>
+              <a:latin typeface="+mn-lt"/>
             </a:endParaRPr>
           </a:p>
         </p:txBody>
@@ -7607,7 +7607,7 @@
                 </a:solidFill>
                 <a:effectLst/>
                 <a:uFillTx/>
-                <a:latin typeface="Aptos"/>
+                <a:latin typeface="+mn-lt"/>
               </a:defRPr>
             </a:lvl1pPr>
           </a:lstStyle>
@@ -7627,7 +7627,7 @@
                 </a:solidFill>
                 <a:effectLst/>
                 <a:uFillTx/>
-                <a:latin typeface="Aptos"/>
+                <a:latin typeface="+mn-lt"/>
               </a:rPr>
               <a:t>&lt;number&gt;</a:t>
             </a:fld>
@@ -7637,7 +7637,7 @@
               </a:solidFill>
               <a:effectLst/>
               <a:uFillTx/>
-              <a:latin typeface="Times New Roman"/>
+              <a:latin typeface="+mn-lt"/>
             </a:endParaRPr>
           </a:p>
         </p:txBody>
@@ -7707,13 +7707,13 @@
                 <a:spcPct val="90000"/>
               </a:lnSpc>
               <a:buNone/>
-              <a:defRPr lang="ru-RU" sz="4400" b="0" u="none" strike="noStrike">
+              <a:defRPr lang="ru-RU" sz="4400" b="1" u="none" strike="noStrike">
                 <a:solidFill>
                   <a:schemeClr val="dk1"/>
                 </a:solidFill>
                 <a:effectLst/>
                 <a:uFillTx/>
-                <a:latin typeface="Aptos Display"/>
+                <a:latin typeface="+mj-lt"/>
               </a:defRPr>
             </a:lvl1pPr>
           </a:lstStyle>
@@ -7725,23 +7725,23 @@
               <a:buNone/>
             </a:pPr>
             <a:r>
-              <a:rPr lang="ru-RU" sz="4400" b="0" u="none" strike="noStrike">
+              <a:rPr lang="ru-RU" sz="4400" b="1" u="none" strike="noStrike">
                 <a:solidFill>
                   <a:schemeClr val="dk1"/>
                 </a:solidFill>
                 <a:effectLst/>
                 <a:uFillTx/>
-                <a:latin typeface="Aptos Display"/>
+                <a:latin typeface="+mj-lt"/>
               </a:rPr>
               <a:t>Образец заголовка</a:t>
             </a:r>
-            <a:endParaRPr lang="ru-RU" sz="4400" b="0" u="none" strike="noStrike">
+            <a:endParaRPr lang="ru-RU" sz="4400" b="1" u="none" strike="noStrike">
               <a:solidFill>
                 <a:schemeClr val="dk1"/>
               </a:solidFill>
               <a:effectLst/>
               <a:uFillTx/>
-              <a:latin typeface="Aptos Display"/>
+              <a:latin typeface="+mj-lt"/>
             </a:endParaRPr>
           </a:p>
         </p:txBody>
@@ -7791,7 +7791,7 @@
                 </a:solidFill>
                 <a:effectLst/>
                 <a:uFillTx/>
-                <a:latin typeface="Aptos"/>
+                <a:latin typeface="+mn-lt"/>
               </a:defRPr>
             </a:lvl1pPr>
           </a:lstStyle>
@@ -7815,7 +7815,7 @@
                 </a:solidFill>
                 <a:effectLst/>
                 <a:uFillTx/>
-                <a:latin typeface="Aptos"/>
+                <a:latin typeface="+mn-lt"/>
               </a:rPr>
               <a:t>Образец текста</a:t>
             </a:r>
@@ -7825,7 +7825,7 @@
               </a:solidFill>
               <a:effectLst/>
               <a:uFillTx/>
-              <a:latin typeface="Aptos"/>
+              <a:latin typeface="+mn-lt"/>
             </a:endParaRPr>
           </a:p>
         </p:txBody>
@@ -7868,7 +7868,7 @@
               <a:buClr>
                 <a:srgbClr val="000000"/>
               </a:buClr>
-              <a:buFont typeface="Arial"/>
+              <a:buFont typeface="Manrope Medium"/>
               <a:buChar char="•"/>
               <a:tabLst>
                 <a:tab pos="0" algn="l"/>
@@ -7879,7 +7879,7 @@
                 </a:solidFill>
                 <a:effectLst/>
                 <a:uFillTx/>
-                <a:latin typeface="Aptos"/>
+                <a:latin typeface="+mn-lt"/>
               </a:defRPr>
             </a:lvl1pPr>
             <a:lvl2pPr lvl="1" algn="l" defTabSz="914400">
@@ -7892,7 +7892,7 @@
               <a:buClr>
                 <a:srgbClr val="000000"/>
               </a:buClr>
-              <a:buFont typeface="Arial"/>
+              <a:buFont typeface="Manrope Medium"/>
               <a:buChar char="•"/>
               <a:tabLst>
                 <a:tab pos="0" algn="l"/>
@@ -7903,7 +7903,7 @@
                 </a:solidFill>
                 <a:effectLst/>
                 <a:uFillTx/>
-                <a:latin typeface="Aptos"/>
+                <a:latin typeface="+mn-lt"/>
               </a:defRPr>
             </a:lvl2pPr>
             <a:lvl3pPr lvl="2" algn="l" defTabSz="914400">
@@ -7916,7 +7916,7 @@
               <a:buClr>
                 <a:srgbClr val="000000"/>
               </a:buClr>
-              <a:buFont typeface="Arial"/>
+              <a:buFont typeface="Manrope Medium"/>
               <a:buChar char="•"/>
               <a:tabLst>
                 <a:tab pos="0" algn="l"/>
@@ -7927,7 +7927,7 @@
                 </a:solidFill>
                 <a:effectLst/>
                 <a:uFillTx/>
-                <a:latin typeface="Aptos"/>
+                <a:latin typeface="+mn-lt"/>
               </a:defRPr>
             </a:lvl3pPr>
             <a:lvl4pPr lvl="3" algn="l" defTabSz="914400">
@@ -7940,7 +7940,7 @@
               <a:buClr>
                 <a:srgbClr val="000000"/>
               </a:buClr>
-              <a:buFont typeface="Arial"/>
+              <a:buFont typeface="Manrope Medium"/>
               <a:buChar char="•"/>
               <a:tabLst>
                 <a:tab pos="0" algn="l"/>
@@ -7951,7 +7951,7 @@
                 </a:solidFill>
                 <a:effectLst/>
                 <a:uFillTx/>
-                <a:latin typeface="Aptos"/>
+                <a:latin typeface="+mn-lt"/>
               </a:defRPr>
             </a:lvl4pPr>
             <a:lvl5pPr lvl="4" algn="l" defTabSz="914400">
@@ -7964,7 +7964,7 @@
               <a:buClr>
                 <a:srgbClr val="000000"/>
               </a:buClr>
-              <a:buFont typeface="Arial"/>
+              <a:buFont typeface="Manrope Medium"/>
               <a:buChar char="•"/>
               <a:tabLst>
                 <a:tab pos="0" algn="l"/>
@@ -7975,7 +7975,7 @@
                 </a:solidFill>
                 <a:effectLst/>
                 <a:uFillTx/>
-                <a:latin typeface="Aptos"/>
+                <a:latin typeface="+mn-lt"/>
               </a:defRPr>
             </a:lvl5pPr>
           </a:lstStyle>
@@ -7990,7 +7990,7 @@
               <a:buClr>
                 <a:srgbClr val="000000"/>
               </a:buClr>
-              <a:buFont typeface="Arial"/>
+              <a:buFont typeface="Manrope Medium"/>
               <a:buChar char="•"/>
               <a:tabLst>
                 <a:tab pos="0" algn="l"/>
@@ -8003,7 +8003,7 @@
                 </a:solidFill>
                 <a:effectLst/>
                 <a:uFillTx/>
-                <a:latin typeface="Aptos"/>
+                <a:latin typeface="+mn-lt"/>
               </a:rPr>
               <a:t>Образец текста</a:t>
             </a:r>
@@ -8013,7 +8013,7 @@
               </a:solidFill>
               <a:effectLst/>
               <a:uFillTx/>
-              <a:latin typeface="Aptos"/>
+              <a:latin typeface="+mn-lt"/>
             </a:endParaRPr>
           </a:p>
           <a:p>
@@ -8027,7 +8027,7 @@
               <a:buClr>
                 <a:srgbClr val="000000"/>
               </a:buClr>
-              <a:buFont typeface="Arial"/>
+              <a:buFont typeface="Manrope Medium"/>
               <a:buChar char="•"/>
               <a:tabLst>
                 <a:tab pos="0" algn="l"/>
@@ -8040,7 +8040,7 @@
                 </a:solidFill>
                 <a:effectLst/>
                 <a:uFillTx/>
-                <a:latin typeface="Aptos"/>
+                <a:latin typeface="+mn-lt"/>
               </a:rPr>
               <a:t>Второй уровень</a:t>
             </a:r>
@@ -8050,7 +8050,7 @@
               </a:solidFill>
               <a:effectLst/>
               <a:uFillTx/>
-              <a:latin typeface="Aptos"/>
+              <a:latin typeface="+mn-lt"/>
             </a:endParaRPr>
           </a:p>
           <a:p>
@@ -8064,7 +8064,7 @@
               <a:buClr>
                 <a:srgbClr val="000000"/>
               </a:buClr>
-              <a:buFont typeface="Arial"/>
+              <a:buFont typeface="Manrope Medium"/>
               <a:buChar char="•"/>
               <a:tabLst>
                 <a:tab pos="0" algn="l"/>
@@ -8077,7 +8077,7 @@
                 </a:solidFill>
                 <a:effectLst/>
                 <a:uFillTx/>
-                <a:latin typeface="Aptos"/>
+                <a:latin typeface="+mn-lt"/>
               </a:rPr>
               <a:t>Третий уровень</a:t>
             </a:r>
@@ -8087,7 +8087,7 @@
               </a:solidFill>
               <a:effectLst/>
               <a:uFillTx/>
-              <a:latin typeface="Aptos"/>
+              <a:latin typeface="+mn-lt"/>
             </a:endParaRPr>
           </a:p>
           <a:p>
@@ -8101,7 +8101,7 @@
               <a:buClr>
                 <a:srgbClr val="000000"/>
               </a:buClr>
-              <a:buFont typeface="Arial"/>
+              <a:buFont typeface="Manrope Medium"/>
               <a:buChar char="•"/>
               <a:tabLst>
                 <a:tab pos="0" algn="l"/>
@@ -8114,7 +8114,7 @@
                 </a:solidFill>
                 <a:effectLst/>
                 <a:uFillTx/>
-                <a:latin typeface="Aptos"/>
+                <a:latin typeface="+mn-lt"/>
               </a:rPr>
               <a:t>Четвертый уровень</a:t>
             </a:r>
@@ -8124,7 +8124,7 @@
               </a:solidFill>
               <a:effectLst/>
               <a:uFillTx/>
-              <a:latin typeface="Aptos"/>
+              <a:latin typeface="+mn-lt"/>
             </a:endParaRPr>
           </a:p>
           <a:p>
@@ -8138,7 +8138,7 @@
               <a:buClr>
                 <a:srgbClr val="000000"/>
               </a:buClr>
-              <a:buFont typeface="Arial"/>
+              <a:buFont typeface="Manrope Medium"/>
               <a:buChar char="•"/>
               <a:tabLst>
                 <a:tab pos="0" algn="l"/>
@@ -8151,7 +8151,7 @@
                 </a:solidFill>
                 <a:effectLst/>
                 <a:uFillTx/>
-                <a:latin typeface="Aptos"/>
+                <a:latin typeface="+mn-lt"/>
               </a:rPr>
               <a:t>Пятый уровень</a:t>
             </a:r>
@@ -8161,7 +8161,7 @@
               </a:solidFill>
               <a:effectLst/>
               <a:uFillTx/>
-              <a:latin typeface="Aptos"/>
+              <a:latin typeface="+mn-lt"/>
             </a:endParaRPr>
           </a:p>
         </p:txBody>
@@ -8211,7 +8211,7 @@
                 </a:solidFill>
                 <a:effectLst/>
                 <a:uFillTx/>
-                <a:latin typeface="Aptos"/>
+                <a:latin typeface="+mn-lt"/>
               </a:defRPr>
             </a:lvl1pPr>
           </a:lstStyle>
@@ -8235,7 +8235,7 @@
                 </a:solidFill>
                 <a:effectLst/>
                 <a:uFillTx/>
-                <a:latin typeface="Aptos"/>
+                <a:latin typeface="+mn-lt"/>
               </a:rPr>
               <a:t>Образец текста</a:t>
             </a:r>
@@ -8245,7 +8245,7 @@
               </a:solidFill>
               <a:effectLst/>
               <a:uFillTx/>
-              <a:latin typeface="Aptos"/>
+              <a:latin typeface="+mn-lt"/>
             </a:endParaRPr>
           </a:p>
         </p:txBody>
@@ -8288,7 +8288,7 @@
               <a:buClr>
                 <a:srgbClr val="000000"/>
               </a:buClr>
-              <a:buFont typeface="Arial"/>
+              <a:buFont typeface="Manrope Medium"/>
               <a:buChar char="•"/>
               <a:tabLst>
                 <a:tab pos="0" algn="l"/>
@@ -8299,7 +8299,7 @@
                 </a:solidFill>
                 <a:effectLst/>
                 <a:uFillTx/>
-                <a:latin typeface="Aptos"/>
+                <a:latin typeface="+mn-lt"/>
               </a:defRPr>
             </a:lvl1pPr>
             <a:lvl2pPr lvl="1" algn="l" defTabSz="914400">
@@ -8312,7 +8312,7 @@
               <a:buClr>
                 <a:srgbClr val="000000"/>
               </a:buClr>
-              <a:buFont typeface="Arial"/>
+              <a:buFont typeface="Manrope Medium"/>
               <a:buChar char="•"/>
               <a:tabLst>
                 <a:tab pos="0" algn="l"/>
@@ -8323,7 +8323,7 @@
                 </a:solidFill>
                 <a:effectLst/>
                 <a:uFillTx/>
-                <a:latin typeface="Aptos"/>
+                <a:latin typeface="+mn-lt"/>
               </a:defRPr>
             </a:lvl2pPr>
             <a:lvl3pPr lvl="2" algn="l" defTabSz="914400">
@@ -8336,7 +8336,7 @@
               <a:buClr>
                 <a:srgbClr val="000000"/>
               </a:buClr>
-              <a:buFont typeface="Arial"/>
+              <a:buFont typeface="Manrope Medium"/>
               <a:buChar char="•"/>
               <a:tabLst>
                 <a:tab pos="0" algn="l"/>
@@ -8347,7 +8347,7 @@
                 </a:solidFill>
                 <a:effectLst/>
                 <a:uFillTx/>
-                <a:latin typeface="Aptos"/>
+                <a:latin typeface="+mn-lt"/>
               </a:defRPr>
             </a:lvl3pPr>
             <a:lvl4pPr lvl="3" algn="l" defTabSz="914400">
@@ -8360,7 +8360,7 @@
               <a:buClr>
                 <a:srgbClr val="000000"/>
               </a:buClr>
-              <a:buFont typeface="Arial"/>
+              <a:buFont typeface="Manrope Medium"/>
               <a:buChar char="•"/>
               <a:tabLst>
                 <a:tab pos="0" algn="l"/>
@@ -8371,7 +8371,7 @@
                 </a:solidFill>
                 <a:effectLst/>
                 <a:uFillTx/>
-                <a:latin typeface="Aptos"/>
+                <a:latin typeface="+mn-lt"/>
               </a:defRPr>
             </a:lvl4pPr>
             <a:lvl5pPr lvl="4" algn="l" defTabSz="914400">
@@ -8384,7 +8384,7 @@
               <a:buClr>
                 <a:srgbClr val="000000"/>
               </a:buClr>
-              <a:buFont typeface="Arial"/>
+              <a:buFont typeface="Manrope Medium"/>
               <a:buChar char="•"/>
               <a:tabLst>
                 <a:tab pos="0" algn="l"/>
@@ -8395,7 +8395,7 @@
                 </a:solidFill>
                 <a:effectLst/>
                 <a:uFillTx/>
-                <a:latin typeface="Aptos"/>
+                <a:latin typeface="+mn-lt"/>
               </a:defRPr>
             </a:lvl5pPr>
           </a:lstStyle>
@@ -8410,7 +8410,7 @@
               <a:buClr>
                 <a:srgbClr val="000000"/>
               </a:buClr>
-              <a:buFont typeface="Arial"/>
+              <a:buFont typeface="Manrope Medium"/>
               <a:buChar char="•"/>
               <a:tabLst>
                 <a:tab pos="0" algn="l"/>
@@ -8423,7 +8423,7 @@
                 </a:solidFill>
                 <a:effectLst/>
                 <a:uFillTx/>
-                <a:latin typeface="Aptos"/>
+                <a:latin typeface="+mn-lt"/>
               </a:rPr>
               <a:t>Образец текста</a:t>
             </a:r>
@@ -8433,7 +8433,7 @@
               </a:solidFill>
               <a:effectLst/>
               <a:uFillTx/>
-              <a:latin typeface="Aptos"/>
+              <a:latin typeface="+mn-lt"/>
             </a:endParaRPr>
           </a:p>
           <a:p>
@@ -8447,7 +8447,7 @@
               <a:buClr>
                 <a:srgbClr val="000000"/>
               </a:buClr>
-              <a:buFont typeface="Arial"/>
+              <a:buFont typeface="Manrope Medium"/>
               <a:buChar char="•"/>
               <a:tabLst>
                 <a:tab pos="0" algn="l"/>
@@ -8460,7 +8460,7 @@
                 </a:solidFill>
                 <a:effectLst/>
                 <a:uFillTx/>
-                <a:latin typeface="Aptos"/>
+                <a:latin typeface="+mn-lt"/>
               </a:rPr>
               <a:t>Второй уровень</a:t>
             </a:r>
@@ -8470,7 +8470,7 @@
               </a:solidFill>
               <a:effectLst/>
               <a:uFillTx/>
-              <a:latin typeface="Aptos"/>
+              <a:latin typeface="+mn-lt"/>
             </a:endParaRPr>
           </a:p>
           <a:p>
@@ -8484,7 +8484,7 @@
               <a:buClr>
                 <a:srgbClr val="000000"/>
               </a:buClr>
-              <a:buFont typeface="Arial"/>
+              <a:buFont typeface="Manrope Medium"/>
               <a:buChar char="•"/>
               <a:tabLst>
                 <a:tab pos="0" algn="l"/>
@@ -8497,7 +8497,7 @@
                 </a:solidFill>
                 <a:effectLst/>
                 <a:uFillTx/>
-                <a:latin typeface="Aptos"/>
+                <a:latin typeface="+mn-lt"/>
               </a:rPr>
               <a:t>Третий уровень</a:t>
             </a:r>
@@ -8507,7 +8507,7 @@
               </a:solidFill>
               <a:effectLst/>
               <a:uFillTx/>
-              <a:latin typeface="Aptos"/>
+              <a:latin typeface="+mn-lt"/>
             </a:endParaRPr>
           </a:p>
           <a:p>
@@ -8521,7 +8521,7 @@
               <a:buClr>
                 <a:srgbClr val="000000"/>
               </a:buClr>
-              <a:buFont typeface="Arial"/>
+              <a:buFont typeface="Manrope Medium"/>
               <a:buChar char="•"/>
               <a:tabLst>
                 <a:tab pos="0" algn="l"/>
@@ -8534,7 +8534,7 @@
                 </a:solidFill>
                 <a:effectLst/>
                 <a:uFillTx/>
-                <a:latin typeface="Aptos"/>
+                <a:latin typeface="+mn-lt"/>
               </a:rPr>
               <a:t>Четвертый уровень</a:t>
             </a:r>
@@ -8544,7 +8544,7 @@
               </a:solidFill>
               <a:effectLst/>
               <a:uFillTx/>
-              <a:latin typeface="Aptos"/>
+              <a:latin typeface="+mn-lt"/>
             </a:endParaRPr>
           </a:p>
           <a:p>
@@ -8558,7 +8558,7 @@
               <a:buClr>
                 <a:srgbClr val="000000"/>
               </a:buClr>
-              <a:buFont typeface="Arial"/>
+              <a:buFont typeface="Manrope Medium"/>
               <a:buChar char="•"/>
               <a:tabLst>
                 <a:tab pos="0" algn="l"/>
@@ -8571,7 +8571,7 @@
                 </a:solidFill>
                 <a:effectLst/>
                 <a:uFillTx/>
-                <a:latin typeface="Aptos"/>
+                <a:latin typeface="+mn-lt"/>
               </a:rPr>
               <a:t>Пятый уровень</a:t>
             </a:r>
@@ -8581,7 +8581,7 @@
               </a:solidFill>
               <a:effectLst/>
               <a:uFillTx/>
-              <a:latin typeface="Aptos"/>
+              <a:latin typeface="+mn-lt"/>
             </a:endParaRPr>
           </a:p>
         </p:txBody>
@@ -8627,7 +8627,7 @@
                 </a:solidFill>
                 <a:effectLst/>
                 <a:uFillTx/>
-                <a:latin typeface="Aptos"/>
+                <a:latin typeface="+mn-lt"/>
               </a:defRPr>
             </a:lvl1pPr>
           </a:lstStyle>
@@ -8647,7 +8647,7 @@
                 </a:solidFill>
                 <a:effectLst/>
                 <a:uFillTx/>
-                <a:latin typeface="Aptos"/>
+                <a:latin typeface="+mn-lt"/>
               </a:rPr>
               <a:t>&lt;date/time&gt;</a:t>
             </a:r>
@@ -8657,7 +8657,7 @@
               </a:solidFill>
               <a:effectLst/>
               <a:uFillTx/>
-              <a:latin typeface="Times New Roman"/>
+              <a:latin typeface="+mn-lt"/>
             </a:endParaRPr>
           </a:p>
         </p:txBody>
@@ -8698,7 +8698,7 @@
                 </a:solidFill>
                 <a:effectLst/>
                 <a:uFillTx/>
-                <a:latin typeface="Times New Roman"/>
+                <a:latin typeface="+mn-lt"/>
               </a:defRPr>
             </a:lvl1pPr>
           </a:lstStyle>
@@ -8713,7 +8713,7 @@
                 </a:solidFill>
                 <a:effectLst/>
                 <a:uFillTx/>
-                <a:latin typeface="Times New Roman"/>
+                <a:latin typeface="+mn-lt"/>
               </a:rPr>
               <a:t>&lt;footer&gt;</a:t>
             </a:r>
@@ -8723,7 +8723,7 @@
               </a:solidFill>
               <a:effectLst/>
               <a:uFillTx/>
-              <a:latin typeface="Times New Roman"/>
+              <a:latin typeface="+mn-lt"/>
             </a:endParaRPr>
           </a:p>
         </p:txBody>
@@ -8769,7 +8769,7 @@
                 </a:solidFill>
                 <a:effectLst/>
                 <a:uFillTx/>
-                <a:latin typeface="Aptos"/>
+                <a:latin typeface="+mn-lt"/>
               </a:defRPr>
             </a:lvl1pPr>
           </a:lstStyle>
@@ -8789,7 +8789,7 @@
                 </a:solidFill>
                 <a:effectLst/>
                 <a:uFillTx/>
-                <a:latin typeface="Aptos"/>
+                <a:latin typeface="+mn-lt"/>
               </a:rPr>
               <a:t>&lt;number&gt;</a:t>
             </a:fld>
@@ -8799,7 +8799,7 @@
               </a:solidFill>
               <a:effectLst/>
               <a:uFillTx/>
-              <a:latin typeface="Times New Roman"/>
+              <a:latin typeface="+mn-lt"/>
             </a:endParaRPr>
           </a:p>
         </p:txBody>
@@ -8869,13 +8869,13 @@
                 <a:spcPct val="90000"/>
               </a:lnSpc>
               <a:buNone/>
-              <a:defRPr lang="ru-RU" sz="4400" b="0" u="none" strike="noStrike">
+              <a:defRPr lang="ru-RU" sz="4400" b="1" u="none" strike="noStrike">
                 <a:solidFill>
                   <a:schemeClr val="dk1"/>
                 </a:solidFill>
                 <a:effectLst/>
                 <a:uFillTx/>
-                <a:latin typeface="Aptos Display"/>
+                <a:latin typeface="+mj-lt"/>
               </a:defRPr>
             </a:lvl1pPr>
           </a:lstStyle>
@@ -8887,23 +8887,23 @@
               <a:buNone/>
             </a:pPr>
             <a:r>
-              <a:rPr lang="ru-RU" sz="4400" b="0" u="none" strike="noStrike">
+              <a:rPr lang="ru-RU" sz="4400" b="1" u="none" strike="noStrike">
                 <a:solidFill>
                   <a:schemeClr val="dk1"/>
                 </a:solidFill>
                 <a:effectLst/>
                 <a:uFillTx/>
-                <a:latin typeface="Aptos Display"/>
+                <a:latin typeface="+mj-lt"/>
               </a:rPr>
               <a:t>Образец заголовка</a:t>
             </a:r>
-            <a:endParaRPr lang="ru-RU" sz="4400" b="0" u="none" strike="noStrike">
+            <a:endParaRPr lang="ru-RU" sz="4400" b="1" u="none" strike="noStrike">
               <a:solidFill>
                 <a:schemeClr val="dk1"/>
               </a:solidFill>
               <a:effectLst/>
               <a:uFillTx/>
-              <a:latin typeface="Aptos Display"/>
+              <a:latin typeface="+mj-lt"/>
             </a:endParaRPr>
           </a:p>
         </p:txBody>
@@ -8949,7 +8949,7 @@
                 </a:solidFill>
                 <a:effectLst/>
                 <a:uFillTx/>
-                <a:latin typeface="Aptos"/>
+                <a:latin typeface="+mn-lt"/>
               </a:defRPr>
             </a:lvl1pPr>
           </a:lstStyle>
@@ -8969,7 +8969,7 @@
                 </a:solidFill>
                 <a:effectLst/>
                 <a:uFillTx/>
-                <a:latin typeface="Aptos"/>
+                <a:latin typeface="+mn-lt"/>
               </a:rPr>
               <a:t>&lt;date/time&gt;</a:t>
             </a:r>
@@ -8979,7 +8979,7 @@
               </a:solidFill>
               <a:effectLst/>
               <a:uFillTx/>
-              <a:latin typeface="Times New Roman"/>
+              <a:latin typeface="+mn-lt"/>
             </a:endParaRPr>
           </a:p>
         </p:txBody>
@@ -9020,7 +9020,7 @@
                 </a:solidFill>
                 <a:effectLst/>
                 <a:uFillTx/>
-                <a:latin typeface="Times New Roman"/>
+                <a:latin typeface="+mn-lt"/>
               </a:defRPr>
             </a:lvl1pPr>
           </a:lstStyle>
@@ -9035,7 +9035,7 @@
                 </a:solidFill>
                 <a:effectLst/>
                 <a:uFillTx/>
-                <a:latin typeface="Times New Roman"/>
+                <a:latin typeface="+mn-lt"/>
               </a:rPr>
               <a:t>&lt;footer&gt;</a:t>
             </a:r>
@@ -9045,7 +9045,7 @@
               </a:solidFill>
               <a:effectLst/>
               <a:uFillTx/>
-              <a:latin typeface="Times New Roman"/>
+              <a:latin typeface="+mn-lt"/>
             </a:endParaRPr>
           </a:p>
         </p:txBody>
@@ -9091,7 +9091,7 @@
                 </a:solidFill>
                 <a:effectLst/>
                 <a:uFillTx/>
-                <a:latin typeface="Aptos"/>
+                <a:latin typeface="+mn-lt"/>
               </a:defRPr>
             </a:lvl1pPr>
           </a:lstStyle>
@@ -9111,7 +9111,7 @@
                 </a:solidFill>
                 <a:effectLst/>
                 <a:uFillTx/>
-                <a:latin typeface="Aptos"/>
+                <a:latin typeface="+mn-lt"/>
               </a:rPr>
               <a:t>&lt;number&gt;</a:t>
             </a:fld>
@@ -9121,7 +9121,7 @@
               </a:solidFill>
               <a:effectLst/>
               <a:uFillTx/>
-              <a:latin typeface="Times New Roman"/>
+              <a:latin typeface="+mn-lt"/>
             </a:endParaRPr>
           </a:p>
         </p:txBody>
@@ -9164,7 +9164,7 @@
               <a:buClr>
                 <a:srgbClr val="000000"/>
               </a:buClr>
-              <a:buFont typeface="Arial"/>
+              <a:buFont typeface="Manrope Medium"/>
               <a:buChar char="•"/>
               <a:defRPr lang="ru-RU" sz="2800" b="0" u="none" strike="noStrike">
                 <a:solidFill>
@@ -9172,7 +9172,7 @@
                 </a:solidFill>
                 <a:effectLst/>
                 <a:uFillTx/>
-                <a:latin typeface="Aptos"/>
+                <a:latin typeface="+mn-lt"/>
               </a:defRPr>
             </a:lvl1pPr>
             <a:lvl2pPr lvl="1" algn="l" defTabSz="914400">
@@ -9194,7 +9194,7 @@
                 </a:solidFill>
                 <a:effectLst/>
                 <a:uFillTx/>
-                <a:latin typeface="Aptos"/>
+                <a:latin typeface="+mn-lt"/>
               </a:defRPr>
             </a:lvl2pPr>
             <a:lvl3pPr lvl="2" algn="l" defTabSz="914400">
@@ -9216,7 +9216,7 @@
                 </a:solidFill>
                 <a:effectLst/>
                 <a:uFillTx/>
-                <a:latin typeface="Aptos"/>
+                <a:latin typeface="+mn-lt"/>
               </a:defRPr>
             </a:lvl3pPr>
             <a:lvl4pPr lvl="3" algn="l" defTabSz="914400">
@@ -9238,7 +9238,7 @@
                 </a:solidFill>
                 <a:effectLst/>
                 <a:uFillTx/>
-                <a:latin typeface="Aptos"/>
+                <a:latin typeface="+mn-lt"/>
               </a:defRPr>
             </a:lvl4pPr>
             <a:lvl5pPr lvl="4" algn="l" defTabSz="914400">
@@ -9260,7 +9260,7 @@
                 </a:solidFill>
                 <a:effectLst/>
                 <a:uFillTx/>
-                <a:latin typeface="Aptos"/>
+                <a:latin typeface="+mn-lt"/>
               </a:defRPr>
             </a:lvl5pPr>
             <a:lvl6pPr lvl="5" algn="l" defTabSz="914400">
@@ -9282,7 +9282,7 @@
                 </a:solidFill>
                 <a:effectLst/>
                 <a:uFillTx/>
-                <a:latin typeface="Aptos"/>
+                <a:latin typeface="+mn-lt"/>
               </a:defRPr>
             </a:lvl6pPr>
             <a:lvl7pPr lvl="6" algn="l" defTabSz="914400">
@@ -9304,7 +9304,7 @@
                 </a:solidFill>
                 <a:effectLst/>
                 <a:uFillTx/>
-                <a:latin typeface="Aptos"/>
+                <a:latin typeface="+mn-lt"/>
               </a:defRPr>
             </a:lvl7pPr>
           </a:lstStyle>
@@ -9319,7 +9319,7 @@
               <a:buClr>
                 <a:srgbClr val="000000"/>
               </a:buClr>
-              <a:buFont typeface="Arial"/>
+              <a:buFont typeface="Manrope Medium"/>
               <a:buChar char="•"/>
             </a:pPr>
             <a:r>
@@ -9329,7 +9329,7 @@
                 </a:solidFill>
                 <a:effectLst/>
                 <a:uFillTx/>
-                <a:latin typeface="Aptos"/>
+                <a:latin typeface="+mn-lt"/>
               </a:rPr>
               <a:t>Click to edit the outline text format</a:t>
             </a:r>
@@ -9339,7 +9339,7 @@
               </a:solidFill>
               <a:effectLst/>
               <a:uFillTx/>
-              <a:latin typeface="Aptos"/>
+              <a:latin typeface="+mn-lt"/>
             </a:endParaRPr>
           </a:p>
           <a:p>
@@ -9364,7 +9364,7 @@
                 </a:solidFill>
                 <a:effectLst/>
                 <a:uFillTx/>
-                <a:latin typeface="Aptos"/>
+                <a:latin typeface="+mn-lt"/>
               </a:rPr>
               <a:t>Second Outline Level</a:t>
             </a:r>
@@ -9374,7 +9374,7 @@
               </a:solidFill>
               <a:effectLst/>
               <a:uFillTx/>
-              <a:latin typeface="Aptos"/>
+              <a:latin typeface="+mn-lt"/>
             </a:endParaRPr>
           </a:p>
           <a:p>
@@ -9399,7 +9399,7 @@
                 </a:solidFill>
                 <a:effectLst/>
                 <a:uFillTx/>
-                <a:latin typeface="Aptos"/>
+                <a:latin typeface="+mn-lt"/>
               </a:rPr>
               <a:t>Third Outline Level</a:t>
             </a:r>
@@ -9409,7 +9409,7 @@
               </a:solidFill>
               <a:effectLst/>
               <a:uFillTx/>
-              <a:latin typeface="Aptos"/>
+              <a:latin typeface="+mn-lt"/>
             </a:endParaRPr>
           </a:p>
           <a:p>
@@ -9434,7 +9434,7 @@
                 </a:solidFill>
                 <a:effectLst/>
                 <a:uFillTx/>
-                <a:latin typeface="Aptos"/>
+                <a:latin typeface="+mn-lt"/>
               </a:rPr>
               <a:t>Fourth Outline Level</a:t>
             </a:r>
@@ -9444,7 +9444,7 @@
               </a:solidFill>
               <a:effectLst/>
               <a:uFillTx/>
-              <a:latin typeface="Aptos"/>
+              <a:latin typeface="+mn-lt"/>
             </a:endParaRPr>
           </a:p>
           <a:p>
@@ -9469,7 +9469,7 @@
                 </a:solidFill>
                 <a:effectLst/>
                 <a:uFillTx/>
-                <a:latin typeface="Aptos"/>
+                <a:latin typeface="+mn-lt"/>
               </a:rPr>
               <a:t>Fifth Outline Level</a:t>
             </a:r>
@@ -9479,7 +9479,7 @@
               </a:solidFill>
               <a:effectLst/>
               <a:uFillTx/>
-              <a:latin typeface="Aptos"/>
+              <a:latin typeface="+mn-lt"/>
             </a:endParaRPr>
           </a:p>
           <a:p>
@@ -9504,7 +9504,7 @@
                 </a:solidFill>
                 <a:effectLst/>
                 <a:uFillTx/>
-                <a:latin typeface="Aptos"/>
+                <a:latin typeface="+mn-lt"/>
               </a:rPr>
               <a:t>Sixth Outline Level</a:t>
             </a:r>
@@ -9514,7 +9514,7 @@
               </a:solidFill>
               <a:effectLst/>
               <a:uFillTx/>
-              <a:latin typeface="Aptos"/>
+              <a:latin typeface="+mn-lt"/>
             </a:endParaRPr>
           </a:p>
           <a:p>
@@ -9539,7 +9539,7 @@
                 </a:solidFill>
                 <a:effectLst/>
                 <a:uFillTx/>
-                <a:latin typeface="Aptos"/>
+                <a:latin typeface="+mn-lt"/>
               </a:rPr>
               <a:t>Seventh Outline Level</a:t>
             </a:r>
@@ -9549,7 +9549,7 @@
               </a:solidFill>
               <a:effectLst/>
               <a:uFillTx/>
-              <a:latin typeface="Aptos"/>
+              <a:latin typeface="+mn-lt"/>
             </a:endParaRPr>
           </a:p>
         </p:txBody>
@@ -9674,7 +9674,7 @@
               </a:solidFill>
               <a:effectLst/>
               <a:uFillTx/>
-              <a:latin typeface="Aptos"/>
+              <a:latin typeface="+mn-lt"/>
             </a:endParaRPr>
           </a:p>
         </p:txBody>
@@ -9727,7 +9727,7 @@
                 </a:solidFill>
                 <a:effectLst/>
                 <a:uFillTx/>
-                <a:latin typeface="Manrope Medium"/>
+                <a:latin typeface="+mn-lt"/>
               </a:rPr>
               <a:t>Обучение</a:t>
             </a:r>
@@ -9737,7 +9737,7 @@
               </a:solidFill>
               <a:effectLst/>
               <a:uFillTx/>
-              <a:latin typeface="Arial"/>
+              <a:latin typeface="+mn-lt"/>
             </a:endParaRPr>
           </a:p>
         </p:txBody>
@@ -9788,7 +9788,7 @@
                 </a:solidFill>
                 <a:effectLst/>
                 <a:uFillTx/>
-                <a:latin typeface="Manrope Medium"/>
+                <a:latin typeface="+mn-lt"/>
               </a:rPr>
               <a:t>Без 3D</a:t>
             </a:r>
@@ -9798,7 +9798,7 @@
               </a:solidFill>
               <a:effectLst/>
               <a:uFillTx/>
-              <a:latin typeface="Arial"/>
+              <a:latin typeface="+mn-lt"/>
             </a:endParaRPr>
           </a:p>
         </p:txBody>
@@ -9849,8 +9849,8 @@
                 </a:solidFill>
                 <a:effectLst/>
                 <a:uFillTx/>
-                <a:latin typeface="Manrope Medium"/>
-                <a:ea typeface="Roboto Light"/>
+                <a:latin typeface="+mn-lt"/>
+                <a:ea typeface="Manrope"/>
               </a:rPr>
               <a:t>Окупаемость</a:t>
             </a:r>
@@ -9860,7 +9860,7 @@
               </a:solidFill>
               <a:effectLst/>
               <a:uFillTx/>
-              <a:latin typeface="Arial"/>
+              <a:latin typeface="+mn-lt"/>
             </a:endParaRPr>
           </a:p>
         </p:txBody>
@@ -9911,8 +9911,8 @@
                 </a:solidFill>
                 <a:effectLst/>
                 <a:uFillTx/>
-                <a:latin typeface="Manrope Medium"/>
-                <a:ea typeface="Roboto Light"/>
+                <a:latin typeface="+mn-lt"/>
+                <a:ea typeface="Manrope"/>
               </a:rPr>
               <a:t>Модули</a:t>
             </a:r>
@@ -9922,7 +9922,7 @@
               </a:solidFill>
               <a:effectLst/>
               <a:uFillTx/>
-              <a:latin typeface="Arial"/>
+              <a:latin typeface="+mn-lt"/>
             </a:endParaRPr>
           </a:p>
         </p:txBody>
@@ -9978,7 +9978,7 @@
                 </a:solidFill>
                 <a:effectLst/>
                 <a:uFillTx/>
-                <a:latin typeface="Manrope Medium"/>
+                <a:latin typeface="+mn-lt"/>
               </a:rPr>
               <a:t>Экономия времени и ФОТ проектного отдела — без перехода на 3D и полного переобучения штата</a:t>
             </a:r>
@@ -9988,7 +9988,7 @@
               </a:solidFill>
               <a:effectLst/>
               <a:uFillTx/>
-              <a:latin typeface="Arial"/>
+              <a:latin typeface="+mn-lt"/>
             </a:endParaRPr>
           </a:p>
         </p:txBody>
@@ -10029,13 +10029,13 @@
               </a:lnSpc>
             </a:pPr>
             <a:r>
-              <a:rPr lang="ru-RU" sz="4400" b="0" u="none" strike="noStrike">
+              <a:rPr lang="ru-RU" sz="4400" b="1" u="none" strike="noStrike">
                 <a:solidFill>
                   <a:schemeClr val="dk1"/>
                 </a:solidFill>
                 <a:effectLst/>
                 <a:uFillTx/>
-                <a:latin typeface="VK Sans Display DemiBold"/>
+                <a:latin typeface="+mj-lt"/>
               </a:rPr>
               <a:t>Окупаемость модулей nanoCAD</a:t>
             </a:r>
@@ -10045,7 +10045,7 @@
               </a:solidFill>
               <a:effectLst/>
               <a:uFillTx/>
-              <a:latin typeface="Arial"/>
+              <a:latin typeface="+mn-lt"/>
             </a:endParaRPr>
           </a:p>
         </p:txBody>
@@ -10112,7 +10112,7 @@
                 </a:solidFill>
                 <a:effectLst/>
                 <a:uFillTx/>
-                <a:latin typeface="Manrope Medium"/>
+                <a:latin typeface="+mn-lt"/>
               </a:rPr>
               <a:t>ФИО спикера</a:t>
             </a:r>
@@ -10122,7 +10122,7 @@
               </a:solidFill>
               <a:effectLst/>
               <a:uFillTx/>
-              <a:latin typeface="Arial"/>
+              <a:latin typeface="+mn-lt"/>
             </a:endParaRPr>
           </a:p>
           <a:p>
@@ -10155,7 +10155,7 @@
                 </a:solidFill>
                 <a:effectLst/>
                 <a:uFillTx/>
-                <a:latin typeface="Manrope Medium"/>
+                <a:latin typeface="+mn-lt"/>
               </a:rPr>
               <a:t>должность спикера</a:t>
             </a:r>
@@ -10165,7 +10165,7 @@
               </a:solidFill>
               <a:effectLst/>
               <a:uFillTx/>
-              <a:latin typeface="Arial"/>
+              <a:latin typeface="+mn-lt"/>
             </a:endParaRPr>
           </a:p>
         </p:txBody>
@@ -10293,7 +10293,7 @@
                 </a:solidFill>
                 <a:effectLst/>
                 <a:uFillTx/>
-                <a:latin typeface="Manrope Medium"/>
+                <a:latin typeface="+mn-lt"/>
               </a:rPr>
               <a:t>8 (800) 302-53-50</a:t>
             </a:r>
@@ -10303,7 +10303,7 @@
               </a:solidFill>
               <a:effectLst/>
               <a:uFillTx/>
-              <a:latin typeface="Arial"/>
+              <a:latin typeface="+mn-lt"/>
             </a:endParaRPr>
           </a:p>
           <a:p>
@@ -10325,7 +10325,7 @@
                 </a:solidFill>
                 <a:effectLst/>
                 <a:uFillTx/>
-                <a:latin typeface="Manrope Medium"/>
+                <a:latin typeface="+mn-lt"/>
               </a:rPr>
               <a:t>sales@normasoft.com</a:t>
             </a:r>
@@ -10335,7 +10335,7 @@
               </a:solidFill>
               <a:effectLst/>
               <a:uFillTx/>
-              <a:latin typeface="Arial"/>
+              <a:latin typeface="+mn-lt"/>
             </a:endParaRPr>
           </a:p>
           <a:p>
@@ -10357,7 +10357,7 @@
                 </a:solidFill>
                 <a:effectLst/>
                 <a:uFillTx/>
-                <a:latin typeface="Manrope Medium"/>
+                <a:latin typeface="+mn-lt"/>
               </a:rPr>
               <a:t>normasoft.com</a:t>
             </a:r>
@@ -10367,7 +10367,7 @@
               </a:solidFill>
               <a:effectLst/>
               <a:uFillTx/>
-              <a:latin typeface="Arial"/>
+              <a:latin typeface="+mn-lt"/>
             </a:endParaRPr>
           </a:p>
         </p:txBody>
@@ -10488,7 +10488,7 @@
               </a:solidFill>
               <a:effectLst/>
               <a:uFillTx/>
-              <a:latin typeface="Aptos"/>
+              <a:latin typeface="+mn-lt"/>
             </a:endParaRPr>
           </a:p>
         </p:txBody>
@@ -10556,13 +10556,13 @@
               </a:lnSpc>
             </a:pPr>
             <a:r>
-              <a:rPr lang="ru-RU" sz="2400" b="0" u="none" strike="noStrike">
+              <a:rPr lang="ru-RU" sz="2400" b="1" u="none" strike="noStrike">
                 <a:solidFill>
                   <a:schemeClr val="dk1"/>
                 </a:solidFill>
                 <a:effectLst/>
                 <a:uFillTx/>
-                <a:latin typeface="VK Sans Display DemiBold"/>
+                <a:latin typeface="+mj-lt"/>
               </a:rPr>
               <a:t>СКС и ОПС: окупаемость nanoCAD ОПС и СКС</a:t>
             </a:r>
@@ -10572,7 +10572,7 @@
               </a:solidFill>
               <a:effectLst/>
               <a:uFillTx/>
-              <a:latin typeface="Arial"/>
+              <a:latin typeface="+mn-lt"/>
             </a:endParaRPr>
           </a:p>
         </p:txBody>
@@ -10989,7 +10989,7 @@
               </a:solidFill>
               <a:effectLst/>
               <a:uFillTx/>
-              <a:latin typeface="Aptos"/>
+              <a:latin typeface="+mn-lt"/>
             </a:endParaRPr>
           </a:p>
         </p:txBody>
@@ -11022,11 +11022,11 @@
               </a:spcAft>
             </a:pPr>
             <a:r>
-              <a:rPr sz="1500" b="0">
+              <a:rPr sz="1500" b="1">
                 <a:solidFill>
                   <a:srgbClr val="1A1A1A"/>
                 </a:solidFill>
-                <a:latin typeface="VK Sans Display DemiBold"/>
+                <a:latin typeface="+mj-lt"/>
               </a:rPr>
               <a:t>Что автоматизируется</a:t>
             </a:r>
@@ -11062,7 +11062,7 @@
               <a:buClr>
                 <a:srgbClr val="0386FC"/>
               </a:buClr>
-              <a:buFont typeface="Manrope Medium"/>
+              <a:buFont typeface="+mn-lt"/>
               <a:buChar char="→"/>
             </a:pPr>
             <a:r>
@@ -11070,7 +11070,7 @@
                 <a:solidFill>
                   <a:srgbClr val="1A1A1A"/>
                 </a:solidFill>
-                <a:latin typeface="Manrope Medium"/>
+                <a:latin typeface="+mn-lt"/>
               </a:rPr>
               <a:t>Расстановка оборудования и трассировка кабелей</a:t>
             </a:r>
@@ -11083,7 +11083,7 @@
               <a:buClr>
                 <a:srgbClr val="0386FC"/>
               </a:buClr>
-              <a:buFont typeface="Manrope Medium"/>
+              <a:buFont typeface="+mn-lt"/>
               <a:buChar char="→"/>
             </a:pPr>
             <a:r>
@@ -11091,7 +11091,7 @@
                 <a:solidFill>
                   <a:srgbClr val="1A1A1A"/>
                 </a:solidFill>
-                <a:latin typeface="Manrope Medium"/>
+                <a:latin typeface="+mn-lt"/>
               </a:rPr>
               <a:t>Расчёты: АКБ, падение напряжения, заполнение лотков, оповещение</a:t>
             </a:r>
@@ -11104,7 +11104,7 @@
               <a:buClr>
                 <a:srgbClr val="0386FC"/>
               </a:buClr>
-              <a:buFont typeface="Manrope Medium"/>
+              <a:buFont typeface="+mn-lt"/>
               <a:buChar char="→"/>
             </a:pPr>
             <a:r>
@@ -11112,7 +11112,7 @@
                 <a:solidFill>
                   <a:srgbClr val="1A1A1A"/>
                 </a:solidFill>
-                <a:latin typeface="Manrope Medium"/>
+                <a:latin typeface="+mn-lt"/>
               </a:rPr>
               <a:t>Кабельные журналы и спецификации — автоматически</a:t>
             </a:r>
@@ -11125,7 +11125,7 @@
               <a:buClr>
                 <a:srgbClr val="0386FC"/>
               </a:buClr>
-              <a:buFont typeface="Manrope Medium"/>
+              <a:buFont typeface="+mn-lt"/>
               <a:buChar char="→"/>
             </a:pPr>
             <a:r>
@@ -11133,7 +11133,7 @@
                 <a:solidFill>
                   <a:srgbClr val="1A1A1A"/>
                 </a:solidFill>
-                <a:latin typeface="Manrope Medium"/>
+                <a:latin typeface="+mn-lt"/>
               </a:rPr>
               <a:t>Структурные схемы и планы по ГОСТ</a:t>
             </a:r>
@@ -11210,11 +11210,11 @@
               </a:spcAft>
             </a:pPr>
             <a:r>
-              <a:rPr sz="1400" b="0">
+              <a:rPr sz="1400" b="1">
                 <a:solidFill>
                   <a:srgbClr val="1A1A1A"/>
                 </a:solidFill>
-                <a:latin typeface="VK Sans Display DemiBold"/>
+                <a:latin typeface="+mj-lt"/>
               </a:rPr>
               <a:t>Детский сад на 200 мест</a:t>
             </a:r>
@@ -11253,7 +11253,7 @@
                 <a:solidFill>
                   <a:srgbClr val="6B7280"/>
                 </a:solidFill>
-                <a:latin typeface="Manrope Medium"/>
+                <a:latin typeface="+mn-lt"/>
               </a:rPr>
               <a:t>Трудозатраты по разделу, ч</a:t>
             </a:r>
@@ -11288,29 +11288,29 @@
               </a:spcAft>
             </a:pPr>
             <a:r>
-              <a:rPr sz="1800" b="0">
+              <a:rPr sz="1800" b="1">
                 <a:solidFill>
                   <a:srgbClr val="6B7280"/>
                 </a:solidFill>
-                <a:latin typeface="VK Sans Display DemiBold"/>
+                <a:latin typeface="+mj-lt"/>
               </a:rPr>
               <a:t>344</a:t>
             </a:r>
             <a:r>
-              <a:rPr sz="1800" b="0">
+              <a:rPr sz="1800" b="1">
                 <a:solidFill>
                   <a:srgbClr val="6B7280"/>
                 </a:solidFill>
-                <a:latin typeface="VK Sans Display DemiBold"/>
+                <a:latin typeface="+mj-lt"/>
               </a:rPr>
               <a:t>  →  </a:t>
             </a:r>
             <a:r>
-              <a:rPr sz="1800" b="0">
+              <a:rPr sz="1800" b="1">
                 <a:solidFill>
                   <a:srgbClr val="0386FC"/>
                 </a:solidFill>
-                <a:latin typeface="VK Sans Display DemiBold"/>
+                <a:latin typeface="+mj-lt"/>
               </a:rPr>
               <a:t>272 ч</a:t>
             </a:r>
@@ -11349,7 +11349,7 @@
                 <a:solidFill>
                   <a:srgbClr val="1A1A1A"/>
                 </a:solidFill>
-                <a:latin typeface="Manrope Medium"/>
+                <a:latin typeface="+mn-lt"/>
               </a:rPr>
               <a:t>Экономия ФОТ в год</a:t>
             </a:r>
@@ -11388,7 +11388,7 @@
                 <a:solidFill>
                   <a:srgbClr val="1A1A1A"/>
                 </a:solidFill>
-                <a:latin typeface="Manrope Medium"/>
+                <a:latin typeface="+mn-lt"/>
               </a:rPr>
               <a:t>843 100 ₽</a:t>
             </a:r>
@@ -11427,7 +11427,7 @@
                 <a:solidFill>
                   <a:srgbClr val="1A1A1A"/>
                 </a:solidFill>
-                <a:latin typeface="Manrope Medium"/>
+                <a:latin typeface="+mn-lt"/>
               </a:rPr>
               <a:t>Экономия на правках</a:t>
             </a:r>
@@ -11466,7 +11466,7 @@
                 <a:solidFill>
                   <a:srgbClr val="1A1A1A"/>
                 </a:solidFill>
-                <a:latin typeface="Manrope Medium"/>
+                <a:latin typeface="+mn-lt"/>
               </a:rPr>
               <a:t>280 100 ₽</a:t>
             </a:r>
@@ -11505,7 +11505,7 @@
                 <a:solidFill>
                   <a:srgbClr val="1A1A1A"/>
                 </a:solidFill>
-                <a:latin typeface="Manrope Medium"/>
+                <a:latin typeface="+mn-lt"/>
               </a:rPr>
               <a:t>Затраты на внедрение</a:t>
             </a:r>
@@ -11544,7 +11544,7 @@
                 <a:solidFill>
                   <a:srgbClr val="1A1A1A"/>
                 </a:solidFill>
-                <a:latin typeface="Manrope Medium"/>
+                <a:latin typeface="+mn-lt"/>
               </a:rPr>
               <a:t>184 600 ₽</a:t>
             </a:r>
@@ -11625,7 +11625,7 @@
                 <a:solidFill>
                   <a:srgbClr val="6B7280"/>
                 </a:solidFill>
-                <a:latin typeface="Manrope Medium"/>
+                <a:latin typeface="+mn-lt"/>
               </a:rPr>
               <a:t>ROI за год</a:t>
             </a:r>
@@ -11660,11 +11660,11 @@
               </a:spcAft>
             </a:pPr>
             <a:r>
-              <a:rPr sz="2800" b="0">
+              <a:rPr sz="2800" b="1">
                 <a:solidFill>
                   <a:srgbClr val="0386FC"/>
                 </a:solidFill>
-                <a:latin typeface="VK Sans Display DemiBold"/>
+                <a:latin typeface="+mj-lt"/>
               </a:rPr>
               <a:t>508%</a:t>
             </a:r>
@@ -11703,7 +11703,7 @@
                 <a:solidFill>
                   <a:srgbClr val="6B7280"/>
                 </a:solidFill>
-                <a:latin typeface="Manrope Medium"/>
+                <a:latin typeface="+mn-lt"/>
               </a:rPr>
               <a:t>Эффект за год</a:t>
             </a:r>
@@ -11738,11 +11738,11 @@
               </a:spcAft>
             </a:pPr>
             <a:r>
-              <a:rPr sz="1400" b="0">
+              <a:rPr sz="1400" b="1">
                 <a:solidFill>
                   <a:srgbClr val="1A1A1A"/>
                 </a:solidFill>
-                <a:latin typeface="VK Sans Display DemiBold"/>
+                <a:latin typeface="+mj-lt"/>
               </a:rPr>
               <a:t>938 600 ₽</a:t>
             </a:r>
@@ -11781,7 +11781,7 @@
                 <a:solidFill>
                   <a:srgbClr val="6B7280"/>
                 </a:solidFill>
-                <a:latin typeface="Manrope Medium"/>
+                <a:latin typeface="+mn-lt"/>
               </a:rPr>
               <a:t>10 проектов в год, ставка 1 171 ₽/ч</a:t>
             </a:r>
@@ -11858,11 +11858,11 @@
               </a:spcAft>
             </a:pPr>
             <a:r>
-              <a:rPr sz="1400" b="0">
+              <a:rPr sz="1400" b="1">
                 <a:solidFill>
                   <a:srgbClr val="1A1A1A"/>
                 </a:solidFill>
-                <a:latin typeface="VK Sans Display DemiBold"/>
+                <a:latin typeface="+mj-lt"/>
               </a:rPr>
               <a:t>Котельная 25 Гкал/ч</a:t>
             </a:r>
@@ -11901,7 +11901,7 @@
                 <a:solidFill>
                   <a:srgbClr val="6B7280"/>
                 </a:solidFill>
-                <a:latin typeface="Manrope Medium"/>
+                <a:latin typeface="+mn-lt"/>
               </a:rPr>
               <a:t>Трудозатраты по разделу, ч</a:t>
             </a:r>
@@ -11936,29 +11936,29 @@
               </a:spcAft>
             </a:pPr>
             <a:r>
-              <a:rPr sz="1800" b="0">
+              <a:rPr sz="1800" b="1">
                 <a:solidFill>
                   <a:srgbClr val="6B7280"/>
                 </a:solidFill>
-                <a:latin typeface="VK Sans Display DemiBold"/>
+                <a:latin typeface="+mj-lt"/>
               </a:rPr>
               <a:t>400</a:t>
             </a:r>
             <a:r>
-              <a:rPr sz="1800" b="0">
+              <a:rPr sz="1800" b="1">
                 <a:solidFill>
                   <a:srgbClr val="6B7280"/>
                 </a:solidFill>
-                <a:latin typeface="VK Sans Display DemiBold"/>
+                <a:latin typeface="+mj-lt"/>
               </a:rPr>
               <a:t>  →  </a:t>
             </a:r>
             <a:r>
-              <a:rPr sz="1800" b="0">
+              <a:rPr sz="1800" b="1">
                 <a:solidFill>
                   <a:srgbClr val="0386FC"/>
                 </a:solidFill>
-                <a:latin typeface="VK Sans Display DemiBold"/>
+                <a:latin typeface="+mj-lt"/>
               </a:rPr>
               <a:t>304 ч</a:t>
             </a:r>
@@ -11997,7 +11997,7 @@
                 <a:solidFill>
                   <a:srgbClr val="1A1A1A"/>
                 </a:solidFill>
-                <a:latin typeface="Manrope Medium"/>
+                <a:latin typeface="+mn-lt"/>
               </a:rPr>
               <a:t>Экономия ФОТ в год</a:t>
             </a:r>
@@ -12036,7 +12036,7 @@
                 <a:solidFill>
                   <a:srgbClr val="1A1A1A"/>
                 </a:solidFill>
-                <a:latin typeface="Manrope Medium"/>
+                <a:latin typeface="+mn-lt"/>
               </a:rPr>
               <a:t>1 124 400 ₽</a:t>
             </a:r>
@@ -12075,7 +12075,7 @@
                 <a:solidFill>
                   <a:srgbClr val="1A1A1A"/>
                 </a:solidFill>
-                <a:latin typeface="Manrope Medium"/>
+                <a:latin typeface="+mn-lt"/>
               </a:rPr>
               <a:t>Экономия на правках</a:t>
             </a:r>
@@ -12114,7 +12114,7 @@
                 <a:solidFill>
                   <a:srgbClr val="1A1A1A"/>
                 </a:solidFill>
-                <a:latin typeface="Manrope Medium"/>
+                <a:latin typeface="+mn-lt"/>
               </a:rPr>
               <a:t>281 000 ₽</a:t>
             </a:r>
@@ -12153,7 +12153,7 @@
                 <a:solidFill>
                   <a:srgbClr val="1A1A1A"/>
                 </a:solidFill>
-                <a:latin typeface="Manrope Medium"/>
+                <a:latin typeface="+mn-lt"/>
               </a:rPr>
               <a:t>Затраты на внедрение</a:t>
             </a:r>
@@ -12192,7 +12192,7 @@
                 <a:solidFill>
                   <a:srgbClr val="1A1A1A"/>
                 </a:solidFill>
-                <a:latin typeface="Manrope Medium"/>
+                <a:latin typeface="+mn-lt"/>
               </a:rPr>
               <a:t>184 600 ₽</a:t>
             </a:r>
@@ -12273,7 +12273,7 @@
                 <a:solidFill>
                   <a:srgbClr val="6B7280"/>
                 </a:solidFill>
-                <a:latin typeface="Manrope Medium"/>
+                <a:latin typeface="+mn-lt"/>
               </a:rPr>
               <a:t>ROI за год</a:t>
             </a:r>
@@ -12308,11 +12308,11 @@
               </a:spcAft>
             </a:pPr>
             <a:r>
-              <a:rPr sz="2800" b="0">
+              <a:rPr sz="2800" b="1">
                 <a:solidFill>
                   <a:srgbClr val="0386FC"/>
                 </a:solidFill>
-                <a:latin typeface="VK Sans Display DemiBold"/>
+                <a:latin typeface="+mj-lt"/>
               </a:rPr>
               <a:t>661%</a:t>
             </a:r>
@@ -12351,7 +12351,7 @@
                 <a:solidFill>
                   <a:srgbClr val="6B7280"/>
                 </a:solidFill>
-                <a:latin typeface="Manrope Medium"/>
+                <a:latin typeface="+mn-lt"/>
               </a:rPr>
               <a:t>Эффект за год</a:t>
             </a:r>
@@ -12386,11 +12386,11 @@
               </a:spcAft>
             </a:pPr>
             <a:r>
-              <a:rPr sz="1400" b="0">
+              <a:rPr sz="1400" b="1">
                 <a:solidFill>
                   <a:srgbClr val="1A1A1A"/>
                 </a:solidFill>
-                <a:latin typeface="VK Sans Display DemiBold"/>
+                <a:latin typeface="+mj-lt"/>
               </a:rPr>
               <a:t>1 220 800 ₽</a:t>
             </a:r>
@@ -12429,7 +12429,7 @@
                 <a:solidFill>
                   <a:srgbClr val="6B7280"/>
                 </a:solidFill>
-                <a:latin typeface="Manrope Medium"/>
+                <a:latin typeface="+mn-lt"/>
               </a:rPr>
               <a:t>10 проектов в год, ставка 1 171 ₽/ч</a:t>
             </a:r>
@@ -12468,7 +12468,7 @@
                 <a:solidFill>
                   <a:srgbClr val="6B7280"/>
                 </a:solidFill>
-                <a:latin typeface="Manrope Medium"/>
+                <a:latin typeface="+mn-lt"/>
               </a:rPr>
               <a:t>nanoCAD ОПС и СКС — по 62 900 ₽ + Платформа nanoCAD — 25 400 ₽; обучение — 2 курса по 16 700 ₽. Окупаемость — 2–3 проекта.</a:t>
             </a:r>
@@ -12521,7 +12521,7 @@
                 <a:solidFill>
                   <a:srgbClr val="FFFFFF"/>
                 </a:solidFill>
-                <a:latin typeface="Roboto Light"/>
+                <a:latin typeface="Manrope"/>
               </a:rPr>
               <a:t>ВЫЗОВЫ</a:t>
             </a:r>
@@ -12574,7 +12574,7 @@
                 <a:solidFill>
                   <a:srgbClr val="FFFFFF"/>
                 </a:solidFill>
-                <a:latin typeface="Roboto Light"/>
+                <a:latin typeface="Manrope"/>
               </a:rPr>
               <a:t>ЭКОНОМИЯ</a:t>
             </a:r>
@@ -12629,7 +12629,7 @@
                 <a:solidFill>
                   <a:srgbClr val="0386FC"/>
                 </a:solidFill>
-                <a:latin typeface="Roboto Light"/>
+                <a:latin typeface="Manrope"/>
               </a:rPr>
               <a:t>ОКУПАЕМОСТЬ</a:t>
             </a:r>
@@ -12682,7 +12682,7 @@
                 <a:solidFill>
                   <a:srgbClr val="FFFFFF"/>
                 </a:solidFill>
-                <a:latin typeface="Roboto Light"/>
+                <a:latin typeface="Manrope"/>
               </a:rPr>
               <a:t>КЕЙСЫ</a:t>
             </a:r>
@@ -12735,7 +12735,7 @@
                 <a:solidFill>
                   <a:srgbClr val="FFFFFF"/>
                 </a:solidFill>
-                <a:latin typeface="Roboto Light"/>
+                <a:latin typeface="Manrope"/>
               </a:rPr>
               <a:t>НОРМАСОФТ</a:t>
             </a:r>
@@ -12788,7 +12788,7 @@
                 <a:solidFill>
                   <a:srgbClr val="FFFFFF"/>
                 </a:solidFill>
-                <a:latin typeface="Roboto Light"/>
+                <a:latin typeface="Manrope"/>
               </a:rPr>
               <a:t>КОНТАКТЫ</a:t>
             </a:r>
@@ -12874,7 +12874,7 @@
               </a:solidFill>
               <a:effectLst/>
               <a:uFillTx/>
-              <a:latin typeface="Aptos"/>
+              <a:latin typeface="+mn-lt"/>
             </a:endParaRPr>
           </a:p>
         </p:txBody>
@@ -12942,13 +12942,13 @@
               </a:lnSpc>
             </a:pPr>
             <a:r>
-              <a:rPr lang="ru-RU" sz="2400" b="0" u="none" strike="noStrike">
+              <a:rPr lang="ru-RU" sz="2400" b="1" u="none" strike="noStrike">
                 <a:solidFill>
                   <a:schemeClr val="dk1"/>
                 </a:solidFill>
                 <a:effectLst/>
                 <a:uFillTx/>
-                <a:latin typeface="VK Sans Display DemiBold"/>
+                <a:latin typeface="+mj-lt"/>
               </a:rPr>
               <a:t>Сводка: эффект за год от одного рабочего места</a:t>
             </a:r>
@@ -12958,7 +12958,7 @@
               </a:solidFill>
               <a:effectLst/>
               <a:uFillTx/>
-              <a:latin typeface="Arial"/>
+              <a:latin typeface="+mn-lt"/>
             </a:endParaRPr>
           </a:p>
         </p:txBody>
@@ -13375,7 +13375,7 @@
               </a:solidFill>
               <a:effectLst/>
               <a:uFillTx/>
-              <a:latin typeface="Aptos"/>
+              <a:latin typeface="+mn-lt"/>
             </a:endParaRPr>
           </a:p>
         </p:txBody>
@@ -13434,7 +13434,7 @@
                           <a:solidFill>
                             <a:srgbClr val="FFFFFF"/>
                           </a:solidFill>
-                          <a:latin typeface="Manrope Medium"/>
+                          <a:latin typeface="+mn-lt"/>
                         </a:rPr>
                         <a:t>Модуль</a:t>
                       </a:r>
@@ -13457,7 +13457,7 @@
                           <a:solidFill>
                             <a:srgbClr val="FFFFFF"/>
                           </a:solidFill>
-                          <a:latin typeface="Manrope Medium"/>
+                          <a:latin typeface="+mn-lt"/>
                         </a:rPr>
                         <a:t>ROI детсад</a:t>
                       </a:r>
@@ -13480,7 +13480,7 @@
                           <a:solidFill>
                             <a:srgbClr val="FFFFFF"/>
                           </a:solidFill>
-                          <a:latin typeface="Manrope Medium"/>
+                          <a:latin typeface="+mn-lt"/>
                         </a:rPr>
                         <a:t>ROI котельная</a:t>
                       </a:r>
@@ -13503,7 +13503,7 @@
                           <a:solidFill>
                             <a:srgbClr val="FFFFFF"/>
                           </a:solidFill>
-                          <a:latin typeface="Manrope Medium"/>
+                          <a:latin typeface="+mn-lt"/>
                         </a:rPr>
                         <a:t>Окупаемость</a:t>
                       </a:r>
@@ -13528,7 +13528,7 @@
                           <a:solidFill>
                             <a:srgbClr val="1A1A1A"/>
                           </a:solidFill>
-                          <a:latin typeface="Manrope Medium"/>
+                          <a:latin typeface="+mn-lt"/>
                         </a:rPr>
                         <a:t>АР и КР</a:t>
                       </a:r>
@@ -13551,7 +13551,7 @@
                           <a:solidFill>
                             <a:srgbClr val="0386FC"/>
                           </a:solidFill>
-                          <a:latin typeface="Manrope Medium"/>
+                          <a:latin typeface="+mn-lt"/>
                         </a:rPr>
                         <a:t>978%</a:t>
                       </a:r>
@@ -13574,7 +13574,7 @@
                           <a:solidFill>
                             <a:srgbClr val="0386FC"/>
                           </a:solidFill>
-                          <a:latin typeface="Manrope Medium"/>
+                          <a:latin typeface="+mn-lt"/>
                         </a:rPr>
                         <a:t>1 353%</a:t>
                       </a:r>
@@ -13597,7 +13597,7 @@
                           <a:solidFill>
                             <a:srgbClr val="1A1A1A"/>
                           </a:solidFill>
-                          <a:latin typeface="Manrope Medium"/>
+                          <a:latin typeface="+mn-lt"/>
                         </a:rPr>
                         <a:t>1–2 проекта</a:t>
                       </a:r>
@@ -13622,7 +13622,7 @@
                           <a:solidFill>
                             <a:srgbClr val="1A1A1A"/>
                           </a:solidFill>
-                          <a:latin typeface="Manrope Medium"/>
+                          <a:latin typeface="+mn-lt"/>
                         </a:rPr>
                         <a:t>Электро</a:t>
                       </a:r>
@@ -13645,7 +13645,7 @@
                           <a:solidFill>
                             <a:srgbClr val="0386FC"/>
                           </a:solidFill>
-                          <a:latin typeface="Manrope Medium"/>
+                          <a:latin typeface="+mn-lt"/>
                         </a:rPr>
                         <a:t>457%</a:t>
                       </a:r>
@@ -13668,7 +13668,7 @@
                           <a:solidFill>
                             <a:srgbClr val="0386FC"/>
                           </a:solidFill>
-                          <a:latin typeface="Manrope Medium"/>
+                          <a:latin typeface="+mn-lt"/>
                         </a:rPr>
                         <a:t>860%</a:t>
                       </a:r>
@@ -13691,7 +13691,7 @@
                           <a:solidFill>
                             <a:srgbClr val="1A1A1A"/>
                           </a:solidFill>
-                          <a:latin typeface="Manrope Medium"/>
+                          <a:latin typeface="+mn-lt"/>
                         </a:rPr>
                         <a:t>2–3 проекта</a:t>
                       </a:r>
@@ -13716,7 +13716,7 @@
                           <a:solidFill>
                             <a:srgbClr val="1A1A1A"/>
                           </a:solidFill>
-                          <a:latin typeface="Manrope Medium"/>
+                          <a:latin typeface="+mn-lt"/>
                         </a:rPr>
                         <a:t>СКС + ОПС</a:t>
                       </a:r>
@@ -13739,7 +13739,7 @@
                           <a:solidFill>
                             <a:srgbClr val="0386FC"/>
                           </a:solidFill>
-                          <a:latin typeface="Manrope Medium"/>
+                          <a:latin typeface="+mn-lt"/>
                         </a:rPr>
                         <a:t>508%</a:t>
                       </a:r>
@@ -13762,7 +13762,7 @@
                           <a:solidFill>
                             <a:srgbClr val="0386FC"/>
                           </a:solidFill>
-                          <a:latin typeface="Manrope Medium"/>
+                          <a:latin typeface="+mn-lt"/>
                         </a:rPr>
                         <a:t>661%</a:t>
                       </a:r>
@@ -13785,7 +13785,7 @@
                           <a:solidFill>
                             <a:srgbClr val="1A1A1A"/>
                           </a:solidFill>
-                          <a:latin typeface="Manrope Medium"/>
+                          <a:latin typeface="+mn-lt"/>
                         </a:rPr>
                         <a:t>2–3 проекта</a:t>
                       </a:r>
@@ -13872,11 +13872,11 @@
               </a:spcAft>
             </a:pPr>
             <a:r>
-              <a:rPr sz="1400" b="0">
+              <a:rPr sz="1400" b="1">
                 <a:solidFill>
                   <a:srgbClr val="1A1A1A"/>
                 </a:solidFill>
-                <a:latin typeface="VK Sans Display DemiBold"/>
+                <a:latin typeface="+mj-lt"/>
               </a:rPr>
               <a:t>Все модули окупаются за 1–3 проекта. </a:t>
             </a:r>
@@ -13892,7 +13892,7 @@
                 <a:solidFill>
                   <a:srgbClr val="1A1A1A"/>
                 </a:solidFill>
-                <a:latin typeface="Manrope Medium"/>
+                <a:latin typeface="+mn-lt"/>
               </a:rPr>
               <a:t>Расчёт — по консервативному сценарию: 20–30% экономии времени по разделу.</a:t>
             </a:r>
@@ -13931,7 +13931,7 @@
                 <a:solidFill>
                   <a:srgbClr val="6B7280"/>
                 </a:solidFill>
-                <a:latin typeface="Manrope Medium"/>
+                <a:latin typeface="+mn-lt"/>
               </a:rPr>
               <a:t>Эффект = экономия ФОТ + экономия на исправлениях − затраты на внедрение; 10 однотипных проектов в год.</a:t>
             </a:r>
@@ -13984,7 +13984,7 @@
                 <a:solidFill>
                   <a:srgbClr val="FFFFFF"/>
                 </a:solidFill>
-                <a:latin typeface="Roboto Light"/>
+                <a:latin typeface="Manrope"/>
               </a:rPr>
               <a:t>ВЫЗОВЫ</a:t>
             </a:r>
@@ -14037,7 +14037,7 @@
                 <a:solidFill>
                   <a:srgbClr val="FFFFFF"/>
                 </a:solidFill>
-                <a:latin typeface="Roboto Light"/>
+                <a:latin typeface="Manrope"/>
               </a:rPr>
               <a:t>ЭКОНОМИЯ</a:t>
             </a:r>
@@ -14092,7 +14092,7 @@
                 <a:solidFill>
                   <a:srgbClr val="0386FC"/>
                 </a:solidFill>
-                <a:latin typeface="Roboto Light"/>
+                <a:latin typeface="Manrope"/>
               </a:rPr>
               <a:t>ОКУПАЕМОСТЬ</a:t>
             </a:r>
@@ -14145,7 +14145,7 @@
                 <a:solidFill>
                   <a:srgbClr val="FFFFFF"/>
                 </a:solidFill>
-                <a:latin typeface="Roboto Light"/>
+                <a:latin typeface="Manrope"/>
               </a:rPr>
               <a:t>КЕЙСЫ</a:t>
             </a:r>
@@ -14198,7 +14198,7 @@
                 <a:solidFill>
                   <a:srgbClr val="FFFFFF"/>
                 </a:solidFill>
-                <a:latin typeface="Roboto Light"/>
+                <a:latin typeface="Manrope"/>
               </a:rPr>
               <a:t>НОРМАСОФТ</a:t>
             </a:r>
@@ -14251,7 +14251,7 @@
                 <a:solidFill>
                   <a:srgbClr val="FFFFFF"/>
                 </a:solidFill>
-                <a:latin typeface="Roboto Light"/>
+                <a:latin typeface="Manrope"/>
               </a:rPr>
               <a:t>КОНТАКТЫ</a:t>
             </a:r>
@@ -14337,7 +14337,7 @@
               </a:solidFill>
               <a:effectLst/>
               <a:uFillTx/>
-              <a:latin typeface="Aptos"/>
+              <a:latin typeface="+mn-lt"/>
             </a:endParaRPr>
           </a:p>
         </p:txBody>
@@ -14405,13 +14405,13 @@
               </a:lnSpc>
             </a:pPr>
             <a:r>
-              <a:rPr lang="ru-RU" sz="2400" b="0" u="none" strike="noStrike">
+              <a:rPr lang="ru-RU" sz="2400" b="1" u="none" strike="noStrike">
                 <a:solidFill>
                   <a:schemeClr val="dk1"/>
                 </a:solidFill>
                 <a:effectLst/>
                 <a:uFillTx/>
-                <a:latin typeface="VK Sans Display DemiBold"/>
+                <a:latin typeface="+mj-lt"/>
               </a:rPr>
               <a:t>Подтверждение кейсами: пользователи nanoCAD</a:t>
             </a:r>
@@ -14421,7 +14421,7 @@
               </a:solidFill>
               <a:effectLst/>
               <a:uFillTx/>
-              <a:latin typeface="Arial"/>
+              <a:latin typeface="+mn-lt"/>
             </a:endParaRPr>
           </a:p>
         </p:txBody>
@@ -14838,7 +14838,7 @@
               </a:solidFill>
               <a:effectLst/>
               <a:uFillTx/>
-              <a:latin typeface="Aptos"/>
+              <a:latin typeface="+mn-lt"/>
             </a:endParaRPr>
           </a:p>
         </p:txBody>
@@ -14913,11 +14913,11 @@
               </a:spcAft>
             </a:pPr>
             <a:r>
-              <a:rPr sz="3200" b="0">
+              <a:rPr sz="3200" b="1">
                 <a:solidFill>
                   <a:srgbClr val="0386FC"/>
                 </a:solidFill>
-                <a:latin typeface="VK Sans Display DemiBold"/>
+                <a:latin typeface="+mj-lt"/>
               </a:rPr>
               <a:t>−83%</a:t>
             </a:r>
@@ -14952,11 +14952,11 @@
               </a:spcAft>
             </a:pPr>
             <a:r>
-              <a:rPr sz="1400" b="0">
+              <a:rPr sz="1400" b="1">
                 <a:solidFill>
                   <a:srgbClr val="1A1A1A"/>
                 </a:solidFill>
-                <a:latin typeface="VK Sans Display DemiBold"/>
+                <a:latin typeface="+mj-lt"/>
               </a:rPr>
               <a:t>«Уфанет», телеком, СКС</a:t>
             </a:r>
@@ -14992,7 +14992,7 @@
               <a:buClr>
                 <a:srgbClr val="0386FC"/>
               </a:buClr>
-              <a:buFont typeface="Manrope Medium"/>
+              <a:buFont typeface="+mn-lt"/>
               <a:buChar char="→"/>
             </a:pPr>
             <a:r>
@@ -15000,7 +15000,7 @@
                 <a:solidFill>
                   <a:srgbClr val="1A1A1A"/>
                 </a:solidFill>
-                <a:latin typeface="Manrope Medium"/>
+                <a:latin typeface="+mn-lt"/>
               </a:rPr>
               <a:t>2D-проект одного объекта: 4 ч → 40 мин (501 объект)</a:t>
             </a:r>
@@ -15013,7 +15013,7 @@
               <a:buClr>
                 <a:srgbClr val="0386FC"/>
               </a:buClr>
-              <a:buFont typeface="Manrope Medium"/>
+              <a:buFont typeface="+mn-lt"/>
               <a:buChar char="→"/>
             </a:pPr>
             <a:r>
@@ -15021,7 +15021,7 @@
                 <a:solidFill>
                   <a:srgbClr val="1A1A1A"/>
                 </a:solidFill>
-                <a:latin typeface="Manrope Medium"/>
+                <a:latin typeface="+mn-lt"/>
               </a:rPr>
               <a:t>−30% срока проектирования за счёт проверки коллизий</a:t>
             </a:r>
@@ -15034,7 +15034,7 @@
               <a:buClr>
                 <a:srgbClr val="0386FC"/>
               </a:buClr>
-              <a:buFont typeface="Manrope Medium"/>
+              <a:buFont typeface="+mn-lt"/>
               <a:buChar char="→"/>
             </a:pPr>
             <a:r>
@@ -15042,7 +15042,7 @@
                 <a:solidFill>
                   <a:srgbClr val="1A1A1A"/>
                 </a:solidFill>
-                <a:latin typeface="Manrope Medium"/>
+                <a:latin typeface="+mn-lt"/>
               </a:rPr>
               <a:t>−70% возвратов рабочей документации</a:t>
             </a:r>
@@ -15055,7 +15055,7 @@
               <a:buClr>
                 <a:srgbClr val="0386FC"/>
               </a:buClr>
-              <a:buFont typeface="Manrope Medium"/>
+              <a:buFont typeface="+mn-lt"/>
               <a:buChar char="→"/>
             </a:pPr>
             <a:r>
@@ -15063,7 +15063,7 @@
                 <a:solidFill>
                   <a:srgbClr val="1A1A1A"/>
                 </a:solidFill>
-                <a:latin typeface="Manrope Medium"/>
+                <a:latin typeface="+mn-lt"/>
               </a:rPr>
               <a:t>&gt; 1,3 млн ₽ экономии материалов на пилоте</a:t>
             </a:r>
@@ -15102,7 +15102,7 @@
                 <a:solidFill>
                   <a:srgbClr val="6B7280"/>
                 </a:solidFill>
-                <a:latin typeface="Manrope Medium"/>
+                <a:latin typeface="+mn-lt"/>
               </a:rPr>
               <a:t>CNews, ComNews, 23.07.2026; CADmaster № 106</a:t>
             </a:r>
@@ -15179,11 +15179,11 @@
               </a:spcAft>
             </a:pPr>
             <a:r>
-              <a:rPr sz="3200" b="0">
+              <a:rPr sz="3200" b="1">
                 <a:solidFill>
                   <a:srgbClr val="0386FC"/>
                 </a:solidFill>
-                <a:latin typeface="VK Sans Display DemiBold"/>
+                <a:latin typeface="+mj-lt"/>
               </a:rPr>
               <a:t>+40%</a:t>
             </a:r>
@@ -15218,11 +15218,11 @@
               </a:spcAft>
             </a:pPr>
             <a:r>
-              <a:rPr sz="1400" b="0">
+              <a:rPr sz="1400" b="1">
                 <a:solidFill>
                   <a:srgbClr val="1A1A1A"/>
                 </a:solidFill>
-                <a:latin typeface="VK Sans Display DemiBold"/>
+                <a:latin typeface="+mj-lt"/>
               </a:rPr>
               <a:t>«АБТ», Санкт-Петербург, Электро</a:t>
             </a:r>
@@ -15258,7 +15258,7 @@
               <a:buClr>
                 <a:srgbClr val="0386FC"/>
               </a:buClr>
-              <a:buFont typeface="Manrope Medium"/>
+              <a:buFont typeface="+mn-lt"/>
               <a:buChar char="→"/>
             </a:pPr>
             <a:r>
@@ -15266,7 +15266,7 @@
                 <a:solidFill>
                   <a:srgbClr val="1A1A1A"/>
                 </a:solidFill>
-                <a:latin typeface="Manrope Medium"/>
+                <a:latin typeface="+mn-lt"/>
               </a:rPr>
               <a:t>Эффективность проектирования выросла на 40%</a:t>
             </a:r>
@@ -15279,7 +15279,7 @@
               <a:buClr>
                 <a:srgbClr val="0386FC"/>
               </a:buClr>
-              <a:buFont typeface="Manrope Medium"/>
+              <a:buFont typeface="+mn-lt"/>
               <a:buChar char="→"/>
             </a:pPr>
             <a:r>
@@ -15287,7 +15287,7 @@
                 <a:solidFill>
                   <a:srgbClr val="1A1A1A"/>
                 </a:solidFill>
-                <a:latin typeface="Manrope Medium"/>
+                <a:latin typeface="+mn-lt"/>
               </a:rPr>
               <a:t>Подбор оборудования и кабелей расчётом по модели сети</a:t>
             </a:r>
@@ -15300,7 +15300,7 @@
               <a:buClr>
                 <a:srgbClr val="0386FC"/>
               </a:buClr>
-              <a:buFont typeface="Manrope Medium"/>
+              <a:buFont typeface="+mn-lt"/>
               <a:buChar char="→"/>
             </a:pPr>
             <a:r>
@@ -15308,7 +15308,7 @@
                 <a:solidFill>
                   <a:srgbClr val="1A1A1A"/>
                 </a:solidFill>
-                <a:latin typeface="Manrope Medium"/>
+                <a:latin typeface="+mn-lt"/>
               </a:rPr>
               <a:t>Автоматическая спецификация</a:t>
             </a:r>
@@ -15321,7 +15321,7 @@
               <a:buClr>
                 <a:srgbClr val="0386FC"/>
               </a:buClr>
-              <a:buFont typeface="Manrope Medium"/>
+              <a:buFont typeface="+mn-lt"/>
               <a:buChar char="→"/>
             </a:pPr>
             <a:r>
@@ -15329,7 +15329,7 @@
                 <a:solidFill>
                   <a:srgbClr val="1A1A1A"/>
                 </a:solidFill>
-                <a:latin typeface="Manrope Medium"/>
+                <a:latin typeface="+mn-lt"/>
               </a:rPr>
               <a:t>Меньше замечаний экспертизы и времени на доработку</a:t>
             </a:r>
@@ -15368,7 +15368,7 @@
                 <a:solidFill>
                   <a:srgbClr val="6B7280"/>
                 </a:solidFill>
-                <a:latin typeface="Manrope Medium"/>
+                <a:latin typeface="+mn-lt"/>
               </a:rPr>
               <a:t>nanocad.ru; «САПР и графика»; CADmaster № 103</a:t>
             </a:r>
@@ -15445,11 +15445,11 @@
               </a:spcAft>
             </a:pPr>
             <a:r>
-              <a:rPr sz="3200" b="0">
+              <a:rPr sz="3200" b="1">
                 <a:solidFill>
                   <a:srgbClr val="0386FC"/>
                 </a:solidFill>
-                <a:latin typeface="VK Sans Display DemiBold"/>
+                <a:latin typeface="+mj-lt"/>
               </a:rPr>
               <a:t>до −30%</a:t>
             </a:r>
@@ -15484,11 +15484,11 @@
               </a:spcAft>
             </a:pPr>
             <a:r>
-              <a:rPr sz="1400" b="0">
+              <a:rPr sz="1400" b="1">
                 <a:solidFill>
                   <a:srgbClr val="1A1A1A"/>
                 </a:solidFill>
-                <a:latin typeface="VK Sans Display DemiBold"/>
+                <a:latin typeface="+mj-lt"/>
               </a:rPr>
               <a:t>Параметрические 2D-элементы, КР</a:t>
             </a:r>
@@ -15524,7 +15524,7 @@
               <a:buClr>
                 <a:srgbClr val="0386FC"/>
               </a:buClr>
-              <a:buFont typeface="Manrope Medium"/>
+              <a:buFont typeface="+mn-lt"/>
               <a:buChar char="→"/>
             </a:pPr>
             <a:r>
@@ -15532,7 +15532,7 @@
                 <a:solidFill>
                   <a:srgbClr val="1A1A1A"/>
                 </a:solidFill>
-                <a:latin typeface="Manrope Medium"/>
+                <a:latin typeface="+mn-lt"/>
               </a:rPr>
               <a:t>Сокращение сроков разработки документации до 30%</a:t>
             </a:r>
@@ -15545,7 +15545,7 @@
               <a:buClr>
                 <a:srgbClr val="0386FC"/>
               </a:buClr>
-              <a:buFont typeface="Manrope Medium"/>
+              <a:buFont typeface="+mn-lt"/>
               <a:buChar char="→"/>
             </a:pPr>
             <a:r>
@@ -15553,7 +15553,7 @@
                 <a:solidFill>
                   <a:srgbClr val="1A1A1A"/>
                 </a:solidFill>
-                <a:latin typeface="Manrope Medium"/>
+                <a:latin typeface="+mn-lt"/>
               </a:rPr>
               <a:t>Библиотека типовых параметрических элементов</a:t>
             </a:r>
@@ -15566,7 +15566,7 @@
               <a:buClr>
                 <a:srgbClr val="0386FC"/>
               </a:buClr>
-              <a:buFont typeface="Manrope Medium"/>
+              <a:buFont typeface="+mn-lt"/>
               <a:buChar char="→"/>
             </a:pPr>
             <a:r>
@@ -15574,7 +15574,7 @@
                 <a:solidFill>
                   <a:srgbClr val="1A1A1A"/>
                 </a:solidFill>
-                <a:latin typeface="Manrope Medium"/>
+                <a:latin typeface="+mn-lt"/>
               </a:rPr>
               <a:t>Настройка под стандарт предприятия</a:t>
             </a:r>
@@ -15587,7 +15587,7 @@
               <a:buClr>
                 <a:srgbClr val="0386FC"/>
               </a:buClr>
-              <a:buFont typeface="Manrope Medium"/>
+              <a:buFont typeface="+mn-lt"/>
               <a:buChar char="→"/>
             </a:pPr>
             <a:r>
@@ -15595,7 +15595,7 @@
                 <a:solidFill>
                   <a:srgbClr val="1A1A1A"/>
                 </a:solidFill>
-                <a:latin typeface="Manrope Medium"/>
+                <a:latin typeface="+mn-lt"/>
               </a:rPr>
               <a:t>Оперативный контроль качества проекта</a:t>
             </a:r>
@@ -15634,7 +15634,7 @@
                 <a:solidFill>
                   <a:srgbClr val="6B7280"/>
                 </a:solidFill>
-                <a:latin typeface="Manrope Medium"/>
+                <a:latin typeface="+mn-lt"/>
               </a:rPr>
               <a:t>Данные вендора, nanoCAD Конструкции PS</a:t>
             </a:r>
@@ -15687,7 +15687,7 @@
                 <a:solidFill>
                   <a:srgbClr val="FFFFFF"/>
                 </a:solidFill>
-                <a:latin typeface="Roboto Light"/>
+                <a:latin typeface="Manrope"/>
               </a:rPr>
               <a:t>ВЫЗОВЫ</a:t>
             </a:r>
@@ -15740,7 +15740,7 @@
                 <a:solidFill>
                   <a:srgbClr val="FFFFFF"/>
                 </a:solidFill>
-                <a:latin typeface="Roboto Light"/>
+                <a:latin typeface="Manrope"/>
               </a:rPr>
               <a:t>ЭКОНОМИЯ</a:t>
             </a:r>
@@ -15793,7 +15793,7 @@
                 <a:solidFill>
                   <a:srgbClr val="FFFFFF"/>
                 </a:solidFill>
-                <a:latin typeface="Roboto Light"/>
+                <a:latin typeface="Manrope"/>
               </a:rPr>
               <a:t>ОКУПАЕМОСТЬ</a:t>
             </a:r>
@@ -15848,7 +15848,7 @@
                 <a:solidFill>
                   <a:srgbClr val="0386FC"/>
                 </a:solidFill>
-                <a:latin typeface="Roboto Light"/>
+                <a:latin typeface="Manrope"/>
               </a:rPr>
               <a:t>КЕЙСЫ</a:t>
             </a:r>
@@ -15901,7 +15901,7 @@
                 <a:solidFill>
                   <a:srgbClr val="FFFFFF"/>
                 </a:solidFill>
-                <a:latin typeface="Roboto Light"/>
+                <a:latin typeface="Manrope"/>
               </a:rPr>
               <a:t>НОРМАСОФТ</a:t>
             </a:r>
@@ -15954,7 +15954,7 @@
                 <a:solidFill>
                   <a:srgbClr val="FFFFFF"/>
                 </a:solidFill>
-                <a:latin typeface="Roboto Light"/>
+                <a:latin typeface="Manrope"/>
               </a:rPr>
               <a:t>КОНТАКТЫ</a:t>
             </a:r>
@@ -16040,7 +16040,7 @@
               </a:solidFill>
               <a:effectLst/>
               <a:uFillTx/>
-              <a:latin typeface="Aptos"/>
+              <a:latin typeface="+mn-lt"/>
             </a:endParaRPr>
           </a:p>
         </p:txBody>
@@ -16108,13 +16108,13 @@
               </a:lnSpc>
             </a:pPr>
             <a:r>
-              <a:rPr lang="ru-RU" sz="2400" b="0" u="none" strike="noStrike">
+              <a:rPr lang="ru-RU" sz="2400" b="1" u="none" strike="noStrike">
                 <a:solidFill>
                   <a:schemeClr val="dk1"/>
                 </a:solidFill>
                 <a:effectLst/>
                 <a:uFillTx/>
-                <a:latin typeface="VK Sans Display DemiBold"/>
+                <a:latin typeface="+mj-lt"/>
               </a:rPr>
               <a:t>Наши расчёты выполнены по консервативному сценарию</a:t>
             </a:r>
@@ -16124,7 +16124,7 @@
               </a:solidFill>
               <a:effectLst/>
               <a:uFillTx/>
-              <a:latin typeface="Arial"/>
+              <a:latin typeface="+mn-lt"/>
             </a:endParaRPr>
           </a:p>
         </p:txBody>
@@ -16541,7 +16541,7 @@
               </a:solidFill>
               <a:effectLst/>
               <a:uFillTx/>
-              <a:latin typeface="Aptos"/>
+              <a:latin typeface="+mn-lt"/>
             </a:endParaRPr>
           </a:p>
         </p:txBody>
@@ -16592,11 +16592,11 @@
               </a:spcAft>
             </a:pPr>
             <a:r>
-              <a:rPr sz="1500" b="0">
+              <a:rPr sz="1500" b="1">
                 <a:solidFill>
                   <a:srgbClr val="0386FC"/>
                 </a:solidFill>
-                <a:latin typeface="VK Sans Display DemiBold"/>
+                <a:latin typeface="+mj-lt"/>
               </a:rPr>
               <a:t>21–30%</a:t>
             </a:r>
@@ -16631,11 +16631,11 @@
               </a:spcAft>
             </a:pPr>
             <a:r>
-              <a:rPr sz="1500" b="0">
+              <a:rPr sz="1500" b="1">
                 <a:solidFill>
                   <a:srgbClr val="0386FC"/>
                 </a:solidFill>
-                <a:latin typeface="VK Sans Display DemiBold"/>
+                <a:latin typeface="+mj-lt"/>
               </a:rPr>
               <a:t>29–42%</a:t>
             </a:r>
@@ -16670,11 +16670,11 @@
               </a:spcAft>
             </a:pPr>
             <a:r>
-              <a:rPr sz="1500" b="0">
+              <a:rPr sz="1500" b="1">
                 <a:solidFill>
                   <a:srgbClr val="0386FC"/>
                 </a:solidFill>
-                <a:latin typeface="VK Sans Display DemiBold"/>
+                <a:latin typeface="+mj-lt"/>
               </a:rPr>
               <a:t>30–83%</a:t>
             </a:r>
@@ -16709,11 +16709,11 @@
               </a:spcAft>
             </a:pPr>
             <a:r>
-              <a:rPr sz="1500" b="0">
+              <a:rPr sz="1500" b="1">
                 <a:solidFill>
                   <a:srgbClr val="0386FC"/>
                 </a:solidFill>
-                <a:latin typeface="VK Sans Display DemiBold"/>
+                <a:latin typeface="+mj-lt"/>
               </a:rPr>
               <a:t>55–95%</a:t>
             </a:r>
@@ -16790,11 +16790,11 @@
               </a:spcAft>
             </a:pPr>
             <a:r>
-              <a:rPr sz="1300" b="0">
+              <a:rPr sz="1300" b="1">
                 <a:solidFill>
                   <a:srgbClr val="1A1A1A"/>
                 </a:solidFill>
-                <a:latin typeface="VK Sans Display DemiBold"/>
+                <a:latin typeface="+mj-lt"/>
               </a:rPr>
               <a:t>Исправления</a:t>
             </a:r>
@@ -16810,7 +16810,7 @@
                 <a:solidFill>
                   <a:srgbClr val="1A1A1A"/>
                 </a:solidFill>
-                <a:latin typeface="Manrope Medium"/>
+                <a:latin typeface="+mn-lt"/>
               </a:rPr>
               <a:t>В расчётах — снижение затрат до 50%.</a:t>
             </a:r>
@@ -16826,7 +16826,7 @@
                 <a:solidFill>
                   <a:srgbClr val="1A1A1A"/>
                 </a:solidFill>
-                <a:latin typeface="Manrope Medium"/>
+                <a:latin typeface="+mn-lt"/>
               </a:rPr>
               <a:t>У «Уфанет» — −70% возвратов документации.</a:t>
             </a:r>
@@ -16903,11 +16903,11 @@
               </a:spcAft>
             </a:pPr>
             <a:r>
-              <a:rPr sz="1400" b="0">
+              <a:rPr sz="1400" b="1">
                 <a:solidFill>
                   <a:srgbClr val="1A1A1A"/>
                 </a:solidFill>
-                <a:latin typeface="VK Sans Display DemiBold"/>
+                <a:latin typeface="+mj-lt"/>
               </a:rPr>
               <a:t>Вывод: </a:t>
             </a:r>
@@ -16916,7 +16916,7 @@
                 <a:solidFill>
                   <a:srgbClr val="1A1A1A"/>
                 </a:solidFill>
-                <a:latin typeface="Manrope Medium"/>
+                <a:latin typeface="+mn-lt"/>
               </a:rPr>
               <a:t>25–30% экономии по разделу — нижняя граница наблюдаемых результатов. Фактический эффект, как правило, выше.</a:t>
             </a:r>
@@ -16969,7 +16969,7 @@
                 <a:solidFill>
                   <a:srgbClr val="FFFFFF"/>
                 </a:solidFill>
-                <a:latin typeface="Roboto Light"/>
+                <a:latin typeface="Manrope"/>
               </a:rPr>
               <a:t>ВЫЗОВЫ</a:t>
             </a:r>
@@ -17022,7 +17022,7 @@
                 <a:solidFill>
                   <a:srgbClr val="FFFFFF"/>
                 </a:solidFill>
-                <a:latin typeface="Roboto Light"/>
+                <a:latin typeface="Manrope"/>
               </a:rPr>
               <a:t>ЭКОНОМИЯ</a:t>
             </a:r>
@@ -17075,7 +17075,7 @@
                 <a:solidFill>
                   <a:srgbClr val="FFFFFF"/>
                 </a:solidFill>
-                <a:latin typeface="Roboto Light"/>
+                <a:latin typeface="Manrope"/>
               </a:rPr>
               <a:t>ОКУПАЕМОСТЬ</a:t>
             </a:r>
@@ -17130,7 +17130,7 @@
                 <a:solidFill>
                   <a:srgbClr val="0386FC"/>
                 </a:solidFill>
-                <a:latin typeface="Roboto Light"/>
+                <a:latin typeface="Manrope"/>
               </a:rPr>
               <a:t>КЕЙСЫ</a:t>
             </a:r>
@@ -17183,7 +17183,7 @@
                 <a:solidFill>
                   <a:srgbClr val="FFFFFF"/>
                 </a:solidFill>
-                <a:latin typeface="Roboto Light"/>
+                <a:latin typeface="Manrope"/>
               </a:rPr>
               <a:t>НОРМАСОФТ</a:t>
             </a:r>
@@ -17236,7 +17236,7 @@
                 <a:solidFill>
                   <a:srgbClr val="FFFFFF"/>
                 </a:solidFill>
-                <a:latin typeface="Roboto Light"/>
+                <a:latin typeface="Manrope"/>
               </a:rPr>
               <a:t>КОНТАКТЫ</a:t>
             </a:r>
@@ -17322,7 +17322,7 @@
               </a:solidFill>
               <a:effectLst/>
               <a:uFillTx/>
-              <a:latin typeface="Aptos"/>
+              <a:latin typeface="+mn-lt"/>
             </a:endParaRPr>
           </a:p>
         </p:txBody>
@@ -17390,13 +17390,13 @@
               </a:lnSpc>
             </a:pPr>
             <a:r>
-              <a:rPr lang="ru-RU" sz="2400" b="0" u="none" strike="noStrike">
+              <a:rPr lang="ru-RU" sz="2400" b="1" u="none" strike="noStrike">
                 <a:solidFill>
                   <a:schemeClr val="dk1"/>
                 </a:solidFill>
                 <a:effectLst/>
                 <a:uFillTx/>
-                <a:latin typeface="VK Sans Display DemiBold"/>
+                <a:latin typeface="+mj-lt"/>
               </a:rPr>
               <a:t>Собственные разработки и сопровождение внедрения</a:t>
             </a:r>
@@ -17406,7 +17406,7 @@
               </a:solidFill>
               <a:effectLst/>
               <a:uFillTx/>
-              <a:latin typeface="Arial"/>
+              <a:latin typeface="+mn-lt"/>
             </a:endParaRPr>
           </a:p>
         </p:txBody>
@@ -17823,7 +17823,7 @@
               </a:solidFill>
               <a:effectLst/>
               <a:uFillTx/>
-              <a:latin typeface="Aptos"/>
+              <a:latin typeface="+mn-lt"/>
             </a:endParaRPr>
           </a:p>
         </p:txBody>
@@ -17912,11 +17912,11 @@
           <a:p>
             <a:pPr algn="ctr"/>
             <a:r>
-              <a:rPr sz="1600" b="0">
+              <a:rPr sz="1600" b="1">
                 <a:solidFill>
                   <a:srgbClr val="FFFFFF"/>
                 </a:solidFill>
-                <a:latin typeface="VK Sans Display DemiBold"/>
+                <a:latin typeface="+mj-lt"/>
               </a:rPr>
               <a:t>01</a:t>
             </a:r>
@@ -17951,11 +17951,11 @@
               </a:spcAft>
             </a:pPr>
             <a:r>
-              <a:rPr sz="1500" b="0">
+              <a:rPr sz="1500" b="1">
                 <a:solidFill>
                   <a:srgbClr val="1A1A1A"/>
                 </a:solidFill>
-                <a:latin typeface="VK Sans Display DemiBold"/>
+                <a:latin typeface="+mj-lt"/>
               </a:rPr>
               <a:t>Аудит</a:t>
             </a:r>
@@ -17994,7 +17994,7 @@
                 <a:solidFill>
                   <a:srgbClr val="1A1A1A"/>
                 </a:solidFill>
-                <a:latin typeface="Manrope Medium"/>
+                <a:latin typeface="+mn-lt"/>
               </a:rPr>
               <a:t>Разбираем процессы отдела и выбираем разделы с наибольшим эффектом</a:t>
             </a:r>
@@ -18033,7 +18033,7 @@
                 <a:solidFill>
                   <a:srgbClr val="0386FC"/>
                 </a:solidFill>
-                <a:latin typeface="Manrope Medium"/>
+                <a:latin typeface="+mn-lt"/>
               </a:rPr>
               <a:t>→</a:t>
             </a:r>
@@ -18124,11 +18124,11 @@
           <a:p>
             <a:pPr algn="ctr"/>
             <a:r>
-              <a:rPr sz="1600" b="0">
+              <a:rPr sz="1600" b="1">
                 <a:solidFill>
                   <a:srgbClr val="FFFFFF"/>
                 </a:solidFill>
-                <a:latin typeface="VK Sans Display DemiBold"/>
+                <a:latin typeface="+mj-lt"/>
               </a:rPr>
               <a:t>02</a:t>
             </a:r>
@@ -18163,11 +18163,11 @@
               </a:spcAft>
             </a:pPr>
             <a:r>
-              <a:rPr sz="1500" b="0">
+              <a:rPr sz="1500" b="1">
                 <a:solidFill>
                   <a:srgbClr val="1A1A1A"/>
                 </a:solidFill>
-                <a:latin typeface="VK Sans Display DemiBold"/>
+                <a:latin typeface="+mj-lt"/>
               </a:rPr>
               <a:t>Пилот</a:t>
             </a:r>
@@ -18206,7 +18206,7 @@
                 <a:solidFill>
                   <a:srgbClr val="1A1A1A"/>
                 </a:solidFill>
-                <a:latin typeface="Manrope Medium"/>
+                <a:latin typeface="+mn-lt"/>
               </a:rPr>
               <a:t>Запуск модуля на реальном проекте заказчика, замер экономии</a:t>
             </a:r>
@@ -18245,7 +18245,7 @@
                 <a:solidFill>
                   <a:srgbClr val="0386FC"/>
                 </a:solidFill>
-                <a:latin typeface="Manrope Medium"/>
+                <a:latin typeface="+mn-lt"/>
               </a:rPr>
               <a:t>→</a:t>
             </a:r>
@@ -18336,11 +18336,11 @@
           <a:p>
             <a:pPr algn="ctr"/>
             <a:r>
-              <a:rPr sz="1600" b="0">
+              <a:rPr sz="1600" b="1">
                 <a:solidFill>
                   <a:srgbClr val="FFFFFF"/>
                 </a:solidFill>
-                <a:latin typeface="VK Sans Display DemiBold"/>
+                <a:latin typeface="+mj-lt"/>
               </a:rPr>
               <a:t>03</a:t>
             </a:r>
@@ -18375,11 +18375,11 @@
               </a:spcAft>
             </a:pPr>
             <a:r>
-              <a:rPr sz="1500" b="0">
+              <a:rPr sz="1500" b="1">
                 <a:solidFill>
                   <a:srgbClr val="1A1A1A"/>
                 </a:solidFill>
-                <a:latin typeface="VK Sans Display DemiBold"/>
+                <a:latin typeface="+mj-lt"/>
               </a:rPr>
               <a:t>Обучение</a:t>
             </a:r>
@@ -18418,7 +18418,7 @@
                 <a:solidFill>
                   <a:srgbClr val="1A1A1A"/>
                 </a:solidFill>
-                <a:latin typeface="Manrope Medium"/>
+                <a:latin typeface="+mn-lt"/>
               </a:rPr>
               <a:t>Короткие курсы по модулю в УЦ Нормасофт — очно, онлайн или у вас</a:t>
             </a:r>
@@ -18457,7 +18457,7 @@
                 <a:solidFill>
                   <a:srgbClr val="0386FC"/>
                 </a:solidFill>
-                <a:latin typeface="Manrope Medium"/>
+                <a:latin typeface="+mn-lt"/>
               </a:rPr>
               <a:t>→</a:t>
             </a:r>
@@ -18548,11 +18548,11 @@
           <a:p>
             <a:pPr algn="ctr"/>
             <a:r>
-              <a:rPr sz="1600" b="0">
+              <a:rPr sz="1600" b="1">
                 <a:solidFill>
                   <a:srgbClr val="FFFFFF"/>
                 </a:solidFill>
-                <a:latin typeface="VK Sans Display DemiBold"/>
+                <a:latin typeface="+mj-lt"/>
               </a:rPr>
               <a:t>04</a:t>
             </a:r>
@@ -18587,11 +18587,11 @@
               </a:spcAft>
             </a:pPr>
             <a:r>
-              <a:rPr sz="1500" b="0">
+              <a:rPr sz="1500" b="1">
                 <a:solidFill>
                   <a:srgbClr val="1A1A1A"/>
                 </a:solidFill>
-                <a:latin typeface="VK Sans Display DemiBold"/>
+                <a:latin typeface="+mj-lt"/>
               </a:rPr>
               <a:t>Тиражирование</a:t>
             </a:r>
@@ -18630,7 +18630,7 @@
                 <a:solidFill>
                   <a:srgbClr val="1A1A1A"/>
                 </a:solidFill>
-                <a:latin typeface="Manrope Medium"/>
+                <a:latin typeface="+mn-lt"/>
               </a:rPr>
               <a:t>Распространение на отдел, настройка шаблонов, поддержка</a:t>
             </a:r>
@@ -18707,11 +18707,11 @@
               </a:spcAft>
             </a:pPr>
             <a:r>
-              <a:rPr sz="1400" b="0">
+              <a:rPr sz="1400" b="1">
                 <a:solidFill>
                   <a:srgbClr val="0386FC"/>
                 </a:solidFill>
-                <a:latin typeface="VK Sans Display DemiBold"/>
+                <a:latin typeface="+mj-lt"/>
               </a:rPr>
               <a:t>Плагины и утилиты</a:t>
             </a:r>
@@ -18750,7 +18750,7 @@
                 <a:solidFill>
                   <a:srgbClr val="1A1A1A"/>
                 </a:solidFill>
-                <a:latin typeface="Manrope Medium"/>
+                <a:latin typeface="+mn-lt"/>
               </a:rPr>
               <a:t>Типовые и индивидуальные плагины под задачи отдела и стандарты предприятия</a:t>
             </a:r>
@@ -18827,11 +18827,11 @@
               </a:spcAft>
             </a:pPr>
             <a:r>
-              <a:rPr sz="1400" b="0">
+              <a:rPr sz="1400" b="1">
                 <a:solidFill>
                   <a:srgbClr val="0386FC"/>
                 </a:solidFill>
-                <a:latin typeface="VK Sans Display DemiBold"/>
+                <a:latin typeface="+mj-lt"/>
               </a:rPr>
               <a:t>Базы и шаблоны</a:t>
             </a:r>
@@ -18870,7 +18870,7 @@
                 <a:solidFill>
                   <a:srgbClr val="1A1A1A"/>
                 </a:solidFill>
-                <a:latin typeface="Manrope Medium"/>
+                <a:latin typeface="+mn-lt"/>
               </a:rPr>
               <a:t>Наполнение баз оборудования, настройка шаблонов и спецификаций под ГОСТ и СТО</a:t>
             </a:r>
@@ -18947,11 +18947,11 @@
               </a:spcAft>
             </a:pPr>
             <a:r>
-              <a:rPr sz="1400" b="0">
+              <a:rPr sz="1400" b="1">
                 <a:solidFill>
                   <a:srgbClr val="0386FC"/>
                 </a:solidFill>
-                <a:latin typeface="VK Sans Display DemiBold"/>
+                <a:latin typeface="+mj-lt"/>
               </a:rPr>
               <a:t>Развитие</a:t>
             </a:r>
@@ -18990,7 +18990,7 @@
                 <a:solidFill>
                   <a:srgbClr val="1A1A1A"/>
                 </a:solidFill>
-                <a:latin typeface="Manrope Medium"/>
+                <a:latin typeface="+mn-lt"/>
               </a:rPr>
               <a:t>Цифровые двойники производства, BIM VR — следующий шаг, когда он нужен</a:t>
             </a:r>
@@ -19043,7 +19043,7 @@
                 <a:solidFill>
                   <a:srgbClr val="FFFFFF"/>
                 </a:solidFill>
-                <a:latin typeface="Roboto Light"/>
+                <a:latin typeface="Manrope"/>
               </a:rPr>
               <a:t>ВЫЗОВЫ</a:t>
             </a:r>
@@ -19096,7 +19096,7 @@
                 <a:solidFill>
                   <a:srgbClr val="FFFFFF"/>
                 </a:solidFill>
-                <a:latin typeface="Roboto Light"/>
+                <a:latin typeface="Manrope"/>
               </a:rPr>
               <a:t>ЭКОНОМИЯ</a:t>
             </a:r>
@@ -19149,7 +19149,7 @@
                 <a:solidFill>
                   <a:srgbClr val="FFFFFF"/>
                 </a:solidFill>
-                <a:latin typeface="Roboto Light"/>
+                <a:latin typeface="Manrope"/>
               </a:rPr>
               <a:t>ОКУПАЕМОСТЬ</a:t>
             </a:r>
@@ -19202,7 +19202,7 @@
                 <a:solidFill>
                   <a:srgbClr val="FFFFFF"/>
                 </a:solidFill>
-                <a:latin typeface="Roboto Light"/>
+                <a:latin typeface="Manrope"/>
               </a:rPr>
               <a:t>КЕЙСЫ</a:t>
             </a:r>
@@ -19257,7 +19257,7 @@
                 <a:solidFill>
                   <a:srgbClr val="0386FC"/>
                 </a:solidFill>
-                <a:latin typeface="Roboto Light"/>
+                <a:latin typeface="Manrope"/>
               </a:rPr>
               <a:t>НОРМАСОФТ</a:t>
             </a:r>
@@ -19310,7 +19310,7 @@
                 <a:solidFill>
                   <a:srgbClr val="FFFFFF"/>
                 </a:solidFill>
-                <a:latin typeface="Roboto Light"/>
+                <a:latin typeface="Manrope"/>
               </a:rPr>
               <a:t>КОНТАКТЫ</a:t>
             </a:r>
@@ -19396,7 +19396,7 @@
               </a:solidFill>
               <a:effectLst/>
               <a:uFillTx/>
-              <a:latin typeface="Aptos"/>
+              <a:latin typeface="+mn-lt"/>
             </a:endParaRPr>
           </a:p>
         </p:txBody>
@@ -19437,13 +19437,13 @@
               </a:lnSpc>
             </a:pPr>
             <a:r>
-              <a:rPr lang="ru-RU" sz="5100" b="0" u="none" strike="noStrike">
+              <a:rPr lang="ru-RU" sz="5100" b="1" u="none" strike="noStrike">
                 <a:solidFill>
                   <a:schemeClr val="dk1"/>
                 </a:solidFill>
                 <a:effectLst/>
                 <a:uFillTx/>
-                <a:latin typeface="VK Sans Display DemiBold"/>
+                <a:latin typeface="+mj-lt"/>
               </a:rPr>
               <a:t>Спасибо!</a:t>
             </a:r>
@@ -19453,7 +19453,7 @@
               </a:solidFill>
               <a:effectLst/>
               <a:uFillTx/>
-              <a:latin typeface="Arial"/>
+              <a:latin typeface="+mn-lt"/>
             </a:endParaRPr>
           </a:p>
         </p:txBody>
@@ -19500,7 +19500,7 @@
                 </a:solidFill>
                 <a:effectLst/>
                 <a:uFillTx/>
-                <a:latin typeface="Manrope Medium"/>
+                <a:latin typeface="+mn-lt"/>
               </a:rPr>
               <a:t>У вас остались вопросы?</a:t>
             </a:r>
@@ -19510,7 +19510,7 @@
               </a:solidFill>
               <a:effectLst/>
               <a:uFillTx/>
-              <a:latin typeface="Arial"/>
+              <a:latin typeface="+mn-lt"/>
             </a:endParaRPr>
           </a:p>
         </p:txBody>
@@ -19563,7 +19563,7 @@
                 </a:solidFill>
                 <a:effectLst/>
                 <a:uFillTx/>
-                <a:latin typeface="Manrope Medium"/>
+                <a:latin typeface="+mn-lt"/>
               </a:rPr>
               <a:t>8 (800) 302-53-50</a:t>
             </a:r>
@@ -19573,7 +19573,7 @@
               </a:solidFill>
               <a:effectLst/>
               <a:uFillTx/>
-              <a:latin typeface="Arial"/>
+              <a:latin typeface="+mn-lt"/>
             </a:endParaRPr>
           </a:p>
           <a:p>
@@ -19595,7 +19595,7 @@
                 </a:solidFill>
                 <a:effectLst/>
                 <a:uFillTx/>
-                <a:latin typeface="Manrope Medium"/>
+                <a:latin typeface="+mn-lt"/>
               </a:rPr>
               <a:t>sales@normasoft.com</a:t>
             </a:r>
@@ -19605,7 +19605,7 @@
               </a:solidFill>
               <a:effectLst/>
               <a:uFillTx/>
-              <a:latin typeface="Arial"/>
+              <a:latin typeface="+mn-lt"/>
             </a:endParaRPr>
           </a:p>
           <a:p>
@@ -19627,7 +19627,7 @@
                 </a:solidFill>
                 <a:effectLst/>
                 <a:uFillTx/>
-                <a:latin typeface="Manrope Medium"/>
+                <a:latin typeface="+mn-lt"/>
               </a:rPr>
               <a:t>normasoft.com</a:t>
             </a:r>
@@ -19637,7 +19637,7 @@
               </a:solidFill>
               <a:effectLst/>
               <a:uFillTx/>
-              <a:latin typeface="Arial"/>
+              <a:latin typeface="+mn-lt"/>
             </a:endParaRPr>
           </a:p>
         </p:txBody>
@@ -19694,7 +19694,7 @@
               </a:solidFill>
               <a:effectLst/>
               <a:uFillTx/>
-              <a:latin typeface="Arial"/>
+              <a:latin typeface="+mn-lt"/>
             </a:endParaRPr>
           </a:p>
           <a:p>
@@ -19710,7 +19710,7 @@
                 </a:solidFill>
                 <a:effectLst/>
                 <a:uFillTx/>
-                <a:latin typeface="Manrope Medium"/>
+                <a:latin typeface="+mn-lt"/>
               </a:rPr>
               <a:t>руководитель проектов</a:t>
             </a:r>
@@ -19720,7 +19720,7 @@
               </a:solidFill>
               <a:effectLst/>
               <a:uFillTx/>
-              <a:latin typeface="Arial"/>
+              <a:latin typeface="+mn-lt"/>
             </a:endParaRPr>
           </a:p>
         </p:txBody>
@@ -20069,7 +20069,7 @@
               </a:solidFill>
               <a:effectLst/>
               <a:uFillTx/>
-              <a:latin typeface="Aptos"/>
+              <a:latin typeface="+mn-lt"/>
             </a:endParaRPr>
           </a:p>
         </p:txBody>
@@ -20174,7 +20174,7 @@
                 <a:solidFill>
                   <a:srgbClr val="FFFFFF"/>
                 </a:solidFill>
-                <a:latin typeface="Roboto Light"/>
+                <a:latin typeface="Manrope"/>
               </a:rPr>
               <a:t>ВЫЗОВЫ</a:t>
             </a:r>
@@ -20227,7 +20227,7 @@
                 <a:solidFill>
                   <a:srgbClr val="FFFFFF"/>
                 </a:solidFill>
-                <a:latin typeface="Roboto Light"/>
+                <a:latin typeface="Manrope"/>
               </a:rPr>
               <a:t>ЭКОНОМИЯ</a:t>
             </a:r>
@@ -20280,7 +20280,7 @@
                 <a:solidFill>
                   <a:srgbClr val="FFFFFF"/>
                 </a:solidFill>
-                <a:latin typeface="Roboto Light"/>
+                <a:latin typeface="Manrope"/>
               </a:rPr>
               <a:t>ОКУПАЕМОСТЬ</a:t>
             </a:r>
@@ -20333,7 +20333,7 @@
                 <a:solidFill>
                   <a:srgbClr val="FFFFFF"/>
                 </a:solidFill>
-                <a:latin typeface="Roboto Light"/>
+                <a:latin typeface="Manrope"/>
               </a:rPr>
               <a:t>КЕЙСЫ</a:t>
             </a:r>
@@ -20386,7 +20386,7 @@
                 <a:solidFill>
                   <a:srgbClr val="FFFFFF"/>
                 </a:solidFill>
-                <a:latin typeface="Roboto Light"/>
+                <a:latin typeface="Manrope"/>
               </a:rPr>
               <a:t>НОРМАСОФТ</a:t>
             </a:r>
@@ -20441,7 +20441,7 @@
                 <a:solidFill>
                   <a:srgbClr val="0386FC"/>
                 </a:solidFill>
-                <a:latin typeface="Roboto Light"/>
+                <a:latin typeface="Manrope"/>
               </a:rPr>
               <a:t>КОНТАКТЫ</a:t>
             </a:r>
@@ -20527,7 +20527,7 @@
               </a:solidFill>
               <a:effectLst/>
               <a:uFillTx/>
-              <a:latin typeface="Aptos"/>
+              <a:latin typeface="+mn-lt"/>
             </a:endParaRPr>
           </a:p>
         </p:txBody>
@@ -20595,13 +20595,13 @@
               </a:lnSpc>
             </a:pPr>
             <a:r>
-              <a:rPr lang="ru-RU" sz="2400" b="0" u="none" strike="noStrike">
+              <a:rPr lang="ru-RU" sz="2400" b="1" u="none" strike="noStrike">
                 <a:solidFill>
                   <a:schemeClr val="dk1"/>
                 </a:solidFill>
                 <a:effectLst/>
                 <a:uFillTx/>
-                <a:latin typeface="VK Sans Display DemiBold"/>
+                <a:latin typeface="+mj-lt"/>
               </a:rPr>
               <a:t>Тяжёлые времена требуют современных решений</a:t>
             </a:r>
@@ -20611,7 +20611,7 @@
               </a:solidFill>
               <a:effectLst/>
               <a:uFillTx/>
-              <a:latin typeface="Arial"/>
+              <a:latin typeface="+mn-lt"/>
             </a:endParaRPr>
           </a:p>
         </p:txBody>
@@ -21028,7 +21028,7 @@
               </a:solidFill>
               <a:effectLst/>
               <a:uFillTx/>
-              <a:latin typeface="Aptos"/>
+              <a:latin typeface="+mn-lt"/>
             </a:endParaRPr>
           </a:p>
         </p:txBody>
@@ -21079,7 +21079,7 @@
                 <a:solidFill>
                   <a:srgbClr val="FFFFFF"/>
                 </a:solidFill>
-                <a:latin typeface="Manrope Medium"/>
+                <a:latin typeface="+mn-lt"/>
               </a:rPr>
               <a:t>Вызовы</a:t>
             </a:r>
@@ -21114,11 +21114,11 @@
               </a:spcAft>
             </a:pPr>
             <a:r>
-              <a:rPr sz="2600" b="0">
+              <a:rPr sz="2600" b="1">
                 <a:solidFill>
                   <a:srgbClr val="0386FC"/>
                 </a:solidFill>
-                <a:latin typeface="VK Sans Display DemiBold"/>
+                <a:latin typeface="+mj-lt"/>
               </a:rPr>
               <a:t>146 684 ₽</a:t>
             </a:r>
@@ -21157,7 +21157,7 @@
                 <a:solidFill>
                   <a:srgbClr val="1A1A1A"/>
                 </a:solidFill>
-                <a:latin typeface="Manrope Medium"/>
+                <a:latin typeface="+mn-lt"/>
               </a:rPr>
               <a:t>средняя зарплата в проектировании (ОКВЭД 71, ЕМИСС, январь–апрель 2026): час инженера дорожает</a:t>
             </a:r>
@@ -21192,11 +21192,11 @@
               </a:spcAft>
             </a:pPr>
             <a:r>
-              <a:rPr sz="2600" b="0">
+              <a:rPr sz="2600" b="1">
                 <a:solidFill>
                   <a:srgbClr val="0386FC"/>
                 </a:solidFill>
-                <a:latin typeface="VK Sans Display DemiBold"/>
+                <a:latin typeface="+mj-lt"/>
               </a:rPr>
               <a:t>5,5%</a:t>
             </a:r>
@@ -21235,7 +21235,7 @@
                 <a:solidFill>
                   <a:srgbClr val="1A1A1A"/>
                 </a:solidFill>
-                <a:latin typeface="Manrope Medium"/>
+                <a:latin typeface="+mn-lt"/>
               </a:rPr>
               <a:t>доля отрицательных заключений госэкспертизы в 2025 году — +1,8 п.п. к 2024 году</a:t>
             </a:r>
@@ -21270,11 +21270,11 @@
               </a:spcAft>
             </a:pPr>
             <a:r>
-              <a:rPr sz="2600" b="0">
+              <a:rPr sz="2600" b="1">
                 <a:solidFill>
                   <a:srgbClr val="0386FC"/>
                 </a:solidFill>
-                <a:latin typeface="VK Sans Display DemiBold"/>
+                <a:latin typeface="+mj-lt"/>
               </a:rPr>
               <a:t>&gt; 70%</a:t>
             </a:r>
@@ -21313,7 +21313,7 @@
                 <a:solidFill>
                   <a:srgbClr val="1A1A1A"/>
                 </a:solidFill>
-                <a:latin typeface="Manrope Medium"/>
+                <a:latin typeface="+mn-lt"/>
               </a:rPr>
               <a:t>всех переделок в строительстве вызваны ошибками проектирования (Love &amp; Edwards)</a:t>
             </a:r>
@@ -21366,7 +21366,7 @@
                 <a:solidFill>
                   <a:srgbClr val="FFFFFF"/>
                 </a:solidFill>
-                <a:latin typeface="Manrope Medium"/>
+                <a:latin typeface="+mn-lt"/>
               </a:rPr>
               <a:t>Решение</a:t>
             </a:r>
@@ -21443,11 +21443,11 @@
               </a:spcAft>
             </a:pPr>
             <a:r>
-              <a:rPr sz="1700" b="0">
+              <a:rPr sz="1700" b="1">
                 <a:solidFill>
                   <a:srgbClr val="1A1A1A"/>
                 </a:solidFill>
-                <a:latin typeface="VK Sans Display DemiBold"/>
+                <a:latin typeface="+mj-lt"/>
               </a:rPr>
               <a:t>Специализированные модули nanoCAD на привычной 2D-платформе</a:t>
             </a:r>
@@ -21483,7 +21483,7 @@
               <a:buClr>
                 <a:srgbClr val="0386FC"/>
               </a:buClr>
-              <a:buFont typeface="Manrope Medium"/>
+              <a:buFont typeface="+mn-lt"/>
               <a:buChar char="→"/>
             </a:pPr>
             <a:r>
@@ -21491,7 +21491,7 @@
                 <a:solidFill>
                   <a:srgbClr val="1A1A1A"/>
                 </a:solidFill>
-                <a:latin typeface="Manrope Medium"/>
+                <a:latin typeface="+mn-lt"/>
               </a:rPr>
               <a:t>Автоматизация рутины: спецификации, ведомости, кабельные журналы, расчёты</a:t>
             </a:r>
@@ -21504,7 +21504,7 @@
               <a:buClr>
                 <a:srgbClr val="0386FC"/>
               </a:buClr>
-              <a:buFont typeface="Manrope Medium"/>
+              <a:buFont typeface="+mn-lt"/>
               <a:buChar char="→"/>
             </a:pPr>
             <a:r>
@@ -21512,7 +21512,7 @@
                 <a:solidFill>
                   <a:srgbClr val="1A1A1A"/>
                 </a:solidFill>
-                <a:latin typeface="Manrope Medium"/>
+                <a:latin typeface="+mn-lt"/>
               </a:rPr>
               <a:t>Сокращение трудозатрат раздела на 25–30% — консервативная оценка</a:t>
             </a:r>
@@ -21525,7 +21525,7 @@
               <a:buClr>
                 <a:srgbClr val="0386FC"/>
               </a:buClr>
-              <a:buFont typeface="Manrope Medium"/>
+              <a:buFont typeface="+mn-lt"/>
               <a:buChar char="→"/>
             </a:pPr>
             <a:r>
@@ -21533,7 +21533,7 @@
                 <a:solidFill>
                   <a:srgbClr val="1A1A1A"/>
                 </a:solidFill>
-                <a:latin typeface="Manrope Medium"/>
+                <a:latin typeface="+mn-lt"/>
               </a:rPr>
               <a:t>Окупаемость лицензии и обучения — за 1–3 проекта</a:t>
             </a:r>
@@ -21546,7 +21546,7 @@
               <a:buClr>
                 <a:srgbClr val="0386FC"/>
               </a:buClr>
-              <a:buFont typeface="Manrope Medium"/>
+              <a:buFont typeface="+mn-lt"/>
               <a:buChar char="→"/>
             </a:pPr>
             <a:r>
@@ -21554,7 +21554,7 @@
                 <a:solidFill>
                   <a:srgbClr val="1A1A1A"/>
                 </a:solidFill>
-                <a:latin typeface="Manrope Medium"/>
+                <a:latin typeface="+mn-lt"/>
               </a:rPr>
               <a:t>Российское ПО: лицензионная чистота и защита данных</a:t>
             </a:r>
@@ -21593,7 +21593,7 @@
                 <a:solidFill>
                   <a:srgbClr val="6B7280"/>
                 </a:solidFill>
-                <a:latin typeface="Manrope Medium"/>
+                <a:latin typeface="+mn-lt"/>
               </a:rPr>
               <a:t>Источники: ЕМИСС; итоги Главгосэкспертизы за 2025 год; Love P., Edwards D. Calculating total rework costs in Australian construction projects.</a:t>
             </a:r>
@@ -21648,7 +21648,7 @@
                 <a:solidFill>
                   <a:srgbClr val="0386FC"/>
                 </a:solidFill>
-                <a:latin typeface="Roboto Light"/>
+                <a:latin typeface="Manrope"/>
               </a:rPr>
               <a:t>ВЫЗОВЫ</a:t>
             </a:r>
@@ -21701,7 +21701,7 @@
                 <a:solidFill>
                   <a:srgbClr val="FFFFFF"/>
                 </a:solidFill>
-                <a:latin typeface="Roboto Light"/>
+                <a:latin typeface="Manrope"/>
               </a:rPr>
               <a:t>ЭКОНОМИЯ</a:t>
             </a:r>
@@ -21754,7 +21754,7 @@
                 <a:solidFill>
                   <a:srgbClr val="FFFFFF"/>
                 </a:solidFill>
-                <a:latin typeface="Roboto Light"/>
+                <a:latin typeface="Manrope"/>
               </a:rPr>
               <a:t>ОКУПАЕМОСТЬ</a:t>
             </a:r>
@@ -21807,7 +21807,7 @@
                 <a:solidFill>
                   <a:srgbClr val="FFFFFF"/>
                 </a:solidFill>
-                <a:latin typeface="Roboto Light"/>
+                <a:latin typeface="Manrope"/>
               </a:rPr>
               <a:t>КЕЙСЫ</a:t>
             </a:r>
@@ -21860,7 +21860,7 @@
                 <a:solidFill>
                   <a:srgbClr val="FFFFFF"/>
                 </a:solidFill>
-                <a:latin typeface="Roboto Light"/>
+                <a:latin typeface="Manrope"/>
               </a:rPr>
               <a:t>НОРМАСОФТ</a:t>
             </a:r>
@@ -21913,7 +21913,7 @@
                 <a:solidFill>
                   <a:srgbClr val="FFFFFF"/>
                 </a:solidFill>
-                <a:latin typeface="Roboto Light"/>
+                <a:latin typeface="Manrope"/>
               </a:rPr>
               <a:t>КОНТАКТЫ</a:t>
             </a:r>
@@ -21999,7 +21999,7 @@
               </a:solidFill>
               <a:effectLst/>
               <a:uFillTx/>
-              <a:latin typeface="Aptos"/>
+              <a:latin typeface="+mn-lt"/>
             </a:endParaRPr>
           </a:p>
         </p:txBody>
@@ -22067,13 +22067,13 @@
               </a:lnSpc>
             </a:pPr>
             <a:r>
-              <a:rPr lang="ru-RU" sz="2400" b="0" u="none" strike="noStrike">
+              <a:rPr lang="ru-RU" sz="2400" b="1" u="none" strike="noStrike">
                 <a:solidFill>
                   <a:schemeClr val="dk1"/>
                 </a:solidFill>
                 <a:effectLst/>
                 <a:uFillTx/>
-                <a:latin typeface="VK Sans Display DemiBold"/>
+                <a:latin typeface="+mj-lt"/>
               </a:rPr>
               <a:t>Экономия без 3D и полного переобучения штата</a:t>
             </a:r>
@@ -22083,7 +22083,7 @@
               </a:solidFill>
               <a:effectLst/>
               <a:uFillTx/>
-              <a:latin typeface="Arial"/>
+              <a:latin typeface="+mn-lt"/>
             </a:endParaRPr>
           </a:p>
         </p:txBody>
@@ -22500,7 +22500,7 @@
               </a:solidFill>
               <a:effectLst/>
               <a:uFillTx/>
-              <a:latin typeface="Aptos"/>
+              <a:latin typeface="+mn-lt"/>
             </a:endParaRPr>
           </a:p>
         </p:txBody>
@@ -22589,11 +22589,11 @@
           <a:p>
             <a:pPr algn="ctr"/>
             <a:r>
-              <a:rPr sz="1600" b="0">
+              <a:rPr sz="1600" b="1">
                 <a:solidFill>
                   <a:srgbClr val="FFFFFF"/>
                 </a:solidFill>
-                <a:latin typeface="VK Sans Display DemiBold"/>
+                <a:latin typeface="+mj-lt"/>
               </a:rPr>
               <a:t>01</a:t>
             </a:r>
@@ -22628,11 +22628,11 @@
               </a:spcAft>
             </a:pPr>
             <a:r>
-              <a:rPr sz="1600" b="0">
+              <a:rPr sz="1600" b="1">
                 <a:solidFill>
                   <a:srgbClr val="1A1A1A"/>
                 </a:solidFill>
-                <a:latin typeface="VK Sans Display DemiBold"/>
+                <a:latin typeface="+mj-lt"/>
               </a:rPr>
               <a:t>Привычный 2D-процесс</a:t>
             </a:r>
@@ -22671,7 +22671,7 @@
                 <a:solidFill>
                   <a:srgbClr val="1A1A1A"/>
                 </a:solidFill>
-                <a:latin typeface="Manrope Medium"/>
+                <a:latin typeface="+mn-lt"/>
               </a:rPr>
               <a:t>Работа в DWG и в привычной логике чертежа. Не нужно перестраивать процессы отдела и ждать внедрения BIM-стандарта.</a:t>
             </a:r>
@@ -22762,11 +22762,11 @@
           <a:p>
             <a:pPr algn="ctr"/>
             <a:r>
-              <a:rPr sz="1600" b="0">
+              <a:rPr sz="1600" b="1">
                 <a:solidFill>
                   <a:srgbClr val="FFFFFF"/>
                 </a:solidFill>
-                <a:latin typeface="VK Sans Display DemiBold"/>
+                <a:latin typeface="+mj-lt"/>
               </a:rPr>
               <a:t>02</a:t>
             </a:r>
@@ -22801,11 +22801,11 @@
               </a:spcAft>
             </a:pPr>
             <a:r>
-              <a:rPr sz="1600" b="0">
+              <a:rPr sz="1600" b="1">
                 <a:solidFill>
                   <a:srgbClr val="1A1A1A"/>
                 </a:solidFill>
-                <a:latin typeface="VK Sans Display DemiBold"/>
+                <a:latin typeface="+mj-lt"/>
               </a:rPr>
               <a:t>Короткие курсы</a:t>
             </a:r>
@@ -22844,7 +22844,7 @@
                 <a:solidFill>
                   <a:srgbClr val="1A1A1A"/>
                 </a:solidFill>
-                <a:latin typeface="Manrope Medium"/>
+                <a:latin typeface="+mn-lt"/>
               </a:rPr>
               <a:t>Обучение в УЦ Нормасофт: отдельный курс по нужному модулю, без полного переобучения. 15 000–25 100 ₽ на сотрудника.</a:t>
             </a:r>
@@ -22935,11 +22935,11 @@
           <a:p>
             <a:pPr algn="ctr"/>
             <a:r>
-              <a:rPr sz="1600" b="0">
+              <a:rPr sz="1600" b="1">
                 <a:solidFill>
                   <a:srgbClr val="FFFFFF"/>
                 </a:solidFill>
-                <a:latin typeface="VK Sans Display DemiBold"/>
+                <a:latin typeface="+mj-lt"/>
               </a:rPr>
               <a:t>03</a:t>
             </a:r>
@@ -22974,11 +22974,11 @@
               </a:spcAft>
             </a:pPr>
             <a:r>
-              <a:rPr sz="1600" b="0">
+              <a:rPr sz="1600" b="1">
                 <a:solidFill>
                   <a:srgbClr val="1A1A1A"/>
                 </a:solidFill>
-                <a:latin typeface="VK Sans Display DemiBold"/>
+                <a:latin typeface="+mj-lt"/>
               </a:rPr>
               <a:t>Эффект с первого проекта</a:t>
             </a:r>
@@ -23017,7 +23017,7 @@
                 <a:solidFill>
                   <a:srgbClr val="1A1A1A"/>
                 </a:solidFill>
-                <a:latin typeface="Manrope Medium"/>
+                <a:latin typeface="+mn-lt"/>
               </a:rPr>
               <a:t>Спецификации, журналы и расчёты формируются автоматически сразу. Лицензия и обучение окупаются за 1–3 проекта.</a:t>
             </a:r>
@@ -23056,7 +23056,7 @@
                 <a:solidFill>
                   <a:srgbClr val="6B7280"/>
                 </a:solidFill>
-                <a:latin typeface="Manrope Medium"/>
+                <a:latin typeface="+mn-lt"/>
               </a:rPr>
               <a:t>Затраты на внедрение одного рабочего места (лицензия + обучение)</a:t>
             </a:r>
@@ -23133,11 +23133,11 @@
               </a:spcAft>
             </a:pPr>
             <a:r>
-              <a:rPr sz="2000" b="0">
+              <a:rPr sz="2000" b="1">
                 <a:solidFill>
                   <a:srgbClr val="0386FC"/>
                 </a:solidFill>
-                <a:latin typeface="VK Sans Display DemiBold"/>
+                <a:latin typeface="+mj-lt"/>
               </a:rPr>
               <a:t>99 900 ₽</a:t>
             </a:r>
@@ -23176,7 +23176,7 @@
                 <a:solidFill>
                   <a:srgbClr val="1A1A1A"/>
                 </a:solidFill>
-                <a:latin typeface="Manrope Medium"/>
+                <a:latin typeface="+mn-lt"/>
               </a:rPr>
               <a:t>АР и КР (СПДС)</a:t>
             </a:r>
@@ -23253,11 +23253,11 @@
               </a:spcAft>
             </a:pPr>
             <a:r>
-              <a:rPr sz="2000" b="0">
+              <a:rPr sz="2000" b="1">
                 <a:solidFill>
                   <a:srgbClr val="0386FC"/>
                 </a:solidFill>
-                <a:latin typeface="VK Sans Display DemiBold"/>
+                <a:latin typeface="+mj-lt"/>
               </a:rPr>
               <a:t>122 000 ₽</a:t>
             </a:r>
@@ -23296,7 +23296,7 @@
                 <a:solidFill>
                   <a:srgbClr val="1A1A1A"/>
                 </a:solidFill>
-                <a:latin typeface="Manrope Medium"/>
+                <a:latin typeface="+mn-lt"/>
               </a:rPr>
               <a:t>Электро</a:t>
             </a:r>
@@ -23373,11 +23373,11 @@
               </a:spcAft>
             </a:pPr>
             <a:r>
-              <a:rPr sz="2000" b="0">
+              <a:rPr sz="2000" b="1">
                 <a:solidFill>
                   <a:srgbClr val="0386FC"/>
                 </a:solidFill>
-                <a:latin typeface="VK Sans Display DemiBold"/>
+                <a:latin typeface="+mj-lt"/>
               </a:rPr>
               <a:t>184 600 ₽</a:t>
             </a:r>
@@ -23416,7 +23416,7 @@
                 <a:solidFill>
                   <a:srgbClr val="1A1A1A"/>
                 </a:solidFill>
-                <a:latin typeface="Manrope Medium"/>
+                <a:latin typeface="+mn-lt"/>
               </a:rPr>
               <a:t>СКС + ОПС</a:t>
             </a:r>
@@ -23471,7 +23471,7 @@
                 <a:solidFill>
                   <a:srgbClr val="0386FC"/>
                 </a:solidFill>
-                <a:latin typeface="Roboto Light"/>
+                <a:latin typeface="Manrope"/>
               </a:rPr>
               <a:t>ВЫЗОВЫ</a:t>
             </a:r>
@@ -23524,7 +23524,7 @@
                 <a:solidFill>
                   <a:srgbClr val="FFFFFF"/>
                 </a:solidFill>
-                <a:latin typeface="Roboto Light"/>
+                <a:latin typeface="Manrope"/>
               </a:rPr>
               <a:t>ЭКОНОМИЯ</a:t>
             </a:r>
@@ -23577,7 +23577,7 @@
                 <a:solidFill>
                   <a:srgbClr val="FFFFFF"/>
                 </a:solidFill>
-                <a:latin typeface="Roboto Light"/>
+                <a:latin typeface="Manrope"/>
               </a:rPr>
               <a:t>ОКУПАЕМОСТЬ</a:t>
             </a:r>
@@ -23630,7 +23630,7 @@
                 <a:solidFill>
                   <a:srgbClr val="FFFFFF"/>
                 </a:solidFill>
-                <a:latin typeface="Roboto Light"/>
+                <a:latin typeface="Manrope"/>
               </a:rPr>
               <a:t>КЕЙСЫ</a:t>
             </a:r>
@@ -23683,7 +23683,7 @@
                 <a:solidFill>
                   <a:srgbClr val="FFFFFF"/>
                 </a:solidFill>
-                <a:latin typeface="Roboto Light"/>
+                <a:latin typeface="Manrope"/>
               </a:rPr>
               <a:t>НОРМАСОФТ</a:t>
             </a:r>
@@ -23736,7 +23736,7 @@
                 <a:solidFill>
                   <a:srgbClr val="FFFFFF"/>
                 </a:solidFill>
-                <a:latin typeface="Roboto Light"/>
+                <a:latin typeface="Manrope"/>
               </a:rPr>
               <a:t>КОНТАКТЫ</a:t>
             </a:r>
@@ -23822,7 +23822,7 @@
               </a:solidFill>
               <a:effectLst/>
               <a:uFillTx/>
-              <a:latin typeface="Aptos"/>
+              <a:latin typeface="+mn-lt"/>
             </a:endParaRPr>
           </a:p>
         </p:txBody>
@@ -23890,13 +23890,13 @@
               </a:lnSpc>
             </a:pPr>
             <a:r>
-              <a:rPr lang="ru-RU" sz="2400" b="0" u="none" strike="noStrike">
+              <a:rPr lang="ru-RU" sz="2400" b="1" u="none" strike="noStrike">
                 <a:solidFill>
                   <a:schemeClr val="dk1"/>
                 </a:solidFill>
                 <a:effectLst/>
                 <a:uFillTx/>
-                <a:latin typeface="VK Sans Display DemiBold"/>
+                <a:latin typeface="+mj-lt"/>
               </a:rPr>
               <a:t>Где возникает экономия: объект «Детский сад на 200 мест»</a:t>
             </a:r>
@@ -23906,7 +23906,7 @@
               </a:solidFill>
               <a:effectLst/>
               <a:uFillTx/>
-              <a:latin typeface="Arial"/>
+              <a:latin typeface="+mn-lt"/>
             </a:endParaRPr>
           </a:p>
         </p:txBody>
@@ -24323,7 +24323,7 @@
               </a:solidFill>
               <a:effectLst/>
               <a:uFillTx/>
-              <a:latin typeface="Aptos"/>
+              <a:latin typeface="+mn-lt"/>
             </a:endParaRPr>
           </a:p>
         </p:txBody>
@@ -24416,11 +24416,11 @@
               </a:spcAft>
             </a:pPr>
             <a:r>
-              <a:rPr sz="2600" b="0">
+              <a:rPr sz="2600" b="1">
                 <a:solidFill>
                   <a:srgbClr val="1A1A1A"/>
                 </a:solidFill>
-                <a:latin typeface="VK Sans Display DemiBold"/>
+                <a:latin typeface="+mj-lt"/>
               </a:rPr>
               <a:t>9 923,8</a:t>
             </a:r>
@@ -24459,7 +24459,7 @@
                 <a:solidFill>
                   <a:srgbClr val="1A1A1A"/>
                 </a:solidFill>
-                <a:latin typeface="Manrope Medium"/>
+                <a:latin typeface="+mn-lt"/>
               </a:rPr>
               <a:t>тыс. ₽ — базовая цена проектирования без НДС</a:t>
             </a:r>
@@ -24536,11 +24536,11 @@
               </a:spcAft>
             </a:pPr>
             <a:r>
-              <a:rPr sz="2600" b="0">
+              <a:rPr sz="2600" b="1">
                 <a:solidFill>
                   <a:srgbClr val="0386FC"/>
                 </a:solidFill>
-                <a:latin typeface="VK Sans Display DemiBold"/>
+                <a:latin typeface="+mj-lt"/>
               </a:rPr>
               <a:t>2 479,0</a:t>
             </a:r>
@@ -24579,7 +24579,7 @@
                 <a:solidFill>
                   <a:srgbClr val="1A1A1A"/>
                 </a:solidFill>
-                <a:latin typeface="Manrope Medium"/>
+                <a:latin typeface="+mn-lt"/>
               </a:rPr>
               <a:t>тыс. ₽ — общая экономия по проекту</a:t>
             </a:r>
@@ -24656,11 +24656,11 @@
               </a:spcAft>
             </a:pPr>
             <a:r>
-              <a:rPr sz="2600" b="0">
+              <a:rPr sz="2600" b="1">
                 <a:solidFill>
                   <a:srgbClr val="0386FC"/>
                 </a:solidFill>
-                <a:latin typeface="VK Sans Display DemiBold"/>
+                <a:latin typeface="+mj-lt"/>
               </a:rPr>
               <a:t>25%</a:t>
             </a:r>
@@ -24699,7 +24699,7 @@
                 <a:solidFill>
                   <a:srgbClr val="1A1A1A"/>
                 </a:solidFill>
-                <a:latin typeface="Manrope Medium"/>
+                <a:latin typeface="+mn-lt"/>
               </a:rPr>
               <a:t>от стоимости проекта — консервативная оценка</a:t>
             </a:r>
@@ -24738,7 +24738,7 @@
                 <a:solidFill>
                   <a:srgbClr val="6B7280"/>
                 </a:solidFill>
-                <a:latin typeface="Manrope Medium"/>
+                <a:latin typeface="+mn-lt"/>
               </a:rPr>
               <a:t>Разделы СМ, КОН, ООС, ОДИ, ЭЭ, ПЗ, ТБЭ — экономия не учитывается (0%).</a:t>
             </a:r>
@@ -24777,7 +24777,7 @@
                 <a:solidFill>
                   <a:srgbClr val="6B7280"/>
                 </a:solidFill>
-                <a:latin typeface="Manrope Medium"/>
+                <a:latin typeface="+mn-lt"/>
               </a:rPr>
               <a:t>Расчёт по калькулятору стоимости проектных работ: 848/пр, 707/пр, Ипр 1,68 (II кв. 2026). Длина полосы — затраты раздела, синяя часть — экономия.</a:t>
             </a:r>
@@ -24830,7 +24830,7 @@
                 <a:solidFill>
                   <a:srgbClr val="FFFFFF"/>
                 </a:solidFill>
-                <a:latin typeface="Roboto Light"/>
+                <a:latin typeface="Manrope"/>
               </a:rPr>
               <a:t>ВЫЗОВЫ</a:t>
             </a:r>
@@ -24885,7 +24885,7 @@
                 <a:solidFill>
                   <a:srgbClr val="0386FC"/>
                 </a:solidFill>
-                <a:latin typeface="Roboto Light"/>
+                <a:latin typeface="Manrope"/>
               </a:rPr>
               <a:t>ЭКОНОМИЯ</a:t>
             </a:r>
@@ -24938,7 +24938,7 @@
                 <a:solidFill>
                   <a:srgbClr val="FFFFFF"/>
                 </a:solidFill>
-                <a:latin typeface="Roboto Light"/>
+                <a:latin typeface="Manrope"/>
               </a:rPr>
               <a:t>ОКУПАЕМОСТЬ</a:t>
             </a:r>
@@ -24991,7 +24991,7 @@
                 <a:solidFill>
                   <a:srgbClr val="FFFFFF"/>
                 </a:solidFill>
-                <a:latin typeface="Roboto Light"/>
+                <a:latin typeface="Manrope"/>
               </a:rPr>
               <a:t>КЕЙСЫ</a:t>
             </a:r>
@@ -25044,7 +25044,7 @@
                 <a:solidFill>
                   <a:srgbClr val="FFFFFF"/>
                 </a:solidFill>
-                <a:latin typeface="Roboto Light"/>
+                <a:latin typeface="Manrope"/>
               </a:rPr>
               <a:t>НОРМАСОФТ</a:t>
             </a:r>
@@ -25097,7 +25097,7 @@
                 <a:solidFill>
                   <a:srgbClr val="FFFFFF"/>
                 </a:solidFill>
-                <a:latin typeface="Roboto Light"/>
+                <a:latin typeface="Manrope"/>
               </a:rPr>
               <a:t>КОНТАКТЫ</a:t>
             </a:r>
@@ -25183,7 +25183,7 @@
               </a:solidFill>
               <a:effectLst/>
               <a:uFillTx/>
-              <a:latin typeface="Aptos"/>
+              <a:latin typeface="+mn-lt"/>
             </a:endParaRPr>
           </a:p>
         </p:txBody>
@@ -25251,13 +25251,13 @@
               </a:lnSpc>
             </a:pPr>
             <a:r>
-              <a:rPr lang="ru-RU" sz="2400" b="0" u="none" strike="noStrike">
+              <a:rPr lang="ru-RU" sz="2400" b="1" u="none" strike="noStrike">
                 <a:solidFill>
                   <a:schemeClr val="dk1"/>
                 </a:solidFill>
                 <a:effectLst/>
                 <a:uFillTx/>
-                <a:latin typeface="VK Sans Display DemiBold"/>
+                <a:latin typeface="+mj-lt"/>
               </a:rPr>
               <a:t>АР и КР: окупаемость компонента СПДС</a:t>
             </a:r>
@@ -25267,7 +25267,7 @@
               </a:solidFill>
               <a:effectLst/>
               <a:uFillTx/>
-              <a:latin typeface="Arial"/>
+              <a:latin typeface="+mn-lt"/>
             </a:endParaRPr>
           </a:p>
         </p:txBody>
@@ -25684,7 +25684,7 @@
               </a:solidFill>
               <a:effectLst/>
               <a:uFillTx/>
-              <a:latin typeface="Aptos"/>
+              <a:latin typeface="+mn-lt"/>
             </a:endParaRPr>
           </a:p>
         </p:txBody>
@@ -25717,11 +25717,11 @@
               </a:spcAft>
             </a:pPr>
             <a:r>
-              <a:rPr sz="1500" b="0">
+              <a:rPr sz="1500" b="1">
                 <a:solidFill>
                   <a:srgbClr val="1A1A1A"/>
                 </a:solidFill>
-                <a:latin typeface="VK Sans Display DemiBold"/>
+                <a:latin typeface="+mj-lt"/>
               </a:rPr>
               <a:t>Что автоматизируется</a:t>
             </a:r>
@@ -25757,7 +25757,7 @@
               <a:buClr>
                 <a:srgbClr val="0386FC"/>
               </a:buClr>
-              <a:buFont typeface="Manrope Medium"/>
+              <a:buFont typeface="+mn-lt"/>
               <a:buChar char="→"/>
             </a:pPr>
             <a:r>
@@ -25765,7 +25765,7 @@
                 <a:solidFill>
                   <a:srgbClr val="1A1A1A"/>
                 </a:solidFill>
-                <a:latin typeface="Manrope Medium"/>
+                <a:latin typeface="+mn-lt"/>
               </a:rPr>
               <a:t>Оформление по ГОСТ и СПДС параметрическими объектами</a:t>
             </a:r>
@@ -25778,7 +25778,7 @@
               <a:buClr>
                 <a:srgbClr val="0386FC"/>
               </a:buClr>
-              <a:buFont typeface="Manrope Medium"/>
+              <a:buFont typeface="+mn-lt"/>
               <a:buChar char="→"/>
             </a:pPr>
             <a:r>
@@ -25786,7 +25786,7 @@
                 <a:solidFill>
                   <a:srgbClr val="1A1A1A"/>
                 </a:solidFill>
-                <a:latin typeface="Manrope Medium"/>
+                <a:latin typeface="+mn-lt"/>
               </a:rPr>
               <a:t>Спецификации и ведомости — из данных чертежа</a:t>
             </a:r>
@@ -25799,7 +25799,7 @@
               <a:buClr>
                 <a:srgbClr val="0386FC"/>
               </a:buClr>
-              <a:buFont typeface="Manrope Medium"/>
+              <a:buFont typeface="+mn-lt"/>
               <a:buChar char="→"/>
             </a:pPr>
             <a:r>
@@ -25807,7 +25807,7 @@
                 <a:solidFill>
                   <a:srgbClr val="1A1A1A"/>
                 </a:solidFill>
-                <a:latin typeface="Manrope Medium"/>
+                <a:latin typeface="+mn-lt"/>
               </a:rPr>
               <a:t>Изменения автоматически попадают в таблицы и марки</a:t>
             </a:r>
@@ -25820,7 +25820,7 @@
               <a:buClr>
                 <a:srgbClr val="0386FC"/>
               </a:buClr>
-              <a:buFont typeface="Manrope Medium"/>
+              <a:buFont typeface="+mn-lt"/>
               <a:buChar char="→"/>
             </a:pPr>
             <a:r>
@@ -25828,7 +25828,7 @@
                 <a:solidFill>
                   <a:srgbClr val="1A1A1A"/>
                 </a:solidFill>
-                <a:latin typeface="Manrope Medium"/>
+                <a:latin typeface="+mn-lt"/>
               </a:rPr>
               <a:t>Готовые перечни и объёмы для сметного отдела</a:t>
             </a:r>
@@ -25905,11 +25905,11 @@
               </a:spcAft>
             </a:pPr>
             <a:r>
-              <a:rPr sz="1400" b="0">
+              <a:rPr sz="1400" b="1">
                 <a:solidFill>
                   <a:srgbClr val="1A1A1A"/>
                 </a:solidFill>
-                <a:latin typeface="VK Sans Display DemiBold"/>
+                <a:latin typeface="+mj-lt"/>
               </a:rPr>
               <a:t>Детский сад на 200 мест</a:t>
             </a:r>
@@ -25948,7 +25948,7 @@
                 <a:solidFill>
                   <a:srgbClr val="6B7280"/>
                 </a:solidFill>
-                <a:latin typeface="Manrope Medium"/>
+                <a:latin typeface="+mn-lt"/>
               </a:rPr>
               <a:t>Трудозатраты по разделу, ч</a:t>
             </a:r>
@@ -25983,29 +25983,29 @@
               </a:spcAft>
             </a:pPr>
             <a:r>
-              <a:rPr sz="1800" b="0">
+              <a:rPr sz="1800" b="1">
                 <a:solidFill>
                   <a:srgbClr val="6B7280"/>
                 </a:solidFill>
-                <a:latin typeface="VK Sans Display DemiBold"/>
+                <a:latin typeface="+mj-lt"/>
               </a:rPr>
               <a:t>368</a:t>
             </a:r>
             <a:r>
-              <a:rPr sz="1800" b="0">
+              <a:rPr sz="1800" b="1">
                 <a:solidFill>
                   <a:srgbClr val="6B7280"/>
                 </a:solidFill>
-                <a:latin typeface="VK Sans Display DemiBold"/>
+                <a:latin typeface="+mj-lt"/>
               </a:rPr>
               <a:t>  →  </a:t>
             </a:r>
             <a:r>
-              <a:rPr sz="1800" b="0">
+              <a:rPr sz="1800" b="1">
                 <a:solidFill>
                   <a:srgbClr val="0386FC"/>
                 </a:solidFill>
-                <a:latin typeface="VK Sans Display DemiBold"/>
+                <a:latin typeface="+mj-lt"/>
               </a:rPr>
               <a:t>288 ч</a:t>
             </a:r>
@@ -26044,7 +26044,7 @@
                 <a:solidFill>
                   <a:srgbClr val="1A1A1A"/>
                 </a:solidFill>
-                <a:latin typeface="Manrope Medium"/>
+                <a:latin typeface="+mn-lt"/>
               </a:rPr>
               <a:t>Экономия ФОТ в год</a:t>
             </a:r>
@@ -26083,7 +26083,7 @@
                 <a:solidFill>
                   <a:srgbClr val="1A1A1A"/>
                 </a:solidFill>
-                <a:latin typeface="Manrope Medium"/>
+                <a:latin typeface="+mn-lt"/>
               </a:rPr>
               <a:t>937 000 ₽</a:t>
             </a:r>
@@ -26122,7 +26122,7 @@
                 <a:solidFill>
                   <a:srgbClr val="1A1A1A"/>
                 </a:solidFill>
-                <a:latin typeface="Manrope Medium"/>
+                <a:latin typeface="+mn-lt"/>
               </a:rPr>
               <a:t>Экономия на правках</a:t>
             </a:r>
@@ -26161,7 +26161,7 @@
                 <a:solidFill>
                   <a:srgbClr val="1A1A1A"/>
                 </a:solidFill>
-                <a:latin typeface="Manrope Medium"/>
+                <a:latin typeface="+mn-lt"/>
               </a:rPr>
               <a:t>140 500 ₽</a:t>
             </a:r>
@@ -26200,7 +26200,7 @@
                 <a:solidFill>
                   <a:srgbClr val="1A1A1A"/>
                 </a:solidFill>
-                <a:latin typeface="Manrope Medium"/>
+                <a:latin typeface="+mn-lt"/>
               </a:rPr>
               <a:t>Затраты на внедрение</a:t>
             </a:r>
@@ -26239,7 +26239,7 @@
                 <a:solidFill>
                   <a:srgbClr val="1A1A1A"/>
                 </a:solidFill>
-                <a:latin typeface="Manrope Medium"/>
+                <a:latin typeface="+mn-lt"/>
               </a:rPr>
               <a:t>99 900 ₽</a:t>
             </a:r>
@@ -26320,7 +26320,7 @@
                 <a:solidFill>
                   <a:srgbClr val="6B7280"/>
                 </a:solidFill>
-                <a:latin typeface="Manrope Medium"/>
+                <a:latin typeface="+mn-lt"/>
               </a:rPr>
               <a:t>ROI за год</a:t>
             </a:r>
@@ -26355,11 +26355,11 @@
               </a:spcAft>
             </a:pPr>
             <a:r>
-              <a:rPr sz="2800" b="0">
+              <a:rPr sz="2800" b="1">
                 <a:solidFill>
                   <a:srgbClr val="0386FC"/>
                 </a:solidFill>
-                <a:latin typeface="VK Sans Display DemiBold"/>
+                <a:latin typeface="+mj-lt"/>
               </a:rPr>
               <a:t>978%</a:t>
             </a:r>
@@ -26398,7 +26398,7 @@
                 <a:solidFill>
                   <a:srgbClr val="6B7280"/>
                 </a:solidFill>
-                <a:latin typeface="Manrope Medium"/>
+                <a:latin typeface="+mn-lt"/>
               </a:rPr>
               <a:t>Эффект за год</a:t>
             </a:r>
@@ -26433,11 +26433,11 @@
               </a:spcAft>
             </a:pPr>
             <a:r>
-              <a:rPr sz="1400" b="0">
+              <a:rPr sz="1400" b="1">
                 <a:solidFill>
                   <a:srgbClr val="1A1A1A"/>
                 </a:solidFill>
-                <a:latin typeface="VK Sans Display DemiBold"/>
+                <a:latin typeface="+mj-lt"/>
               </a:rPr>
               <a:t>977 600 ₽</a:t>
             </a:r>
@@ -26476,7 +26476,7 @@
                 <a:solidFill>
                   <a:srgbClr val="6B7280"/>
                 </a:solidFill>
-                <a:latin typeface="Manrope Medium"/>
+                <a:latin typeface="+mn-lt"/>
               </a:rPr>
               <a:t>10 проектов в год, ставка 1 171 ₽/ч</a:t>
             </a:r>
@@ -26553,11 +26553,11 @@
               </a:spcAft>
             </a:pPr>
             <a:r>
-              <a:rPr sz="1400" b="0">
+              <a:rPr sz="1400" b="1">
                 <a:solidFill>
                   <a:srgbClr val="1A1A1A"/>
                 </a:solidFill>
-                <a:latin typeface="VK Sans Display DemiBold"/>
+                <a:latin typeface="+mj-lt"/>
               </a:rPr>
               <a:t>Котельная 25 Гкал/ч</a:t>
             </a:r>
@@ -26596,7 +26596,7 @@
                 <a:solidFill>
                   <a:srgbClr val="6B7280"/>
                 </a:solidFill>
-                <a:latin typeface="Manrope Medium"/>
+                <a:latin typeface="+mn-lt"/>
               </a:rPr>
               <a:t>Трудозатраты по разделу, ч</a:t>
             </a:r>
@@ -26631,29 +26631,29 @@
               </a:spcAft>
             </a:pPr>
             <a:r>
-              <a:rPr sz="1800" b="0">
+              <a:rPr sz="1800" b="1">
                 <a:solidFill>
                   <a:srgbClr val="6B7280"/>
                 </a:solidFill>
-                <a:latin typeface="VK Sans Display DemiBold"/>
+                <a:latin typeface="+mj-lt"/>
               </a:rPr>
               <a:t>352</a:t>
             </a:r>
             <a:r>
-              <a:rPr sz="1800" b="0">
+              <a:rPr sz="1800" b="1">
                 <a:solidFill>
                   <a:srgbClr val="6B7280"/>
                 </a:solidFill>
-                <a:latin typeface="VK Sans Display DemiBold"/>
+                <a:latin typeface="+mj-lt"/>
               </a:rPr>
               <a:t>  →  </a:t>
             </a:r>
             <a:r>
-              <a:rPr sz="1800" b="0">
+              <a:rPr sz="1800" b="1">
                 <a:solidFill>
                   <a:srgbClr val="0386FC"/>
                 </a:solidFill>
-                <a:latin typeface="VK Sans Display DemiBold"/>
+                <a:latin typeface="+mj-lt"/>
               </a:rPr>
               <a:t>248 ч</a:t>
             </a:r>
@@ -26692,7 +26692,7 @@
                 <a:solidFill>
                   <a:srgbClr val="1A1A1A"/>
                 </a:solidFill>
-                <a:latin typeface="Manrope Medium"/>
+                <a:latin typeface="+mn-lt"/>
               </a:rPr>
               <a:t>Экономия ФОТ в год</a:t>
             </a:r>
@@ -26731,7 +26731,7 @@
                 <a:solidFill>
                   <a:srgbClr val="1A1A1A"/>
                 </a:solidFill>
-                <a:latin typeface="Manrope Medium"/>
+                <a:latin typeface="+mn-lt"/>
               </a:rPr>
               <a:t>1 217 800 ₽</a:t>
             </a:r>
@@ -26770,7 +26770,7 @@
                 <a:solidFill>
                   <a:srgbClr val="1A1A1A"/>
                 </a:solidFill>
-                <a:latin typeface="Manrope Medium"/>
+                <a:latin typeface="+mn-lt"/>
               </a:rPr>
               <a:t>Экономия на правках</a:t>
             </a:r>
@@ -26809,7 +26809,7 @@
                 <a:solidFill>
                   <a:srgbClr val="1A1A1A"/>
                 </a:solidFill>
-                <a:latin typeface="Manrope Medium"/>
+                <a:latin typeface="+mn-lt"/>
               </a:rPr>
               <a:t>234 000 ₽</a:t>
             </a:r>
@@ -26848,7 +26848,7 @@
                 <a:solidFill>
                   <a:srgbClr val="1A1A1A"/>
                 </a:solidFill>
-                <a:latin typeface="Manrope Medium"/>
+                <a:latin typeface="+mn-lt"/>
               </a:rPr>
               <a:t>Затраты на внедрение</a:t>
             </a:r>
@@ -26887,7 +26887,7 @@
                 <a:solidFill>
                   <a:srgbClr val="1A1A1A"/>
                 </a:solidFill>
-                <a:latin typeface="Manrope Medium"/>
+                <a:latin typeface="+mn-lt"/>
               </a:rPr>
               <a:t>99 900 ₽</a:t>
             </a:r>
@@ -26968,7 +26968,7 @@
                 <a:solidFill>
                   <a:srgbClr val="6B7280"/>
                 </a:solidFill>
-                <a:latin typeface="Manrope Medium"/>
+                <a:latin typeface="+mn-lt"/>
               </a:rPr>
               <a:t>ROI за год</a:t>
             </a:r>
@@ -27003,11 +27003,11 @@
               </a:spcAft>
             </a:pPr>
             <a:r>
-              <a:rPr sz="2800" b="0">
+              <a:rPr sz="2800" b="1">
                 <a:solidFill>
                   <a:srgbClr val="0386FC"/>
                 </a:solidFill>
-                <a:latin typeface="VK Sans Display DemiBold"/>
+                <a:latin typeface="+mj-lt"/>
               </a:rPr>
               <a:t>1 353%</a:t>
             </a:r>
@@ -27046,7 +27046,7 @@
                 <a:solidFill>
                   <a:srgbClr val="6B7280"/>
                 </a:solidFill>
-                <a:latin typeface="Manrope Medium"/>
+                <a:latin typeface="+mn-lt"/>
               </a:rPr>
               <a:t>Эффект за год</a:t>
             </a:r>
@@ -27081,11 +27081,11 @@
               </a:spcAft>
             </a:pPr>
             <a:r>
-              <a:rPr sz="1400" b="0">
+              <a:rPr sz="1400" b="1">
                 <a:solidFill>
                   <a:srgbClr val="1A1A1A"/>
                 </a:solidFill>
-                <a:latin typeface="VK Sans Display DemiBold"/>
+                <a:latin typeface="+mj-lt"/>
               </a:rPr>
               <a:t>1 351 900 ₽</a:t>
             </a:r>
@@ -27124,7 +27124,7 @@
                 <a:solidFill>
                   <a:srgbClr val="6B7280"/>
                 </a:solidFill>
-                <a:latin typeface="Manrope Medium"/>
+                <a:latin typeface="+mn-lt"/>
               </a:rPr>
               <a:t>10 проектов в год, ставка 1 171 ₽/ч</a:t>
             </a:r>
@@ -27163,7 +27163,7 @@
                 <a:solidFill>
                   <a:srgbClr val="6B7280"/>
                 </a:solidFill>
-                <a:latin typeface="Manrope Medium"/>
+                <a:latin typeface="+mn-lt"/>
               </a:rPr>
               <a:t>Платформа nanoCAD с компонентом СПДС — 69 900 ₽; обучение — 30 000 ₽ (платформа + компонент). Окупаемость — 1–2 проекта.</a:t>
             </a:r>
@@ -27216,7 +27216,7 @@
                 <a:solidFill>
                   <a:srgbClr val="FFFFFF"/>
                 </a:solidFill>
-                <a:latin typeface="Roboto Light"/>
+                <a:latin typeface="Manrope"/>
               </a:rPr>
               <a:t>ВЫЗОВЫ</a:t>
             </a:r>
@@ -27269,7 +27269,7 @@
                 <a:solidFill>
                   <a:srgbClr val="FFFFFF"/>
                 </a:solidFill>
-                <a:latin typeface="Roboto Light"/>
+                <a:latin typeface="Manrope"/>
               </a:rPr>
               <a:t>ЭКОНОМИЯ</a:t>
             </a:r>
@@ -27324,7 +27324,7 @@
                 <a:solidFill>
                   <a:srgbClr val="0386FC"/>
                 </a:solidFill>
-                <a:latin typeface="Roboto Light"/>
+                <a:latin typeface="Manrope"/>
               </a:rPr>
               <a:t>ОКУПАЕМОСТЬ</a:t>
             </a:r>
@@ -27377,7 +27377,7 @@
                 <a:solidFill>
                   <a:srgbClr val="FFFFFF"/>
                 </a:solidFill>
-                <a:latin typeface="Roboto Light"/>
+                <a:latin typeface="Manrope"/>
               </a:rPr>
               <a:t>КЕЙСЫ</a:t>
             </a:r>
@@ -27430,7 +27430,7 @@
                 <a:solidFill>
                   <a:srgbClr val="FFFFFF"/>
                 </a:solidFill>
-                <a:latin typeface="Roboto Light"/>
+                <a:latin typeface="Manrope"/>
               </a:rPr>
               <a:t>НОРМАСОФТ</a:t>
             </a:r>
@@ -27483,7 +27483,7 @@
                 <a:solidFill>
                   <a:srgbClr val="FFFFFF"/>
                 </a:solidFill>
-                <a:latin typeface="Roboto Light"/>
+                <a:latin typeface="Manrope"/>
               </a:rPr>
               <a:t>КОНТАКТЫ</a:t>
             </a:r>
@@ -27569,7 +27569,7 @@
               </a:solidFill>
               <a:effectLst/>
               <a:uFillTx/>
-              <a:latin typeface="Aptos"/>
+              <a:latin typeface="+mn-lt"/>
             </a:endParaRPr>
           </a:p>
         </p:txBody>
@@ -27637,13 +27637,13 @@
               </a:lnSpc>
             </a:pPr>
             <a:r>
-              <a:rPr lang="ru-RU" sz="2400" b="0" u="none" strike="noStrike">
+              <a:rPr lang="ru-RU" sz="2400" b="1" u="none" strike="noStrike">
                 <a:solidFill>
                   <a:schemeClr val="dk1"/>
                 </a:solidFill>
                 <a:effectLst/>
                 <a:uFillTx/>
-                <a:latin typeface="VK Sans Display DemiBold"/>
+                <a:latin typeface="+mj-lt"/>
               </a:rPr>
               <a:t>Электро: окупаемость nanoCAD BIM Электро</a:t>
             </a:r>
@@ -27653,7 +27653,7 @@
               </a:solidFill>
               <a:effectLst/>
               <a:uFillTx/>
-              <a:latin typeface="Arial"/>
+              <a:latin typeface="+mn-lt"/>
             </a:endParaRPr>
           </a:p>
         </p:txBody>
@@ -28070,7 +28070,7 @@
               </a:solidFill>
               <a:effectLst/>
               <a:uFillTx/>
-              <a:latin typeface="Aptos"/>
+              <a:latin typeface="+mn-lt"/>
             </a:endParaRPr>
           </a:p>
         </p:txBody>
@@ -28103,11 +28103,11 @@
               </a:spcAft>
             </a:pPr>
             <a:r>
-              <a:rPr sz="1500" b="0">
+              <a:rPr sz="1500" b="1">
                 <a:solidFill>
                   <a:srgbClr val="1A1A1A"/>
                 </a:solidFill>
-                <a:latin typeface="VK Sans Display DemiBold"/>
+                <a:latin typeface="+mj-lt"/>
               </a:rPr>
               <a:t>Что автоматизируется</a:t>
             </a:r>
@@ -28143,7 +28143,7 @@
               <a:buClr>
                 <a:srgbClr val="0386FC"/>
               </a:buClr>
-              <a:buFont typeface="Manrope Medium"/>
+              <a:buFont typeface="+mn-lt"/>
               <a:buChar char="→"/>
             </a:pPr>
             <a:r>
@@ -28151,7 +28151,7 @@
                 <a:solidFill>
                   <a:srgbClr val="1A1A1A"/>
                 </a:solidFill>
-                <a:latin typeface="Manrope Medium"/>
+                <a:latin typeface="+mn-lt"/>
               </a:rPr>
               <a:t>Электротехнические и светотехнические расчёты</a:t>
             </a:r>
@@ -28164,7 +28164,7 @@
               <a:buClr>
                 <a:srgbClr val="0386FC"/>
               </a:buClr>
-              <a:buFont typeface="Manrope Medium"/>
+              <a:buFont typeface="+mn-lt"/>
               <a:buChar char="→"/>
             </a:pPr>
             <a:r>
@@ -28172,7 +28172,7 @@
                 <a:solidFill>
                   <a:srgbClr val="1A1A1A"/>
                 </a:solidFill>
-                <a:latin typeface="Manrope Medium"/>
+                <a:latin typeface="+mn-lt"/>
               </a:rPr>
               <a:t>Трассировка сетей и кабельные журналы</a:t>
             </a:r>
@@ -28185,7 +28185,7 @@
               <a:buClr>
                 <a:srgbClr val="0386FC"/>
               </a:buClr>
-              <a:buFont typeface="Manrope Medium"/>
+              <a:buFont typeface="+mn-lt"/>
               <a:buChar char="→"/>
             </a:pPr>
             <a:r>
@@ -28193,7 +28193,7 @@
                 <a:solidFill>
                   <a:srgbClr val="1A1A1A"/>
                 </a:solidFill>
-                <a:latin typeface="Manrope Medium"/>
+                <a:latin typeface="+mn-lt"/>
               </a:rPr>
               <a:t>Щиты, выбор аппаратов, однолинейные схемы</a:t>
             </a:r>
@@ -28206,7 +28206,7 @@
               <a:buClr>
                 <a:srgbClr val="0386FC"/>
               </a:buClr>
-              <a:buFont typeface="Manrope Medium"/>
+              <a:buFont typeface="+mn-lt"/>
               <a:buChar char="→"/>
             </a:pPr>
             <a:r>
@@ -28214,7 +28214,7 @@
                 <a:solidFill>
                   <a:srgbClr val="1A1A1A"/>
                 </a:solidFill>
-                <a:latin typeface="Manrope Medium"/>
+                <a:latin typeface="+mn-lt"/>
               </a:rPr>
               <a:t>Спецификации оборудования по ГОСТ</a:t>
             </a:r>
@@ -28291,11 +28291,11 @@
               </a:spcAft>
             </a:pPr>
             <a:r>
-              <a:rPr sz="1400" b="0">
+              <a:rPr sz="1400" b="1">
                 <a:solidFill>
                   <a:srgbClr val="1A1A1A"/>
                 </a:solidFill>
-                <a:latin typeface="VK Sans Display DemiBold"/>
+                <a:latin typeface="+mj-lt"/>
               </a:rPr>
               <a:t>Детский сад на 200 мест</a:t>
             </a:r>
@@ -28334,7 +28334,7 @@
                 <a:solidFill>
                   <a:srgbClr val="6B7280"/>
                 </a:solidFill>
-                <a:latin typeface="Manrope Medium"/>
+                <a:latin typeface="+mn-lt"/>
               </a:rPr>
               <a:t>Трудозатраты по разделу, ч</a:t>
             </a:r>
@@ -28369,29 +28369,29 @@
               </a:spcAft>
             </a:pPr>
             <a:r>
-              <a:rPr sz="1800" b="0">
+              <a:rPr sz="1800" b="1">
                 <a:solidFill>
                   <a:srgbClr val="6B7280"/>
                 </a:solidFill>
-                <a:latin typeface="VK Sans Display DemiBold"/>
+                <a:latin typeface="+mj-lt"/>
               </a:rPr>
               <a:t>160</a:t>
             </a:r>
             <a:r>
-              <a:rPr sz="1800" b="0">
+              <a:rPr sz="1800" b="1">
                 <a:solidFill>
                   <a:srgbClr val="6B7280"/>
                 </a:solidFill>
-                <a:latin typeface="VK Sans Display DemiBold"/>
+                <a:latin typeface="+mj-lt"/>
               </a:rPr>
               <a:t>  →  </a:t>
             </a:r>
             <a:r>
-              <a:rPr sz="1800" b="0">
+              <a:rPr sz="1800" b="1">
                 <a:solidFill>
                   <a:srgbClr val="0386FC"/>
                 </a:solidFill>
-                <a:latin typeface="VK Sans Display DemiBold"/>
+                <a:latin typeface="+mj-lt"/>
               </a:rPr>
               <a:t>112 ч</a:t>
             </a:r>
@@ -28430,7 +28430,7 @@
                 <a:solidFill>
                   <a:srgbClr val="1A1A1A"/>
                 </a:solidFill>
-                <a:latin typeface="Manrope Medium"/>
+                <a:latin typeface="+mn-lt"/>
               </a:rPr>
               <a:t>Экономия ФОТ в год</a:t>
             </a:r>
@@ -28469,7 +28469,7 @@
                 <a:solidFill>
                   <a:srgbClr val="1A1A1A"/>
                 </a:solidFill>
-                <a:latin typeface="Manrope Medium"/>
+                <a:latin typeface="+mn-lt"/>
               </a:rPr>
               <a:t>562 000 ₽</a:t>
             </a:r>
@@ -28508,7 +28508,7 @@
                 <a:solidFill>
                   <a:srgbClr val="1A1A1A"/>
                 </a:solidFill>
-                <a:latin typeface="Manrope Medium"/>
+                <a:latin typeface="+mn-lt"/>
               </a:rPr>
               <a:t>Экономия на правках</a:t>
             </a:r>
@@ -28547,7 +28547,7 @@
                 <a:solidFill>
                   <a:srgbClr val="1A1A1A"/>
                 </a:solidFill>
-                <a:latin typeface="Manrope Medium"/>
+                <a:latin typeface="+mn-lt"/>
               </a:rPr>
               <a:t>117 000 ₽</a:t>
             </a:r>
@@ -28586,7 +28586,7 @@
                 <a:solidFill>
                   <a:srgbClr val="1A1A1A"/>
                 </a:solidFill>
-                <a:latin typeface="Manrope Medium"/>
+                <a:latin typeface="+mn-lt"/>
               </a:rPr>
               <a:t>Затраты на внедрение</a:t>
             </a:r>
@@ -28625,7 +28625,7 @@
                 <a:solidFill>
                   <a:srgbClr val="1A1A1A"/>
                 </a:solidFill>
-                <a:latin typeface="Manrope Medium"/>
+                <a:latin typeface="+mn-lt"/>
               </a:rPr>
               <a:t>122 000 ₽</a:t>
             </a:r>
@@ -28706,7 +28706,7 @@
                 <a:solidFill>
                   <a:srgbClr val="6B7280"/>
                 </a:solidFill>
-                <a:latin typeface="Manrope Medium"/>
+                <a:latin typeface="+mn-lt"/>
               </a:rPr>
               <a:t>ROI за год</a:t>
             </a:r>
@@ -28741,11 +28741,11 @@
               </a:spcAft>
             </a:pPr>
             <a:r>
-              <a:rPr sz="2800" b="0">
+              <a:rPr sz="2800" b="1">
                 <a:solidFill>
                   <a:srgbClr val="0386FC"/>
                 </a:solidFill>
-                <a:latin typeface="VK Sans Display DemiBold"/>
+                <a:latin typeface="+mj-lt"/>
               </a:rPr>
               <a:t>457%</a:t>
             </a:r>
@@ -28784,7 +28784,7 @@
                 <a:solidFill>
                   <a:srgbClr val="6B7280"/>
                 </a:solidFill>
-                <a:latin typeface="Manrope Medium"/>
+                <a:latin typeface="+mn-lt"/>
               </a:rPr>
               <a:t>Эффект за год</a:t>
             </a:r>
@@ -28819,11 +28819,11 @@
               </a:spcAft>
             </a:pPr>
             <a:r>
-              <a:rPr sz="1400" b="0">
+              <a:rPr sz="1400" b="1">
                 <a:solidFill>
                   <a:srgbClr val="1A1A1A"/>
                 </a:solidFill>
-                <a:latin typeface="VK Sans Display DemiBold"/>
+                <a:latin typeface="+mj-lt"/>
               </a:rPr>
               <a:t>557 000 ₽</a:t>
             </a:r>
@@ -28862,7 +28862,7 @@
                 <a:solidFill>
                   <a:srgbClr val="6B7280"/>
                 </a:solidFill>
-                <a:latin typeface="Manrope Medium"/>
+                <a:latin typeface="+mn-lt"/>
               </a:rPr>
               <a:t>10 проектов в год, ставка 1 171 ₽/ч</a:t>
             </a:r>
@@ -28939,11 +28939,11 @@
               </a:spcAft>
             </a:pPr>
             <a:r>
-              <a:rPr sz="1400" b="0">
+              <a:rPr sz="1400" b="1">
                 <a:solidFill>
                   <a:srgbClr val="1A1A1A"/>
                 </a:solidFill>
-                <a:latin typeface="VK Sans Display DemiBold"/>
+                <a:latin typeface="+mj-lt"/>
               </a:rPr>
               <a:t>Котельная 25 Гкал/ч</a:t>
             </a:r>
@@ -28982,7 +28982,7 @@
                 <a:solidFill>
                   <a:srgbClr val="6B7280"/>
                 </a:solidFill>
-                <a:latin typeface="Manrope Medium"/>
+                <a:latin typeface="+mn-lt"/>
               </a:rPr>
               <a:t>Трудозатраты по разделу, ч</a:t>
             </a:r>
@@ -29017,29 +29017,29 @@
               </a:spcAft>
             </a:pPr>
             <a:r>
-              <a:rPr sz="1800" b="0">
+              <a:rPr sz="1800" b="1">
                 <a:solidFill>
                   <a:srgbClr val="6B7280"/>
                 </a:solidFill>
-                <a:latin typeface="VK Sans Display DemiBold"/>
+                <a:latin typeface="+mj-lt"/>
               </a:rPr>
               <a:t>320</a:t>
             </a:r>
             <a:r>
-              <a:rPr sz="1800" b="0">
+              <a:rPr sz="1800" b="1">
                 <a:solidFill>
                   <a:srgbClr val="6B7280"/>
                 </a:solidFill>
-                <a:latin typeface="VK Sans Display DemiBold"/>
+                <a:latin typeface="+mj-lt"/>
               </a:rPr>
               <a:t>  →  </a:t>
             </a:r>
             <a:r>
-              <a:rPr sz="1800" b="0">
+              <a:rPr sz="1800" b="1">
                 <a:solidFill>
                   <a:srgbClr val="0386FC"/>
                 </a:solidFill>
-                <a:latin typeface="VK Sans Display DemiBold"/>
+                <a:latin typeface="+mj-lt"/>
               </a:rPr>
               <a:t>240 ч</a:t>
             </a:r>
@@ -29078,7 +29078,7 @@
                 <a:solidFill>
                   <a:srgbClr val="1A1A1A"/>
                 </a:solidFill>
-                <a:latin typeface="Manrope Medium"/>
+                <a:latin typeface="+mn-lt"/>
               </a:rPr>
               <a:t>Экономия ФОТ в год</a:t>
             </a:r>
@@ -29117,7 +29117,7 @@
                 <a:solidFill>
                   <a:srgbClr val="1A1A1A"/>
                 </a:solidFill>
-                <a:latin typeface="Manrope Medium"/>
+                <a:latin typeface="+mn-lt"/>
               </a:rPr>
               <a:t>936 800 ₽</a:t>
             </a:r>
@@ -29156,7 +29156,7 @@
                 <a:solidFill>
                   <a:srgbClr val="1A1A1A"/>
                 </a:solidFill>
-                <a:latin typeface="Manrope Medium"/>
+                <a:latin typeface="+mn-lt"/>
               </a:rPr>
               <a:t>Экономия на правках</a:t>
             </a:r>
@@ -29195,7 +29195,7 @@
                 <a:solidFill>
                   <a:srgbClr val="1A1A1A"/>
                 </a:solidFill>
-                <a:latin typeface="Manrope Medium"/>
+                <a:latin typeface="+mn-lt"/>
               </a:rPr>
               <a:t>234 000 ₽</a:t>
             </a:r>
@@ -29234,7 +29234,7 @@
                 <a:solidFill>
                   <a:srgbClr val="1A1A1A"/>
                 </a:solidFill>
-                <a:latin typeface="Manrope Medium"/>
+                <a:latin typeface="+mn-lt"/>
               </a:rPr>
               <a:t>Затраты на внедрение</a:t>
             </a:r>
@@ -29273,7 +29273,7 @@
                 <a:solidFill>
                   <a:srgbClr val="1A1A1A"/>
                 </a:solidFill>
-                <a:latin typeface="Manrope Medium"/>
+                <a:latin typeface="+mn-lt"/>
               </a:rPr>
               <a:t>122 000 ₽</a:t>
             </a:r>
@@ -29354,7 +29354,7 @@
                 <a:solidFill>
                   <a:srgbClr val="6B7280"/>
                 </a:solidFill>
-                <a:latin typeface="Manrope Medium"/>
+                <a:latin typeface="+mn-lt"/>
               </a:rPr>
               <a:t>ROI за год</a:t>
             </a:r>
@@ -29389,11 +29389,11 @@
               </a:spcAft>
             </a:pPr>
             <a:r>
-              <a:rPr sz="2800" b="0">
+              <a:rPr sz="2800" b="1">
                 <a:solidFill>
                   <a:srgbClr val="0386FC"/>
                 </a:solidFill>
-                <a:latin typeface="VK Sans Display DemiBold"/>
+                <a:latin typeface="+mj-lt"/>
               </a:rPr>
               <a:t>860%</a:t>
             </a:r>
@@ -29432,7 +29432,7 @@
                 <a:solidFill>
                   <a:srgbClr val="6B7280"/>
                 </a:solidFill>
-                <a:latin typeface="Manrope Medium"/>
+                <a:latin typeface="+mn-lt"/>
               </a:rPr>
               <a:t>Эффект за год</a:t>
             </a:r>
@@ -29467,11 +29467,11 @@
               </a:spcAft>
             </a:pPr>
             <a:r>
-              <a:rPr sz="1400" b="0">
+              <a:rPr sz="1400" b="1">
                 <a:solidFill>
                   <a:srgbClr val="1A1A1A"/>
                 </a:solidFill>
-                <a:latin typeface="VK Sans Display DemiBold"/>
+                <a:latin typeface="+mj-lt"/>
               </a:rPr>
               <a:t>1 048 800 ₽</a:t>
             </a:r>
@@ -29510,7 +29510,7 @@
                 <a:solidFill>
                   <a:srgbClr val="6B7280"/>
                 </a:solidFill>
-                <a:latin typeface="Manrope Medium"/>
+                <a:latin typeface="+mn-lt"/>
               </a:rPr>
               <a:t>10 проектов в год, ставка 1 171 ₽/ч</a:t>
             </a:r>
@@ -29549,7 +29549,7 @@
                 <a:solidFill>
                   <a:srgbClr val="6B7280"/>
                 </a:solidFill>
-                <a:latin typeface="Manrope Medium"/>
+                <a:latin typeface="+mn-lt"/>
               </a:rPr>
               <a:t>nanoCAD BIM Электро — 71 500 ₽ + Платформа nanoCAD — 25 400 ₽; обучение — 25 100 ₽. Окупаемость — 2–3 проекта.</a:t>
             </a:r>
@@ -29602,7 +29602,7 @@
                 <a:solidFill>
                   <a:srgbClr val="FFFFFF"/>
                 </a:solidFill>
-                <a:latin typeface="Roboto Light"/>
+                <a:latin typeface="Manrope"/>
               </a:rPr>
               <a:t>ВЫЗОВЫ</a:t>
             </a:r>
@@ -29655,7 +29655,7 @@
                 <a:solidFill>
                   <a:srgbClr val="FFFFFF"/>
                 </a:solidFill>
-                <a:latin typeface="Roboto Light"/>
+                <a:latin typeface="Manrope"/>
               </a:rPr>
               <a:t>ЭКОНОМИЯ</a:t>
             </a:r>
@@ -29710,7 +29710,7 @@
                 <a:solidFill>
                   <a:srgbClr val="0386FC"/>
                 </a:solidFill>
-                <a:latin typeface="Roboto Light"/>
+                <a:latin typeface="Manrope"/>
               </a:rPr>
               <a:t>ОКУПАЕМОСТЬ</a:t>
             </a:r>
@@ -29763,7 +29763,7 @@
                 <a:solidFill>
                   <a:srgbClr val="FFFFFF"/>
                 </a:solidFill>
-                <a:latin typeface="Roboto Light"/>
+                <a:latin typeface="Manrope"/>
               </a:rPr>
               <a:t>КЕЙСЫ</a:t>
             </a:r>
@@ -29816,7 +29816,7 @@
                 <a:solidFill>
                   <a:srgbClr val="FFFFFF"/>
                 </a:solidFill>
-                <a:latin typeface="Roboto Light"/>
+                <a:latin typeface="Manrope"/>
               </a:rPr>
               <a:t>НОРМАСОФТ</a:t>
             </a:r>
@@ -29869,7 +29869,7 @@
                 <a:solidFill>
                   <a:srgbClr val="FFFFFF"/>
                 </a:solidFill>
-                <a:latin typeface="Roboto Light"/>
+                <a:latin typeface="Manrope"/>
               </a:rPr>
               <a:t>КОНТАКТЫ</a:t>
             </a:r>
@@ -29932,7 +29932,7 @@
     </a:clrScheme>
     <a:fontScheme name="Стандартная">
       <a:majorFont>
-        <a:latin typeface="Aptos Display" panose="02110004020202020204" pitchFamily="0" charset="1"/>
+        <a:latin typeface="Manrope"/>
         <a:ea typeface=""/>
         <a:cs typeface=""/>
         <a:font script="Jpan" typeface="游ゴシック Light"/>
@@ -29984,7 +29984,7 @@
         <a:font script="Tfng" typeface="Ebrima"/>
       </a:majorFont>
       <a:minorFont>
-        <a:latin typeface="Aptos" panose="02110004020202020204" pitchFamily="0" charset="1"/>
+        <a:latin typeface="Manrope Medium"/>
         <a:ea typeface=""/>
         <a:cs typeface=""/>
         <a:font script="Jpan" typeface="游ゴシック"/>
@@ -30198,7 +30198,7 @@
     </a:clrScheme>
     <a:fontScheme name="Office">
       <a:majorFont>
-        <a:latin typeface="Calibri"/>
+        <a:latin typeface="Manrope"/>
         <a:ea typeface=""/>
         <a:cs typeface=""/>
         <a:font script="Jpan" typeface="ＭＳ Ｐゴシック"/>
@@ -30233,7 +30233,7 @@
         <a:font script="Geor" typeface="Sylfaen"/>
       </a:majorFont>
       <a:minorFont>
-        <a:latin typeface="Calibri"/>
+        <a:latin typeface="Manrope Medium"/>
         <a:ea typeface=""/>
         <a:cs typeface=""/>
         <a:font script="Jpan" typeface="ＭＳ Ｐゴシック"/>
